--- a/docs/Micro-SIEM.pptx
+++ b/docs/Micro-SIEM.pptx
@@ -2568,6 +2568,198 @@
       </p:grpSpPr>
       <p:sp>
         <p:nvSpPr>
+          <p:cNvPr id="115" name="Motif 115"/>
+          <p:cNvSpPr/>
+          <p:nvPr/>
+        </p:nvSpPr>
+        <p:spPr>
+          <a:xfrm>
+            <a:off x="8549640" y="4526280"/>
+            <a:ext cx="1645920" cy="1645920"/>
+          </a:xfrm>
+          <a:prstGeom prst="ellipse">
+            <a:avLst/>
+          </a:prstGeom>
+          <a:noFill/>
+          <a:ln w="12700">
+            <a:solidFill>
+              <a:srgbClr val="1FA2A6">
+                <a:alpha val="35000"/>
+              </a:srgbClr>
+            </a:solidFill>
+          </a:ln>
+        </p:spPr>
+      </p:sp>
+      <p:sp>
+        <p:nvSpPr>
+          <p:cNvPr id="116" name="Motif 116"/>
+          <p:cNvSpPr/>
+          <p:nvPr/>
+        </p:nvSpPr>
+        <p:spPr>
+          <a:xfrm>
+            <a:off x="8001000" y="3977640"/>
+            <a:ext cx="2743200" cy="2743200"/>
+          </a:xfrm>
+          <a:prstGeom prst="ellipse">
+            <a:avLst/>
+          </a:prstGeom>
+          <a:noFill/>
+          <a:ln w="12700">
+            <a:solidFill>
+              <a:srgbClr val="1FA2A6">
+                <a:alpha val="25000"/>
+              </a:srgbClr>
+            </a:solidFill>
+          </a:ln>
+        </p:spPr>
+      </p:sp>
+      <p:sp>
+        <p:nvSpPr>
+          <p:cNvPr id="117" name="Motif 117"/>
+          <p:cNvSpPr/>
+          <p:nvPr/>
+        </p:nvSpPr>
+        <p:spPr>
+          <a:xfrm>
+            <a:off x="7452360" y="3429000"/>
+            <a:ext cx="3840480" cy="3840480"/>
+          </a:xfrm>
+          <a:prstGeom prst="ellipse">
+            <a:avLst/>
+          </a:prstGeom>
+          <a:noFill/>
+          <a:ln w="12700">
+            <a:solidFill>
+              <a:srgbClr val="1FA2A6">
+                <a:alpha val="16000"/>
+              </a:srgbClr>
+            </a:solidFill>
+          </a:ln>
+        </p:spPr>
+      </p:sp>
+      <p:sp>
+        <p:nvSpPr>
+          <p:cNvPr id="118" name="Motif 118"/>
+          <p:cNvSpPr/>
+          <p:nvPr/>
+        </p:nvSpPr>
+        <p:spPr>
+          <a:xfrm>
+            <a:off x="6903720" y="2880360"/>
+            <a:ext cx="4937760" cy="4937760"/>
+          </a:xfrm>
+          <a:prstGeom prst="ellipse">
+            <a:avLst/>
+          </a:prstGeom>
+          <a:noFill/>
+          <a:ln w="12700">
+            <a:solidFill>
+              <a:srgbClr val="1FA2A6">
+                <a:alpha val="10000"/>
+              </a:srgbClr>
+            </a:solidFill>
+          </a:ln>
+        </p:spPr>
+      </p:sp>
+      <p:sp>
+        <p:nvSpPr>
+          <p:cNvPr id="119" name="Motif 119"/>
+          <p:cNvSpPr/>
+          <p:nvPr/>
+        </p:nvSpPr>
+        <p:spPr>
+          <a:xfrm>
+            <a:off x="-1051560" y="-1005840"/>
+            <a:ext cx="1645920" cy="1645920"/>
+          </a:xfrm>
+          <a:prstGeom prst="ellipse">
+            <a:avLst/>
+          </a:prstGeom>
+          <a:noFill/>
+          <a:ln w="12700">
+            <a:solidFill>
+              <a:srgbClr val="1FA2A6">
+                <a:alpha val="35000"/>
+              </a:srgbClr>
+            </a:solidFill>
+          </a:ln>
+        </p:spPr>
+      </p:sp>
+      <p:sp>
+        <p:nvSpPr>
+          <p:cNvPr id="120" name="Motif 120"/>
+          <p:cNvSpPr/>
+          <p:nvPr/>
+        </p:nvSpPr>
+        <p:spPr>
+          <a:xfrm>
+            <a:off x="-1600200" y="-1554480"/>
+            <a:ext cx="2743200" cy="2743200"/>
+          </a:xfrm>
+          <a:prstGeom prst="ellipse">
+            <a:avLst/>
+          </a:prstGeom>
+          <a:noFill/>
+          <a:ln w="12700">
+            <a:solidFill>
+              <a:srgbClr val="1FA2A6">
+                <a:alpha val="25000"/>
+              </a:srgbClr>
+            </a:solidFill>
+          </a:ln>
+        </p:spPr>
+      </p:sp>
+      <p:sp>
+        <p:nvSpPr>
+          <p:cNvPr id="121" name="Motif 121"/>
+          <p:cNvSpPr/>
+          <p:nvPr/>
+        </p:nvSpPr>
+        <p:spPr>
+          <a:xfrm>
+            <a:off x="-2148840" y="-2103120"/>
+            <a:ext cx="3840480" cy="3840480"/>
+          </a:xfrm>
+          <a:prstGeom prst="ellipse">
+            <a:avLst/>
+          </a:prstGeom>
+          <a:noFill/>
+          <a:ln w="12700">
+            <a:solidFill>
+              <a:srgbClr val="1FA2A6">
+                <a:alpha val="16000"/>
+              </a:srgbClr>
+            </a:solidFill>
+          </a:ln>
+        </p:spPr>
+      </p:sp>
+      <p:sp>
+        <p:nvSpPr>
+          <p:cNvPr id="122" name="Motif 122"/>
+          <p:cNvSpPr/>
+          <p:nvPr/>
+        </p:nvSpPr>
+        <p:spPr>
+          <a:xfrm>
+            <a:off x="-2697480" y="-2651760"/>
+            <a:ext cx="4937760" cy="4937760"/>
+          </a:xfrm>
+          <a:prstGeom prst="ellipse">
+            <a:avLst/>
+          </a:prstGeom>
+          <a:noFill/>
+          <a:ln w="12700">
+            <a:solidFill>
+              <a:srgbClr val="1FA2A6">
+                <a:alpha val="10000"/>
+              </a:srgbClr>
+            </a:solidFill>
+          </a:ln>
+        </p:spPr>
+      </p:sp>
+      <p:sp>
+        <p:nvSpPr>
           <p:cNvPr id="2" name="Shape 0"/>
           <p:cNvSpPr/>
           <p:nvPr/>
@@ -3093,6 +3285,311 @@
           <a:chExt cx="0" cy="0"/>
         </a:xfrm>
       </p:grpSpPr>
+      <p:cxnSp>
+        <p:nvCxnSpPr>
+          <p:cNvPr id="112" name="Motif 112"/>
+          <p:cNvCxnSpPr/>
+          <p:nvPr/>
+        </p:nvCxnSpPr>
+        <p:spPr>
+          <a:xfrm flipV="1">
+            <a:off x="7501738" y="340157"/>
+            <a:ext cx="320954" cy="263347"/>
+          </a:xfrm>
+          <a:prstGeom prst="line">
+            <a:avLst/>
+          </a:prstGeom>
+          <a:ln w="9525">
+            <a:solidFill>
+              <a:srgbClr val="0B1F33">
+                <a:alpha val="40000"/>
+              </a:srgbClr>
+            </a:solidFill>
+          </a:ln>
+        </p:spPr>
+      </p:cxnSp>
+      <p:cxnSp>
+        <p:nvCxnSpPr>
+          <p:cNvPr id="113" name="Motif 113"/>
+          <p:cNvCxnSpPr/>
+          <p:nvPr/>
+        </p:nvCxnSpPr>
+        <p:spPr>
+          <a:xfrm>
+            <a:off x="7501738" y="603504"/>
+            <a:ext cx="395021" cy="142646"/>
+          </a:xfrm>
+          <a:prstGeom prst="line">
+            <a:avLst/>
+          </a:prstGeom>
+          <a:ln w="9525">
+            <a:solidFill>
+              <a:srgbClr val="0B1F33">
+                <a:alpha val="40000"/>
+              </a:srgbClr>
+            </a:solidFill>
+          </a:ln>
+        </p:spPr>
+      </p:cxnSp>
+      <p:cxnSp>
+        <p:nvCxnSpPr>
+          <p:cNvPr id="114" name="Motif 114"/>
+          <p:cNvCxnSpPr/>
+          <p:nvPr/>
+        </p:nvCxnSpPr>
+        <p:spPr>
+          <a:xfrm>
+            <a:off x="7822692" y="340157"/>
+            <a:ext cx="370332" cy="186538"/>
+          </a:xfrm>
+          <a:prstGeom prst="line">
+            <a:avLst/>
+          </a:prstGeom>
+          <a:ln w="9525">
+            <a:solidFill>
+              <a:srgbClr val="0B1F33">
+                <a:alpha val="40000"/>
+              </a:srgbClr>
+            </a:solidFill>
+          </a:ln>
+        </p:spPr>
+      </p:cxnSp>
+      <p:cxnSp>
+        <p:nvCxnSpPr>
+          <p:cNvPr id="115" name="Motif 115"/>
+          <p:cNvCxnSpPr/>
+          <p:nvPr/>
+        </p:nvCxnSpPr>
+        <p:spPr>
+          <a:xfrm flipV="1">
+            <a:off x="7896758" y="526694"/>
+            <a:ext cx="296266" cy="219456"/>
+          </a:xfrm>
+          <a:prstGeom prst="line">
+            <a:avLst/>
+          </a:prstGeom>
+          <a:ln w="9525">
+            <a:solidFill>
+              <a:srgbClr val="0B1F33">
+                <a:alpha val="40000"/>
+              </a:srgbClr>
+            </a:solidFill>
+          </a:ln>
+        </p:spPr>
+      </p:cxnSp>
+      <p:cxnSp>
+        <p:nvCxnSpPr>
+          <p:cNvPr id="116" name="Motif 116"/>
+          <p:cNvCxnSpPr/>
+          <p:nvPr/>
+        </p:nvCxnSpPr>
+        <p:spPr>
+          <a:xfrm flipV="1">
+            <a:off x="8193024" y="318211"/>
+            <a:ext cx="296266" cy="208483"/>
+          </a:xfrm>
+          <a:prstGeom prst="line">
+            <a:avLst/>
+          </a:prstGeom>
+          <a:ln w="9525">
+            <a:solidFill>
+              <a:srgbClr val="0B1F33">
+                <a:alpha val="40000"/>
+              </a:srgbClr>
+            </a:solidFill>
+          </a:ln>
+        </p:spPr>
+      </p:cxnSp>
+      <p:cxnSp>
+        <p:nvCxnSpPr>
+          <p:cNvPr id="117" name="Motif 117"/>
+          <p:cNvCxnSpPr/>
+          <p:nvPr/>
+        </p:nvCxnSpPr>
+        <p:spPr>
+          <a:xfrm>
+            <a:off x="8193024" y="526694"/>
+            <a:ext cx="456743" cy="142646"/>
+          </a:xfrm>
+          <a:prstGeom prst="line">
+            <a:avLst/>
+          </a:prstGeom>
+          <a:ln w="9525">
+            <a:solidFill>
+              <a:srgbClr val="0B1F33">
+                <a:alpha val="40000"/>
+              </a:srgbClr>
+            </a:solidFill>
+          </a:ln>
+        </p:spPr>
+      </p:cxnSp>
+      <p:cxnSp>
+        <p:nvCxnSpPr>
+          <p:cNvPr id="118" name="Motif 118"/>
+          <p:cNvCxnSpPr/>
+          <p:nvPr/>
+        </p:nvCxnSpPr>
+        <p:spPr>
+          <a:xfrm>
+            <a:off x="8489290" y="318211"/>
+            <a:ext cx="160477" cy="351130"/>
+          </a:xfrm>
+          <a:prstGeom prst="line">
+            <a:avLst/>
+          </a:prstGeom>
+          <a:ln w="9525">
+            <a:solidFill>
+              <a:srgbClr val="0B1F33">
+                <a:alpha val="40000"/>
+              </a:srgbClr>
+            </a:solidFill>
+          </a:ln>
+        </p:spPr>
+      </p:cxnSp>
+      <p:sp>
+        <p:nvSpPr>
+          <p:cNvPr id="119" name="Motif 119"/>
+          <p:cNvSpPr/>
+          <p:nvPr/>
+        </p:nvSpPr>
+        <p:spPr>
+          <a:xfrm>
+            <a:off x="7452360" y="554126"/>
+            <a:ext cx="98755" cy="98755"/>
+          </a:xfrm>
+          <a:prstGeom prst="ellipse">
+            <a:avLst/>
+          </a:prstGeom>
+          <a:solidFill>
+            <a:srgbClr val="1FA2A6">
+              <a:alpha val="85000"/>
+            </a:srgbClr>
+          </a:solidFill>
+          <a:ln>
+            <a:noFill/>
+          </a:ln>
+        </p:spPr>
+      </p:sp>
+      <p:sp>
+        <p:nvSpPr>
+          <p:cNvPr id="120" name="Motif 120"/>
+          <p:cNvSpPr/>
+          <p:nvPr/>
+        </p:nvSpPr>
+        <p:spPr>
+          <a:xfrm>
+            <a:off x="7784287" y="301752"/>
+            <a:ext cx="76810" cy="76810"/>
+          </a:xfrm>
+          <a:prstGeom prst="ellipse">
+            <a:avLst/>
+          </a:prstGeom>
+          <a:solidFill>
+            <a:srgbClr val="0B1F33">
+              <a:alpha val="85000"/>
+            </a:srgbClr>
+          </a:solidFill>
+          <a:ln>
+            <a:noFill/>
+          </a:ln>
+        </p:spPr>
+      </p:sp>
+      <p:sp>
+        <p:nvSpPr>
+          <p:cNvPr id="121" name="Motif 121"/>
+          <p:cNvSpPr/>
+          <p:nvPr/>
+        </p:nvSpPr>
+        <p:spPr>
+          <a:xfrm>
+            <a:off x="7863840" y="713232"/>
+            <a:ext cx="65837" cy="65837"/>
+          </a:xfrm>
+          <a:prstGeom prst="ellipse">
+            <a:avLst/>
+          </a:prstGeom>
+          <a:solidFill>
+            <a:srgbClr val="0B1F33">
+              <a:alpha val="85000"/>
+            </a:srgbClr>
+          </a:solidFill>
+          <a:ln>
+            <a:noFill/>
+          </a:ln>
+        </p:spPr>
+      </p:sp>
+      <p:sp>
+        <p:nvSpPr>
+          <p:cNvPr id="122" name="Motif 122"/>
+          <p:cNvSpPr/>
+          <p:nvPr/>
+        </p:nvSpPr>
+        <p:spPr>
+          <a:xfrm>
+            <a:off x="8124444" y="458114"/>
+            <a:ext cx="137160" cy="137160"/>
+          </a:xfrm>
+          <a:prstGeom prst="ellipse">
+            <a:avLst/>
+          </a:prstGeom>
+          <a:solidFill>
+            <a:srgbClr val="E63946">
+              <a:alpha val="85000"/>
+            </a:srgbClr>
+          </a:solidFill>
+          <a:ln>
+            <a:noFill/>
+          </a:ln>
+        </p:spPr>
+      </p:sp>
+      <p:sp>
+        <p:nvSpPr>
+          <p:cNvPr id="123" name="Motif 123"/>
+          <p:cNvSpPr/>
+          <p:nvPr/>
+        </p:nvSpPr>
+        <p:spPr>
+          <a:xfrm>
+            <a:off x="8448142" y="277063"/>
+            <a:ext cx="82296" cy="82296"/>
+          </a:xfrm>
+          <a:prstGeom prst="ellipse">
+            <a:avLst/>
+          </a:prstGeom>
+          <a:solidFill>
+            <a:srgbClr val="1FA2A6">
+              <a:alpha val="85000"/>
+            </a:srgbClr>
+          </a:solidFill>
+          <a:ln>
+            <a:noFill/>
+          </a:ln>
+        </p:spPr>
+      </p:sp>
+      <p:sp>
+        <p:nvSpPr>
+          <p:cNvPr id="124" name="Motif 124"/>
+          <p:cNvSpPr/>
+          <p:nvPr/>
+        </p:nvSpPr>
+        <p:spPr>
+          <a:xfrm>
+            <a:off x="8603132" y="622706"/>
+            <a:ext cx="93269" cy="93269"/>
+          </a:xfrm>
+          <a:prstGeom prst="ellipse">
+            <a:avLst/>
+          </a:prstGeom>
+          <a:solidFill>
+            <a:srgbClr val="1FA2A6">
+              <a:alpha val="85000"/>
+            </a:srgbClr>
+          </a:solidFill>
+          <a:ln>
+            <a:noFill/>
+          </a:ln>
+        </p:spPr>
+      </p:sp>
       <p:sp>
         <p:nvSpPr>
           <p:cNvPr id="2" name="Text 0"/>
@@ -4342,6 +4839,311 @@
           <a:chExt cx="0" cy="0"/>
         </a:xfrm>
       </p:grpSpPr>
+      <p:cxnSp>
+        <p:nvCxnSpPr>
+          <p:cNvPr id="126" name="Motif 126"/>
+          <p:cNvCxnSpPr/>
+          <p:nvPr/>
+        </p:nvCxnSpPr>
+        <p:spPr>
+          <a:xfrm flipV="1">
+            <a:off x="7501738" y="340157"/>
+            <a:ext cx="320954" cy="263347"/>
+          </a:xfrm>
+          <a:prstGeom prst="line">
+            <a:avLst/>
+          </a:prstGeom>
+          <a:ln w="9525">
+            <a:solidFill>
+              <a:srgbClr val="0B1F33">
+                <a:alpha val="40000"/>
+              </a:srgbClr>
+            </a:solidFill>
+          </a:ln>
+        </p:spPr>
+      </p:cxnSp>
+      <p:cxnSp>
+        <p:nvCxnSpPr>
+          <p:cNvPr id="127" name="Motif 127"/>
+          <p:cNvCxnSpPr/>
+          <p:nvPr/>
+        </p:nvCxnSpPr>
+        <p:spPr>
+          <a:xfrm>
+            <a:off x="7501738" y="603504"/>
+            <a:ext cx="395021" cy="142646"/>
+          </a:xfrm>
+          <a:prstGeom prst="line">
+            <a:avLst/>
+          </a:prstGeom>
+          <a:ln w="9525">
+            <a:solidFill>
+              <a:srgbClr val="0B1F33">
+                <a:alpha val="40000"/>
+              </a:srgbClr>
+            </a:solidFill>
+          </a:ln>
+        </p:spPr>
+      </p:cxnSp>
+      <p:cxnSp>
+        <p:nvCxnSpPr>
+          <p:cNvPr id="128" name="Motif 128"/>
+          <p:cNvCxnSpPr/>
+          <p:nvPr/>
+        </p:nvCxnSpPr>
+        <p:spPr>
+          <a:xfrm>
+            <a:off x="7822692" y="340157"/>
+            <a:ext cx="370332" cy="186538"/>
+          </a:xfrm>
+          <a:prstGeom prst="line">
+            <a:avLst/>
+          </a:prstGeom>
+          <a:ln w="9525">
+            <a:solidFill>
+              <a:srgbClr val="0B1F33">
+                <a:alpha val="40000"/>
+              </a:srgbClr>
+            </a:solidFill>
+          </a:ln>
+        </p:spPr>
+      </p:cxnSp>
+      <p:cxnSp>
+        <p:nvCxnSpPr>
+          <p:cNvPr id="129" name="Motif 129"/>
+          <p:cNvCxnSpPr/>
+          <p:nvPr/>
+        </p:nvCxnSpPr>
+        <p:spPr>
+          <a:xfrm flipV="1">
+            <a:off x="7896758" y="526694"/>
+            <a:ext cx="296266" cy="219456"/>
+          </a:xfrm>
+          <a:prstGeom prst="line">
+            <a:avLst/>
+          </a:prstGeom>
+          <a:ln w="9525">
+            <a:solidFill>
+              <a:srgbClr val="0B1F33">
+                <a:alpha val="40000"/>
+              </a:srgbClr>
+            </a:solidFill>
+          </a:ln>
+        </p:spPr>
+      </p:cxnSp>
+      <p:cxnSp>
+        <p:nvCxnSpPr>
+          <p:cNvPr id="130" name="Motif 130"/>
+          <p:cNvCxnSpPr/>
+          <p:nvPr/>
+        </p:nvCxnSpPr>
+        <p:spPr>
+          <a:xfrm flipV="1">
+            <a:off x="8193024" y="318211"/>
+            <a:ext cx="296266" cy="208483"/>
+          </a:xfrm>
+          <a:prstGeom prst="line">
+            <a:avLst/>
+          </a:prstGeom>
+          <a:ln w="9525">
+            <a:solidFill>
+              <a:srgbClr val="0B1F33">
+                <a:alpha val="40000"/>
+              </a:srgbClr>
+            </a:solidFill>
+          </a:ln>
+        </p:spPr>
+      </p:cxnSp>
+      <p:cxnSp>
+        <p:nvCxnSpPr>
+          <p:cNvPr id="131" name="Motif 131"/>
+          <p:cNvCxnSpPr/>
+          <p:nvPr/>
+        </p:nvCxnSpPr>
+        <p:spPr>
+          <a:xfrm>
+            <a:off x="8193024" y="526694"/>
+            <a:ext cx="456743" cy="142646"/>
+          </a:xfrm>
+          <a:prstGeom prst="line">
+            <a:avLst/>
+          </a:prstGeom>
+          <a:ln w="9525">
+            <a:solidFill>
+              <a:srgbClr val="0B1F33">
+                <a:alpha val="40000"/>
+              </a:srgbClr>
+            </a:solidFill>
+          </a:ln>
+        </p:spPr>
+      </p:cxnSp>
+      <p:cxnSp>
+        <p:nvCxnSpPr>
+          <p:cNvPr id="132" name="Motif 132"/>
+          <p:cNvCxnSpPr/>
+          <p:nvPr/>
+        </p:nvCxnSpPr>
+        <p:spPr>
+          <a:xfrm>
+            <a:off x="8489290" y="318211"/>
+            <a:ext cx="160477" cy="351130"/>
+          </a:xfrm>
+          <a:prstGeom prst="line">
+            <a:avLst/>
+          </a:prstGeom>
+          <a:ln w="9525">
+            <a:solidFill>
+              <a:srgbClr val="0B1F33">
+                <a:alpha val="40000"/>
+              </a:srgbClr>
+            </a:solidFill>
+          </a:ln>
+        </p:spPr>
+      </p:cxnSp>
+      <p:sp>
+        <p:nvSpPr>
+          <p:cNvPr id="133" name="Motif 133"/>
+          <p:cNvSpPr/>
+          <p:nvPr/>
+        </p:nvSpPr>
+        <p:spPr>
+          <a:xfrm>
+            <a:off x="7452360" y="554126"/>
+            <a:ext cx="98755" cy="98755"/>
+          </a:xfrm>
+          <a:prstGeom prst="ellipse">
+            <a:avLst/>
+          </a:prstGeom>
+          <a:solidFill>
+            <a:srgbClr val="1FA2A6">
+              <a:alpha val="85000"/>
+            </a:srgbClr>
+          </a:solidFill>
+          <a:ln>
+            <a:noFill/>
+          </a:ln>
+        </p:spPr>
+      </p:sp>
+      <p:sp>
+        <p:nvSpPr>
+          <p:cNvPr id="134" name="Motif 134"/>
+          <p:cNvSpPr/>
+          <p:nvPr/>
+        </p:nvSpPr>
+        <p:spPr>
+          <a:xfrm>
+            <a:off x="7784287" y="301752"/>
+            <a:ext cx="76810" cy="76810"/>
+          </a:xfrm>
+          <a:prstGeom prst="ellipse">
+            <a:avLst/>
+          </a:prstGeom>
+          <a:solidFill>
+            <a:srgbClr val="0B1F33">
+              <a:alpha val="85000"/>
+            </a:srgbClr>
+          </a:solidFill>
+          <a:ln>
+            <a:noFill/>
+          </a:ln>
+        </p:spPr>
+      </p:sp>
+      <p:sp>
+        <p:nvSpPr>
+          <p:cNvPr id="135" name="Motif 135"/>
+          <p:cNvSpPr/>
+          <p:nvPr/>
+        </p:nvSpPr>
+        <p:spPr>
+          <a:xfrm>
+            <a:off x="7863840" y="713232"/>
+            <a:ext cx="65837" cy="65837"/>
+          </a:xfrm>
+          <a:prstGeom prst="ellipse">
+            <a:avLst/>
+          </a:prstGeom>
+          <a:solidFill>
+            <a:srgbClr val="0B1F33">
+              <a:alpha val="85000"/>
+            </a:srgbClr>
+          </a:solidFill>
+          <a:ln>
+            <a:noFill/>
+          </a:ln>
+        </p:spPr>
+      </p:sp>
+      <p:sp>
+        <p:nvSpPr>
+          <p:cNvPr id="136" name="Motif 136"/>
+          <p:cNvSpPr/>
+          <p:nvPr/>
+        </p:nvSpPr>
+        <p:spPr>
+          <a:xfrm>
+            <a:off x="8124444" y="458114"/>
+            <a:ext cx="137160" cy="137160"/>
+          </a:xfrm>
+          <a:prstGeom prst="ellipse">
+            <a:avLst/>
+          </a:prstGeom>
+          <a:solidFill>
+            <a:srgbClr val="E63946">
+              <a:alpha val="85000"/>
+            </a:srgbClr>
+          </a:solidFill>
+          <a:ln>
+            <a:noFill/>
+          </a:ln>
+        </p:spPr>
+      </p:sp>
+      <p:sp>
+        <p:nvSpPr>
+          <p:cNvPr id="137" name="Motif 137"/>
+          <p:cNvSpPr/>
+          <p:nvPr/>
+        </p:nvSpPr>
+        <p:spPr>
+          <a:xfrm>
+            <a:off x="8448142" y="277063"/>
+            <a:ext cx="82296" cy="82296"/>
+          </a:xfrm>
+          <a:prstGeom prst="ellipse">
+            <a:avLst/>
+          </a:prstGeom>
+          <a:solidFill>
+            <a:srgbClr val="1FA2A6">
+              <a:alpha val="85000"/>
+            </a:srgbClr>
+          </a:solidFill>
+          <a:ln>
+            <a:noFill/>
+          </a:ln>
+        </p:spPr>
+      </p:sp>
+      <p:sp>
+        <p:nvSpPr>
+          <p:cNvPr id="138" name="Motif 138"/>
+          <p:cNvSpPr/>
+          <p:nvPr/>
+        </p:nvSpPr>
+        <p:spPr>
+          <a:xfrm>
+            <a:off x="8603132" y="622706"/>
+            <a:ext cx="93269" cy="93269"/>
+          </a:xfrm>
+          <a:prstGeom prst="ellipse">
+            <a:avLst/>
+          </a:prstGeom>
+          <a:solidFill>
+            <a:srgbClr val="1FA2A6">
+              <a:alpha val="85000"/>
+            </a:srgbClr>
+          </a:solidFill>
+          <a:ln>
+            <a:noFill/>
+          </a:ln>
+        </p:spPr>
+      </p:sp>
       <p:sp>
         <p:nvSpPr>
           <p:cNvPr id="2" name="Text 0"/>
@@ -5414,6 +6216,311 @@
           <a:chExt cx="0" cy="0"/>
         </a:xfrm>
       </p:grpSpPr>
+      <p:cxnSp>
+        <p:nvCxnSpPr>
+          <p:cNvPr id="118" name="Motif 118"/>
+          <p:cNvCxnSpPr/>
+          <p:nvPr/>
+        </p:nvCxnSpPr>
+        <p:spPr>
+          <a:xfrm flipV="1">
+            <a:off x="7501738" y="340157"/>
+            <a:ext cx="320954" cy="263347"/>
+          </a:xfrm>
+          <a:prstGeom prst="line">
+            <a:avLst/>
+          </a:prstGeom>
+          <a:ln w="9525">
+            <a:solidFill>
+              <a:srgbClr val="0B1F33">
+                <a:alpha val="40000"/>
+              </a:srgbClr>
+            </a:solidFill>
+          </a:ln>
+        </p:spPr>
+      </p:cxnSp>
+      <p:cxnSp>
+        <p:nvCxnSpPr>
+          <p:cNvPr id="119" name="Motif 119"/>
+          <p:cNvCxnSpPr/>
+          <p:nvPr/>
+        </p:nvCxnSpPr>
+        <p:spPr>
+          <a:xfrm>
+            <a:off x="7501738" y="603504"/>
+            <a:ext cx="395021" cy="142646"/>
+          </a:xfrm>
+          <a:prstGeom prst="line">
+            <a:avLst/>
+          </a:prstGeom>
+          <a:ln w="9525">
+            <a:solidFill>
+              <a:srgbClr val="0B1F33">
+                <a:alpha val="40000"/>
+              </a:srgbClr>
+            </a:solidFill>
+          </a:ln>
+        </p:spPr>
+      </p:cxnSp>
+      <p:cxnSp>
+        <p:nvCxnSpPr>
+          <p:cNvPr id="120" name="Motif 120"/>
+          <p:cNvCxnSpPr/>
+          <p:nvPr/>
+        </p:nvCxnSpPr>
+        <p:spPr>
+          <a:xfrm>
+            <a:off x="7822692" y="340157"/>
+            <a:ext cx="370332" cy="186538"/>
+          </a:xfrm>
+          <a:prstGeom prst="line">
+            <a:avLst/>
+          </a:prstGeom>
+          <a:ln w="9525">
+            <a:solidFill>
+              <a:srgbClr val="0B1F33">
+                <a:alpha val="40000"/>
+              </a:srgbClr>
+            </a:solidFill>
+          </a:ln>
+        </p:spPr>
+      </p:cxnSp>
+      <p:cxnSp>
+        <p:nvCxnSpPr>
+          <p:cNvPr id="121" name="Motif 121"/>
+          <p:cNvCxnSpPr/>
+          <p:nvPr/>
+        </p:nvCxnSpPr>
+        <p:spPr>
+          <a:xfrm flipV="1">
+            <a:off x="7896758" y="526694"/>
+            <a:ext cx="296266" cy="219456"/>
+          </a:xfrm>
+          <a:prstGeom prst="line">
+            <a:avLst/>
+          </a:prstGeom>
+          <a:ln w="9525">
+            <a:solidFill>
+              <a:srgbClr val="0B1F33">
+                <a:alpha val="40000"/>
+              </a:srgbClr>
+            </a:solidFill>
+          </a:ln>
+        </p:spPr>
+      </p:cxnSp>
+      <p:cxnSp>
+        <p:nvCxnSpPr>
+          <p:cNvPr id="122" name="Motif 122"/>
+          <p:cNvCxnSpPr/>
+          <p:nvPr/>
+        </p:nvCxnSpPr>
+        <p:spPr>
+          <a:xfrm flipV="1">
+            <a:off x="8193024" y="318211"/>
+            <a:ext cx="296266" cy="208483"/>
+          </a:xfrm>
+          <a:prstGeom prst="line">
+            <a:avLst/>
+          </a:prstGeom>
+          <a:ln w="9525">
+            <a:solidFill>
+              <a:srgbClr val="0B1F33">
+                <a:alpha val="40000"/>
+              </a:srgbClr>
+            </a:solidFill>
+          </a:ln>
+        </p:spPr>
+      </p:cxnSp>
+      <p:cxnSp>
+        <p:nvCxnSpPr>
+          <p:cNvPr id="123" name="Motif 123"/>
+          <p:cNvCxnSpPr/>
+          <p:nvPr/>
+        </p:nvCxnSpPr>
+        <p:spPr>
+          <a:xfrm>
+            <a:off x="8193024" y="526694"/>
+            <a:ext cx="456743" cy="142646"/>
+          </a:xfrm>
+          <a:prstGeom prst="line">
+            <a:avLst/>
+          </a:prstGeom>
+          <a:ln w="9525">
+            <a:solidFill>
+              <a:srgbClr val="0B1F33">
+                <a:alpha val="40000"/>
+              </a:srgbClr>
+            </a:solidFill>
+          </a:ln>
+        </p:spPr>
+      </p:cxnSp>
+      <p:cxnSp>
+        <p:nvCxnSpPr>
+          <p:cNvPr id="124" name="Motif 124"/>
+          <p:cNvCxnSpPr/>
+          <p:nvPr/>
+        </p:nvCxnSpPr>
+        <p:spPr>
+          <a:xfrm>
+            <a:off x="8489290" y="318211"/>
+            <a:ext cx="160477" cy="351130"/>
+          </a:xfrm>
+          <a:prstGeom prst="line">
+            <a:avLst/>
+          </a:prstGeom>
+          <a:ln w="9525">
+            <a:solidFill>
+              <a:srgbClr val="0B1F33">
+                <a:alpha val="40000"/>
+              </a:srgbClr>
+            </a:solidFill>
+          </a:ln>
+        </p:spPr>
+      </p:cxnSp>
+      <p:sp>
+        <p:nvSpPr>
+          <p:cNvPr id="125" name="Motif 125"/>
+          <p:cNvSpPr/>
+          <p:nvPr/>
+        </p:nvSpPr>
+        <p:spPr>
+          <a:xfrm>
+            <a:off x="7452360" y="554126"/>
+            <a:ext cx="98755" cy="98755"/>
+          </a:xfrm>
+          <a:prstGeom prst="ellipse">
+            <a:avLst/>
+          </a:prstGeom>
+          <a:solidFill>
+            <a:srgbClr val="1FA2A6">
+              <a:alpha val="85000"/>
+            </a:srgbClr>
+          </a:solidFill>
+          <a:ln>
+            <a:noFill/>
+          </a:ln>
+        </p:spPr>
+      </p:sp>
+      <p:sp>
+        <p:nvSpPr>
+          <p:cNvPr id="126" name="Motif 126"/>
+          <p:cNvSpPr/>
+          <p:nvPr/>
+        </p:nvSpPr>
+        <p:spPr>
+          <a:xfrm>
+            <a:off x="7784287" y="301752"/>
+            <a:ext cx="76810" cy="76810"/>
+          </a:xfrm>
+          <a:prstGeom prst="ellipse">
+            <a:avLst/>
+          </a:prstGeom>
+          <a:solidFill>
+            <a:srgbClr val="0B1F33">
+              <a:alpha val="85000"/>
+            </a:srgbClr>
+          </a:solidFill>
+          <a:ln>
+            <a:noFill/>
+          </a:ln>
+        </p:spPr>
+      </p:sp>
+      <p:sp>
+        <p:nvSpPr>
+          <p:cNvPr id="127" name="Motif 127"/>
+          <p:cNvSpPr/>
+          <p:nvPr/>
+        </p:nvSpPr>
+        <p:spPr>
+          <a:xfrm>
+            <a:off x="7863840" y="713232"/>
+            <a:ext cx="65837" cy="65837"/>
+          </a:xfrm>
+          <a:prstGeom prst="ellipse">
+            <a:avLst/>
+          </a:prstGeom>
+          <a:solidFill>
+            <a:srgbClr val="0B1F33">
+              <a:alpha val="85000"/>
+            </a:srgbClr>
+          </a:solidFill>
+          <a:ln>
+            <a:noFill/>
+          </a:ln>
+        </p:spPr>
+      </p:sp>
+      <p:sp>
+        <p:nvSpPr>
+          <p:cNvPr id="128" name="Motif 128"/>
+          <p:cNvSpPr/>
+          <p:nvPr/>
+        </p:nvSpPr>
+        <p:spPr>
+          <a:xfrm>
+            <a:off x="8124444" y="458114"/>
+            <a:ext cx="137160" cy="137160"/>
+          </a:xfrm>
+          <a:prstGeom prst="ellipse">
+            <a:avLst/>
+          </a:prstGeom>
+          <a:solidFill>
+            <a:srgbClr val="E63946">
+              <a:alpha val="85000"/>
+            </a:srgbClr>
+          </a:solidFill>
+          <a:ln>
+            <a:noFill/>
+          </a:ln>
+        </p:spPr>
+      </p:sp>
+      <p:sp>
+        <p:nvSpPr>
+          <p:cNvPr id="129" name="Motif 129"/>
+          <p:cNvSpPr/>
+          <p:nvPr/>
+        </p:nvSpPr>
+        <p:spPr>
+          <a:xfrm>
+            <a:off x="8448142" y="277063"/>
+            <a:ext cx="82296" cy="82296"/>
+          </a:xfrm>
+          <a:prstGeom prst="ellipse">
+            <a:avLst/>
+          </a:prstGeom>
+          <a:solidFill>
+            <a:srgbClr val="1FA2A6">
+              <a:alpha val="85000"/>
+            </a:srgbClr>
+          </a:solidFill>
+          <a:ln>
+            <a:noFill/>
+          </a:ln>
+        </p:spPr>
+      </p:sp>
+      <p:sp>
+        <p:nvSpPr>
+          <p:cNvPr id="130" name="Motif 130"/>
+          <p:cNvSpPr/>
+          <p:nvPr/>
+        </p:nvSpPr>
+        <p:spPr>
+          <a:xfrm>
+            <a:off x="8603132" y="622706"/>
+            <a:ext cx="93269" cy="93269"/>
+          </a:xfrm>
+          <a:prstGeom prst="ellipse">
+            <a:avLst/>
+          </a:prstGeom>
+          <a:solidFill>
+            <a:srgbClr val="1FA2A6">
+              <a:alpha val="85000"/>
+            </a:srgbClr>
+          </a:solidFill>
+          <a:ln>
+            <a:noFill/>
+          </a:ln>
+        </p:spPr>
+      </p:sp>
       <p:sp>
         <p:nvSpPr>
           <p:cNvPr id="2" name="Text 0"/>
@@ -5447,7 +6554,7 @@
                 <a:ea typeface="Cambria" pitchFamily="34" charset="-122"/>
                 <a:cs typeface="Cambria" pitchFamily="34" charset="-120"/>
               </a:rPr>
-              <a:t>Database Design – OpenSearch Indices</a:t>
+              <a:t>Database Design – OpenSearch</a:t>
             </a:r>
             <a:endParaRPr lang="en-US" sz="2800" dirty="0"/>
           </a:p>
@@ -6316,6 +7423,311 @@
           <a:chExt cx="0" cy="0"/>
         </a:xfrm>
       </p:grpSpPr>
+      <p:cxnSp>
+        <p:nvCxnSpPr>
+          <p:cNvPr id="404" name="Motif 404"/>
+          <p:cNvCxnSpPr/>
+          <p:nvPr/>
+        </p:nvCxnSpPr>
+        <p:spPr>
+          <a:xfrm flipV="1">
+            <a:off x="7501738" y="340157"/>
+            <a:ext cx="320954" cy="263347"/>
+          </a:xfrm>
+          <a:prstGeom prst="line">
+            <a:avLst/>
+          </a:prstGeom>
+          <a:ln w="9525">
+            <a:solidFill>
+              <a:srgbClr val="0B1F33">
+                <a:alpha val="40000"/>
+              </a:srgbClr>
+            </a:solidFill>
+          </a:ln>
+        </p:spPr>
+      </p:cxnSp>
+      <p:cxnSp>
+        <p:nvCxnSpPr>
+          <p:cNvPr id="405" name="Motif 405"/>
+          <p:cNvCxnSpPr/>
+          <p:nvPr/>
+        </p:nvCxnSpPr>
+        <p:spPr>
+          <a:xfrm>
+            <a:off x="7501738" y="603504"/>
+            <a:ext cx="395021" cy="142646"/>
+          </a:xfrm>
+          <a:prstGeom prst="line">
+            <a:avLst/>
+          </a:prstGeom>
+          <a:ln w="9525">
+            <a:solidFill>
+              <a:srgbClr val="0B1F33">
+                <a:alpha val="40000"/>
+              </a:srgbClr>
+            </a:solidFill>
+          </a:ln>
+        </p:spPr>
+      </p:cxnSp>
+      <p:cxnSp>
+        <p:nvCxnSpPr>
+          <p:cNvPr id="406" name="Motif 406"/>
+          <p:cNvCxnSpPr/>
+          <p:nvPr/>
+        </p:nvCxnSpPr>
+        <p:spPr>
+          <a:xfrm>
+            <a:off x="7822692" y="340157"/>
+            <a:ext cx="370332" cy="186538"/>
+          </a:xfrm>
+          <a:prstGeom prst="line">
+            <a:avLst/>
+          </a:prstGeom>
+          <a:ln w="9525">
+            <a:solidFill>
+              <a:srgbClr val="0B1F33">
+                <a:alpha val="40000"/>
+              </a:srgbClr>
+            </a:solidFill>
+          </a:ln>
+        </p:spPr>
+      </p:cxnSp>
+      <p:cxnSp>
+        <p:nvCxnSpPr>
+          <p:cNvPr id="407" name="Motif 407"/>
+          <p:cNvCxnSpPr/>
+          <p:nvPr/>
+        </p:nvCxnSpPr>
+        <p:spPr>
+          <a:xfrm flipV="1">
+            <a:off x="7896758" y="526694"/>
+            <a:ext cx="296266" cy="219456"/>
+          </a:xfrm>
+          <a:prstGeom prst="line">
+            <a:avLst/>
+          </a:prstGeom>
+          <a:ln w="9525">
+            <a:solidFill>
+              <a:srgbClr val="0B1F33">
+                <a:alpha val="40000"/>
+              </a:srgbClr>
+            </a:solidFill>
+          </a:ln>
+        </p:spPr>
+      </p:cxnSp>
+      <p:cxnSp>
+        <p:nvCxnSpPr>
+          <p:cNvPr id="408" name="Motif 408"/>
+          <p:cNvCxnSpPr/>
+          <p:nvPr/>
+        </p:nvCxnSpPr>
+        <p:spPr>
+          <a:xfrm flipV="1">
+            <a:off x="8193024" y="318211"/>
+            <a:ext cx="296266" cy="208483"/>
+          </a:xfrm>
+          <a:prstGeom prst="line">
+            <a:avLst/>
+          </a:prstGeom>
+          <a:ln w="9525">
+            <a:solidFill>
+              <a:srgbClr val="0B1F33">
+                <a:alpha val="40000"/>
+              </a:srgbClr>
+            </a:solidFill>
+          </a:ln>
+        </p:spPr>
+      </p:cxnSp>
+      <p:cxnSp>
+        <p:nvCxnSpPr>
+          <p:cNvPr id="409" name="Motif 409"/>
+          <p:cNvCxnSpPr/>
+          <p:nvPr/>
+        </p:nvCxnSpPr>
+        <p:spPr>
+          <a:xfrm>
+            <a:off x="8193024" y="526694"/>
+            <a:ext cx="456743" cy="142646"/>
+          </a:xfrm>
+          <a:prstGeom prst="line">
+            <a:avLst/>
+          </a:prstGeom>
+          <a:ln w="9525">
+            <a:solidFill>
+              <a:srgbClr val="0B1F33">
+                <a:alpha val="40000"/>
+              </a:srgbClr>
+            </a:solidFill>
+          </a:ln>
+        </p:spPr>
+      </p:cxnSp>
+      <p:cxnSp>
+        <p:nvCxnSpPr>
+          <p:cNvPr id="410" name="Motif 410"/>
+          <p:cNvCxnSpPr/>
+          <p:nvPr/>
+        </p:nvCxnSpPr>
+        <p:spPr>
+          <a:xfrm>
+            <a:off x="8489290" y="318211"/>
+            <a:ext cx="160477" cy="351130"/>
+          </a:xfrm>
+          <a:prstGeom prst="line">
+            <a:avLst/>
+          </a:prstGeom>
+          <a:ln w="9525">
+            <a:solidFill>
+              <a:srgbClr val="0B1F33">
+                <a:alpha val="40000"/>
+              </a:srgbClr>
+            </a:solidFill>
+          </a:ln>
+        </p:spPr>
+      </p:cxnSp>
+      <p:sp>
+        <p:nvSpPr>
+          <p:cNvPr id="411" name="Motif 411"/>
+          <p:cNvSpPr/>
+          <p:nvPr/>
+        </p:nvSpPr>
+        <p:spPr>
+          <a:xfrm>
+            <a:off x="7452360" y="554126"/>
+            <a:ext cx="98755" cy="98755"/>
+          </a:xfrm>
+          <a:prstGeom prst="ellipse">
+            <a:avLst/>
+          </a:prstGeom>
+          <a:solidFill>
+            <a:srgbClr val="1FA2A6">
+              <a:alpha val="85000"/>
+            </a:srgbClr>
+          </a:solidFill>
+          <a:ln>
+            <a:noFill/>
+          </a:ln>
+        </p:spPr>
+      </p:sp>
+      <p:sp>
+        <p:nvSpPr>
+          <p:cNvPr id="412" name="Motif 412"/>
+          <p:cNvSpPr/>
+          <p:nvPr/>
+        </p:nvSpPr>
+        <p:spPr>
+          <a:xfrm>
+            <a:off x="7784287" y="301752"/>
+            <a:ext cx="76810" cy="76810"/>
+          </a:xfrm>
+          <a:prstGeom prst="ellipse">
+            <a:avLst/>
+          </a:prstGeom>
+          <a:solidFill>
+            <a:srgbClr val="0B1F33">
+              <a:alpha val="85000"/>
+            </a:srgbClr>
+          </a:solidFill>
+          <a:ln>
+            <a:noFill/>
+          </a:ln>
+        </p:spPr>
+      </p:sp>
+      <p:sp>
+        <p:nvSpPr>
+          <p:cNvPr id="413" name="Motif 413"/>
+          <p:cNvSpPr/>
+          <p:nvPr/>
+        </p:nvSpPr>
+        <p:spPr>
+          <a:xfrm>
+            <a:off x="7863840" y="713232"/>
+            <a:ext cx="65837" cy="65837"/>
+          </a:xfrm>
+          <a:prstGeom prst="ellipse">
+            <a:avLst/>
+          </a:prstGeom>
+          <a:solidFill>
+            <a:srgbClr val="0B1F33">
+              <a:alpha val="85000"/>
+            </a:srgbClr>
+          </a:solidFill>
+          <a:ln>
+            <a:noFill/>
+          </a:ln>
+        </p:spPr>
+      </p:sp>
+      <p:sp>
+        <p:nvSpPr>
+          <p:cNvPr id="414" name="Motif 414"/>
+          <p:cNvSpPr/>
+          <p:nvPr/>
+        </p:nvSpPr>
+        <p:spPr>
+          <a:xfrm>
+            <a:off x="8124444" y="458114"/>
+            <a:ext cx="137160" cy="137160"/>
+          </a:xfrm>
+          <a:prstGeom prst="ellipse">
+            <a:avLst/>
+          </a:prstGeom>
+          <a:solidFill>
+            <a:srgbClr val="E63946">
+              <a:alpha val="85000"/>
+            </a:srgbClr>
+          </a:solidFill>
+          <a:ln>
+            <a:noFill/>
+          </a:ln>
+        </p:spPr>
+      </p:sp>
+      <p:sp>
+        <p:nvSpPr>
+          <p:cNvPr id="415" name="Motif 415"/>
+          <p:cNvSpPr/>
+          <p:nvPr/>
+        </p:nvSpPr>
+        <p:spPr>
+          <a:xfrm>
+            <a:off x="8448142" y="277063"/>
+            <a:ext cx="82296" cy="82296"/>
+          </a:xfrm>
+          <a:prstGeom prst="ellipse">
+            <a:avLst/>
+          </a:prstGeom>
+          <a:solidFill>
+            <a:srgbClr val="1FA2A6">
+              <a:alpha val="85000"/>
+            </a:srgbClr>
+          </a:solidFill>
+          <a:ln>
+            <a:noFill/>
+          </a:ln>
+        </p:spPr>
+      </p:sp>
+      <p:sp>
+        <p:nvSpPr>
+          <p:cNvPr id="416" name="Motif 416"/>
+          <p:cNvSpPr/>
+          <p:nvPr/>
+        </p:nvSpPr>
+        <p:spPr>
+          <a:xfrm>
+            <a:off x="8603132" y="622706"/>
+            <a:ext cx="93269" cy="93269"/>
+          </a:xfrm>
+          <a:prstGeom prst="ellipse">
+            <a:avLst/>
+          </a:prstGeom>
+          <a:solidFill>
+            <a:srgbClr val="1FA2A6">
+              <a:alpha val="85000"/>
+            </a:srgbClr>
+          </a:solidFill>
+          <a:ln>
+            <a:noFill/>
+          </a:ln>
+        </p:spPr>
+      </p:sp>
       <p:sp>
         <p:nvSpPr>
           <p:cNvPr id="2" name="Text 0"/>
@@ -6433,217 +7845,117 @@
           </a:p>
         </p:txBody>
       </p:sp>
-      <p:sp>
-        <p:nvSpPr>
-          <p:cNvPr id="6" name="Shape 3"/>
-          <p:cNvSpPr/>
-          <p:nvPr/>
-        </p:nvSpPr>
-        <p:spPr>
-          <a:xfrm>
-            <a:off x="457200" y="1051560"/>
-            <a:ext cx="3977640" cy="3474720"/>
-          </a:xfrm>
-          <a:prstGeom prst="rect">
-            <a:avLst/>
-          </a:prstGeom>
-          <a:solidFill>
-            <a:srgbClr val="F2F6F9"/>
-          </a:solidFill>
-          <a:ln w="15875">
-            <a:solidFill>
-              <a:srgbClr val="8A99A8"/>
-            </a:solidFill>
-            <a:prstDash val="dash"/>
-          </a:ln>
-        </p:spPr>
-      </p:sp>
-      <p:sp>
-        <p:nvSpPr>
-          <p:cNvPr id="7" name="Text 4"/>
-          <p:cNvSpPr txBox="1"/>
-          <p:nvPr/>
-        </p:nvSpPr>
-        <p:spPr>
-          <a:xfrm>
-            <a:off x="731520" y="1051560"/>
-            <a:ext cx="3429000" cy="3474720"/>
-          </a:xfrm>
-          <a:prstGeom prst="rect">
-            <a:avLst/>
-          </a:prstGeom>
-          <a:noFill/>
-          <a:ln/>
-        </p:spPr>
-        <p:txBody>
-          <a:bodyPr wrap="square" lIns="0" tIns="0" rIns="0" bIns="0" rtlCol="0" anchor="ctr"/>
-          <a:lstStyle/>
-          <a:p>
-            <a:pPr algn="ctr" indent="0" marL="0">
-              <a:spcAft>
-                <a:spcPts val="600"/>
-              </a:spcAft>
-              <a:buNone/>
-            </a:pPr>
-            <a:r>
-              <a:rPr lang="en-US" sz="1400" b="1" dirty="0">
-                <a:solidFill>
-                  <a:srgbClr val="E63946"/>
-                </a:solidFill>
-                <a:latin typeface="Calibri" pitchFamily="34" charset="0"/>
-                <a:ea typeface="Calibri" pitchFamily="34" charset="-122"/>
-                <a:cs typeface="Calibri" pitchFamily="34" charset="-120"/>
-              </a:rPr>
-              <a:t>[ INSERT SCREENSHOT ]</a:t>
-            </a:r>
-            <a:endParaRPr lang="en-US" sz="1400" dirty="0"/>
-          </a:p>
-          <a:p>
-            <a:pPr algn="ctr" indent="0" marL="0">
-              <a:spcAft>
-                <a:spcPts val="600"/>
-              </a:spcAft>
-              <a:buNone/>
-            </a:pPr>
-            <a:r>
-              <a:rPr lang="en-US" sz="1300" b="1" dirty="0">
-                <a:solidFill>
-                  <a:srgbClr val="0B1F33"/>
-                </a:solidFill>
-                <a:latin typeface="Calibri" pitchFamily="34" charset="0"/>
-                <a:ea typeface="Calibri" pitchFamily="34" charset="-122"/>
-                <a:cs typeface="Calibri" pitchFamily="34" charset="-120"/>
-              </a:rPr>
-              <a:t>Demo Login Page</a:t>
-            </a:r>
-            <a:endParaRPr lang="en-US" sz="1400" dirty="0"/>
-          </a:p>
-          <a:p>
-            <a:pPr algn="ctr" indent="0" marL="0">
-              <a:spcAft>
-                <a:spcPts val="600"/>
-              </a:spcAft>
-              <a:buNone/>
-            </a:pPr>
-            <a:r>
-              <a:rPr lang="en-US" sz="1100" i="1" dirty="0">
+      <p:pic>
+        <p:nvPicPr>
+          <p:cNvPr id="300" name="Screenshot 300" descr="Figure 6.2"/>
+          <p:cNvPicPr>
+            <a:picLocks noChangeAspect="1"/>
+          </p:cNvPicPr>
+          <p:nvPr/>
+        </p:nvPicPr>
+        <p:blipFill>
+          <a:blip r:embed="rId90"/>
+          <a:stretch>
+            <a:fillRect/>
+          </a:stretch>
+        </p:blipFill>
+        <p:spPr>
+          <a:xfrm>
+            <a:off x="669471" y="1051560"/>
+            <a:ext cx="3553097" cy="3108960"/>
+          </a:xfrm>
+          <a:prstGeom prst="rect">
+            <a:avLst/>
+          </a:prstGeom>
+        </p:spPr>
+      </p:pic>
+      <p:sp>
+        <p:nvSpPr>
+          <p:cNvPr id="301" name="Caption 301"/>
+          <p:cNvSpPr txBox="1"/>
+          <p:nvPr/>
+        </p:nvSpPr>
+        <p:spPr>
+          <a:xfrm>
+            <a:off x="457200" y="4233672"/>
+            <a:ext cx="3977640" cy="274320"/>
+          </a:xfrm>
+          <a:prstGeom prst="rect">
+            <a:avLst/>
+          </a:prstGeom>
+          <a:noFill/>
+        </p:spPr>
+        <p:txBody>
+          <a:bodyPr wrap="square" lIns="0" tIns="0" rIns="0" bIns="0" anchor="t"/>
+          <a:lstStyle/>
+          <a:p>
+            <a:pPr algn="ctr"/>
+            <a:r>
+              <a:rPr lang="en-US" sz="1200" i="1" dirty="0">
                 <a:solidFill>
                   <a:srgbClr val="5B6B7B"/>
                 </a:solidFill>
-                <a:latin typeface="Calibri" pitchFamily="34" charset="0"/>
-                <a:ea typeface="Calibri" pitchFamily="34" charset="-122"/>
-                <a:cs typeface="Calibri" pitchFamily="34" charset="-120"/>
-              </a:rPr>
-              <a:t>localhost:8080/login.html showing '✖ ACCESS DENIED'</a:t>
-            </a:r>
-            <a:endParaRPr lang="en-US" sz="1400" dirty="0"/>
-          </a:p>
-        </p:txBody>
-      </p:sp>
-      <p:sp>
-        <p:nvSpPr>
-          <p:cNvPr id="8" name="Shape 5"/>
-          <p:cNvSpPr/>
-          <p:nvPr/>
-        </p:nvSpPr>
-        <p:spPr>
-          <a:xfrm>
-            <a:off x="4709160" y="1051560"/>
-            <a:ext cx="3977640" cy="3474720"/>
-          </a:xfrm>
-          <a:prstGeom prst="rect">
-            <a:avLst/>
-          </a:prstGeom>
-          <a:solidFill>
-            <a:srgbClr val="F2F6F9"/>
-          </a:solidFill>
-          <a:ln w="15875">
-            <a:solidFill>
-              <a:srgbClr val="8A99A8"/>
-            </a:solidFill>
-            <a:prstDash val="dash"/>
-          </a:ln>
-        </p:spPr>
-      </p:sp>
-      <p:sp>
-        <p:nvSpPr>
-          <p:cNvPr id="9" name="Text 6"/>
-          <p:cNvSpPr txBox="1"/>
-          <p:nvPr/>
-        </p:nvSpPr>
-        <p:spPr>
-          <a:xfrm>
-            <a:off x="4983480" y="1051560"/>
-            <a:ext cx="3429000" cy="3474720"/>
-          </a:xfrm>
-          <a:prstGeom prst="rect">
-            <a:avLst/>
-          </a:prstGeom>
-          <a:noFill/>
-          <a:ln/>
-        </p:spPr>
-        <p:txBody>
-          <a:bodyPr wrap="square" lIns="0" tIns="0" rIns="0" bIns="0" rtlCol="0" anchor="ctr"/>
-          <a:lstStyle/>
-          <a:p>
-            <a:pPr algn="ctr" indent="0" marL="0">
-              <a:spcAft>
-                <a:spcPts val="600"/>
-              </a:spcAft>
-              <a:buNone/>
-            </a:pPr>
-            <a:r>
-              <a:rPr lang="en-US" sz="1400" b="1" dirty="0">
-                <a:solidFill>
-                  <a:srgbClr val="E63946"/>
-                </a:solidFill>
-                <a:latin typeface="Calibri" pitchFamily="34" charset="0"/>
-                <a:ea typeface="Calibri" pitchFamily="34" charset="-122"/>
-                <a:cs typeface="Calibri" pitchFamily="34" charset="-120"/>
-              </a:rPr>
-              <a:t>[ INSERT SCREENSHOT ]</a:t>
-            </a:r>
-            <a:endParaRPr lang="en-US" sz="1400" dirty="0"/>
-          </a:p>
-          <a:p>
-            <a:pPr algn="ctr" indent="0" marL="0">
-              <a:spcAft>
-                <a:spcPts val="600"/>
-              </a:spcAft>
-              <a:buNone/>
-            </a:pPr>
-            <a:r>
-              <a:rPr lang="en-US" sz="1300" b="1" dirty="0">
-                <a:solidFill>
-                  <a:srgbClr val="0B1F33"/>
-                </a:solidFill>
-                <a:latin typeface="Calibri" pitchFamily="34" charset="0"/>
-                <a:ea typeface="Calibri" pitchFamily="34" charset="-122"/>
-                <a:cs typeface="Calibri" pitchFamily="34" charset="-120"/>
-              </a:rPr>
-              <a:t>Search Page with XSS</a:t>
-            </a:r>
-            <a:endParaRPr lang="en-US" sz="1400" dirty="0"/>
-          </a:p>
-          <a:p>
-            <a:pPr algn="ctr" indent="0" marL="0">
-              <a:spcAft>
-                <a:spcPts val="600"/>
-              </a:spcAft>
-              <a:buNone/>
-            </a:pPr>
-            <a:r>
-              <a:rPr lang="en-US" sz="1100" i="1" dirty="0">
+                <a:latin typeface="Calibri"/>
+              </a:rPr>
+              <a:t>Demo login – every failed attempt is logged</a:t>
+            </a:r>
+          </a:p>
+        </p:txBody>
+      </p:sp>
+      <p:pic>
+        <p:nvPicPr>
+          <p:cNvPr id="302" name="Screenshot 302" descr="Figure 6.3"/>
+          <p:cNvPicPr>
+            <a:picLocks noChangeAspect="1"/>
+          </p:cNvPicPr>
+          <p:nvPr/>
+        </p:nvPicPr>
+        <p:blipFill>
+          <a:blip r:embed="rId91"/>
+          <a:stretch>
+            <a:fillRect/>
+          </a:stretch>
+        </p:blipFill>
+        <p:spPr>
+          <a:xfrm>
+            <a:off x="4709160" y="1445895"/>
+            <a:ext cx="3977640" cy="2320290"/>
+          </a:xfrm>
+          <a:prstGeom prst="rect">
+            <a:avLst/>
+          </a:prstGeom>
+        </p:spPr>
+      </p:pic>
+      <p:sp>
+        <p:nvSpPr>
+          <p:cNvPr id="303" name="Caption 303"/>
+          <p:cNvSpPr txBox="1"/>
+          <p:nvPr/>
+        </p:nvSpPr>
+        <p:spPr>
+          <a:xfrm>
+            <a:off x="4709160" y="4233672"/>
+            <a:ext cx="3977640" cy="274320"/>
+          </a:xfrm>
+          <a:prstGeom prst="rect">
+            <a:avLst/>
+          </a:prstGeom>
+          <a:noFill/>
+        </p:spPr>
+        <p:txBody>
+          <a:bodyPr wrap="square" lIns="0" tIns="0" rIns="0" bIns="0" anchor="t"/>
+          <a:lstStyle/>
+          <a:p>
+            <a:pPr algn="ctr"/>
+            <a:r>
+              <a:rPr lang="en-US" sz="1200" i="1" dirty="0">
                 <a:solidFill>
                   <a:srgbClr val="5B6B7B"/>
                 </a:solidFill>
-                <a:latin typeface="Calibri" pitchFamily="34" charset="0"/>
-                <a:ea typeface="Calibri" pitchFamily="34" charset="-122"/>
-                <a:cs typeface="Calibri" pitchFamily="34" charset="-120"/>
-              </a:rPr>
-              <a:t>search.html after searching &lt;script&gt;alert(1)&lt;/script&gt;</a:t>
-            </a:r>
-            <a:endParaRPr lang="en-US" sz="1400" dirty="0"/>
+                <a:latin typeface="Calibri"/>
+              </a:rPr>
+              <a:t>Search page – XSS payload reflected</a:t>
+            </a:r>
           </a:p>
         </p:txBody>
       </p:sp>
@@ -6679,6 +7991,311 @@
           <a:chExt cx="0" cy="0"/>
         </a:xfrm>
       </p:grpSpPr>
+      <p:cxnSp>
+        <p:nvCxnSpPr>
+          <p:cNvPr id="402" name="Motif 402"/>
+          <p:cNvCxnSpPr/>
+          <p:nvPr/>
+        </p:nvCxnSpPr>
+        <p:spPr>
+          <a:xfrm flipV="1">
+            <a:off x="7501738" y="340157"/>
+            <a:ext cx="320954" cy="263347"/>
+          </a:xfrm>
+          <a:prstGeom prst="line">
+            <a:avLst/>
+          </a:prstGeom>
+          <a:ln w="9525">
+            <a:solidFill>
+              <a:srgbClr val="0B1F33">
+                <a:alpha val="40000"/>
+              </a:srgbClr>
+            </a:solidFill>
+          </a:ln>
+        </p:spPr>
+      </p:cxnSp>
+      <p:cxnSp>
+        <p:nvCxnSpPr>
+          <p:cNvPr id="403" name="Motif 403"/>
+          <p:cNvCxnSpPr/>
+          <p:nvPr/>
+        </p:nvCxnSpPr>
+        <p:spPr>
+          <a:xfrm>
+            <a:off x="7501738" y="603504"/>
+            <a:ext cx="395021" cy="142646"/>
+          </a:xfrm>
+          <a:prstGeom prst="line">
+            <a:avLst/>
+          </a:prstGeom>
+          <a:ln w="9525">
+            <a:solidFill>
+              <a:srgbClr val="0B1F33">
+                <a:alpha val="40000"/>
+              </a:srgbClr>
+            </a:solidFill>
+          </a:ln>
+        </p:spPr>
+      </p:cxnSp>
+      <p:cxnSp>
+        <p:nvCxnSpPr>
+          <p:cNvPr id="404" name="Motif 404"/>
+          <p:cNvCxnSpPr/>
+          <p:nvPr/>
+        </p:nvCxnSpPr>
+        <p:spPr>
+          <a:xfrm>
+            <a:off x="7822692" y="340157"/>
+            <a:ext cx="370332" cy="186538"/>
+          </a:xfrm>
+          <a:prstGeom prst="line">
+            <a:avLst/>
+          </a:prstGeom>
+          <a:ln w="9525">
+            <a:solidFill>
+              <a:srgbClr val="0B1F33">
+                <a:alpha val="40000"/>
+              </a:srgbClr>
+            </a:solidFill>
+          </a:ln>
+        </p:spPr>
+      </p:cxnSp>
+      <p:cxnSp>
+        <p:nvCxnSpPr>
+          <p:cNvPr id="405" name="Motif 405"/>
+          <p:cNvCxnSpPr/>
+          <p:nvPr/>
+        </p:nvCxnSpPr>
+        <p:spPr>
+          <a:xfrm flipV="1">
+            <a:off x="7896758" y="526694"/>
+            <a:ext cx="296266" cy="219456"/>
+          </a:xfrm>
+          <a:prstGeom prst="line">
+            <a:avLst/>
+          </a:prstGeom>
+          <a:ln w="9525">
+            <a:solidFill>
+              <a:srgbClr val="0B1F33">
+                <a:alpha val="40000"/>
+              </a:srgbClr>
+            </a:solidFill>
+          </a:ln>
+        </p:spPr>
+      </p:cxnSp>
+      <p:cxnSp>
+        <p:nvCxnSpPr>
+          <p:cNvPr id="406" name="Motif 406"/>
+          <p:cNvCxnSpPr/>
+          <p:nvPr/>
+        </p:nvCxnSpPr>
+        <p:spPr>
+          <a:xfrm flipV="1">
+            <a:off x="8193024" y="318211"/>
+            <a:ext cx="296266" cy="208483"/>
+          </a:xfrm>
+          <a:prstGeom prst="line">
+            <a:avLst/>
+          </a:prstGeom>
+          <a:ln w="9525">
+            <a:solidFill>
+              <a:srgbClr val="0B1F33">
+                <a:alpha val="40000"/>
+              </a:srgbClr>
+            </a:solidFill>
+          </a:ln>
+        </p:spPr>
+      </p:cxnSp>
+      <p:cxnSp>
+        <p:nvCxnSpPr>
+          <p:cNvPr id="407" name="Motif 407"/>
+          <p:cNvCxnSpPr/>
+          <p:nvPr/>
+        </p:nvCxnSpPr>
+        <p:spPr>
+          <a:xfrm>
+            <a:off x="8193024" y="526694"/>
+            <a:ext cx="456743" cy="142646"/>
+          </a:xfrm>
+          <a:prstGeom prst="line">
+            <a:avLst/>
+          </a:prstGeom>
+          <a:ln w="9525">
+            <a:solidFill>
+              <a:srgbClr val="0B1F33">
+                <a:alpha val="40000"/>
+              </a:srgbClr>
+            </a:solidFill>
+          </a:ln>
+        </p:spPr>
+      </p:cxnSp>
+      <p:cxnSp>
+        <p:nvCxnSpPr>
+          <p:cNvPr id="408" name="Motif 408"/>
+          <p:cNvCxnSpPr/>
+          <p:nvPr/>
+        </p:nvCxnSpPr>
+        <p:spPr>
+          <a:xfrm>
+            <a:off x="8489290" y="318211"/>
+            <a:ext cx="160477" cy="351130"/>
+          </a:xfrm>
+          <a:prstGeom prst="line">
+            <a:avLst/>
+          </a:prstGeom>
+          <a:ln w="9525">
+            <a:solidFill>
+              <a:srgbClr val="0B1F33">
+                <a:alpha val="40000"/>
+              </a:srgbClr>
+            </a:solidFill>
+          </a:ln>
+        </p:spPr>
+      </p:cxnSp>
+      <p:sp>
+        <p:nvSpPr>
+          <p:cNvPr id="409" name="Motif 409"/>
+          <p:cNvSpPr/>
+          <p:nvPr/>
+        </p:nvSpPr>
+        <p:spPr>
+          <a:xfrm>
+            <a:off x="7452360" y="554126"/>
+            <a:ext cx="98755" cy="98755"/>
+          </a:xfrm>
+          <a:prstGeom prst="ellipse">
+            <a:avLst/>
+          </a:prstGeom>
+          <a:solidFill>
+            <a:srgbClr val="1FA2A6">
+              <a:alpha val="85000"/>
+            </a:srgbClr>
+          </a:solidFill>
+          <a:ln>
+            <a:noFill/>
+          </a:ln>
+        </p:spPr>
+      </p:sp>
+      <p:sp>
+        <p:nvSpPr>
+          <p:cNvPr id="410" name="Motif 410"/>
+          <p:cNvSpPr/>
+          <p:nvPr/>
+        </p:nvSpPr>
+        <p:spPr>
+          <a:xfrm>
+            <a:off x="7784287" y="301752"/>
+            <a:ext cx="76810" cy="76810"/>
+          </a:xfrm>
+          <a:prstGeom prst="ellipse">
+            <a:avLst/>
+          </a:prstGeom>
+          <a:solidFill>
+            <a:srgbClr val="0B1F33">
+              <a:alpha val="85000"/>
+            </a:srgbClr>
+          </a:solidFill>
+          <a:ln>
+            <a:noFill/>
+          </a:ln>
+        </p:spPr>
+      </p:sp>
+      <p:sp>
+        <p:nvSpPr>
+          <p:cNvPr id="411" name="Motif 411"/>
+          <p:cNvSpPr/>
+          <p:nvPr/>
+        </p:nvSpPr>
+        <p:spPr>
+          <a:xfrm>
+            <a:off x="7863840" y="713232"/>
+            <a:ext cx="65837" cy="65837"/>
+          </a:xfrm>
+          <a:prstGeom prst="ellipse">
+            <a:avLst/>
+          </a:prstGeom>
+          <a:solidFill>
+            <a:srgbClr val="0B1F33">
+              <a:alpha val="85000"/>
+            </a:srgbClr>
+          </a:solidFill>
+          <a:ln>
+            <a:noFill/>
+          </a:ln>
+        </p:spPr>
+      </p:sp>
+      <p:sp>
+        <p:nvSpPr>
+          <p:cNvPr id="412" name="Motif 412"/>
+          <p:cNvSpPr/>
+          <p:nvPr/>
+        </p:nvSpPr>
+        <p:spPr>
+          <a:xfrm>
+            <a:off x="8124444" y="458114"/>
+            <a:ext cx="137160" cy="137160"/>
+          </a:xfrm>
+          <a:prstGeom prst="ellipse">
+            <a:avLst/>
+          </a:prstGeom>
+          <a:solidFill>
+            <a:srgbClr val="E63946">
+              <a:alpha val="85000"/>
+            </a:srgbClr>
+          </a:solidFill>
+          <a:ln>
+            <a:noFill/>
+          </a:ln>
+        </p:spPr>
+      </p:sp>
+      <p:sp>
+        <p:nvSpPr>
+          <p:cNvPr id="413" name="Motif 413"/>
+          <p:cNvSpPr/>
+          <p:nvPr/>
+        </p:nvSpPr>
+        <p:spPr>
+          <a:xfrm>
+            <a:off x="8448142" y="277063"/>
+            <a:ext cx="82296" cy="82296"/>
+          </a:xfrm>
+          <a:prstGeom prst="ellipse">
+            <a:avLst/>
+          </a:prstGeom>
+          <a:solidFill>
+            <a:srgbClr val="1FA2A6">
+              <a:alpha val="85000"/>
+            </a:srgbClr>
+          </a:solidFill>
+          <a:ln>
+            <a:noFill/>
+          </a:ln>
+        </p:spPr>
+      </p:sp>
+      <p:sp>
+        <p:nvSpPr>
+          <p:cNvPr id="414" name="Motif 414"/>
+          <p:cNvSpPr/>
+          <p:nvPr/>
+        </p:nvSpPr>
+        <p:spPr>
+          <a:xfrm>
+            <a:off x="8603132" y="622706"/>
+            <a:ext cx="93269" cy="93269"/>
+          </a:xfrm>
+          <a:prstGeom prst="ellipse">
+            <a:avLst/>
+          </a:prstGeom>
+          <a:solidFill>
+            <a:srgbClr val="1FA2A6">
+              <a:alpha val="85000"/>
+            </a:srgbClr>
+          </a:solidFill>
+          <a:ln>
+            <a:noFill/>
+          </a:ln>
+        </p:spPr>
+      </p:sp>
       <p:sp>
         <p:nvSpPr>
           <p:cNvPr id="2" name="Text 0"/>
@@ -6796,110 +8413,60 @@
           </a:p>
         </p:txBody>
       </p:sp>
-      <p:sp>
-        <p:nvSpPr>
-          <p:cNvPr id="6" name="Shape 3"/>
-          <p:cNvSpPr/>
-          <p:nvPr/>
-        </p:nvSpPr>
-        <p:spPr>
-          <a:xfrm>
-            <a:off x="457200" y="1051560"/>
-            <a:ext cx="8229600" cy="3474720"/>
-          </a:xfrm>
-          <a:prstGeom prst="rect">
-            <a:avLst/>
-          </a:prstGeom>
-          <a:solidFill>
-            <a:srgbClr val="F2F6F9"/>
-          </a:solidFill>
-          <a:ln w="15875">
-            <a:solidFill>
-              <a:srgbClr val="8A99A8"/>
-            </a:solidFill>
-            <a:prstDash val="dash"/>
-          </a:ln>
-        </p:spPr>
-      </p:sp>
-      <p:sp>
-        <p:nvSpPr>
-          <p:cNvPr id="7" name="Text 4"/>
-          <p:cNvSpPr txBox="1"/>
-          <p:nvPr/>
-        </p:nvSpPr>
-        <p:spPr>
-          <a:xfrm>
-            <a:off x="731520" y="1051560"/>
-            <a:ext cx="7680960" cy="3474720"/>
-          </a:xfrm>
-          <a:prstGeom prst="rect">
-            <a:avLst/>
-          </a:prstGeom>
-          <a:noFill/>
-          <a:ln/>
-        </p:spPr>
-        <p:txBody>
-          <a:bodyPr wrap="square" lIns="0" tIns="0" rIns="0" bIns="0" rtlCol="0" anchor="ctr"/>
-          <a:lstStyle/>
-          <a:p>
-            <a:pPr algn="ctr" indent="0" marL="0">
-              <a:spcAft>
-                <a:spcPts val="600"/>
-              </a:spcAft>
-              <a:buNone/>
-            </a:pPr>
-            <a:r>
-              <a:rPr lang="en-US" sz="1400" b="1" dirty="0">
-                <a:solidFill>
-                  <a:srgbClr val="E63946"/>
-                </a:solidFill>
-                <a:latin typeface="Calibri" pitchFamily="34" charset="0"/>
-                <a:ea typeface="Calibri" pitchFamily="34" charset="-122"/>
-                <a:cs typeface="Calibri" pitchFamily="34" charset="-120"/>
-              </a:rPr>
-              <a:t>[ INSERT SCREENSHOT ]</a:t>
-            </a:r>
-            <a:endParaRPr lang="en-US" sz="1400" dirty="0"/>
-          </a:p>
-          <a:p>
-            <a:pPr algn="ctr" indent="0" marL="0">
-              <a:spcAft>
-                <a:spcPts val="600"/>
-              </a:spcAft>
-              <a:buNone/>
-            </a:pPr>
-            <a:r>
-              <a:rPr lang="en-US" sz="1300" b="1" dirty="0">
-                <a:solidFill>
-                  <a:srgbClr val="0B1F33"/>
-                </a:solidFill>
-                <a:latin typeface="Calibri" pitchFamily="34" charset="0"/>
-                <a:ea typeface="Calibri" pitchFamily="34" charset="-122"/>
-                <a:cs typeface="Calibri" pitchFamily="34" charset="-120"/>
-              </a:rPr>
-              <a:t>Admin Dashboard – Overview</a:t>
-            </a:r>
-            <a:endParaRPr lang="en-US" sz="1400" dirty="0"/>
-          </a:p>
-          <a:p>
-            <a:pPr algn="ctr" indent="0" marL="0">
-              <a:spcAft>
-                <a:spcPts val="600"/>
-              </a:spcAft>
-              <a:buNone/>
-            </a:pPr>
-            <a:r>
-              <a:rPr lang="en-US" sz="1100" i="1" dirty="0">
+      <p:pic>
+        <p:nvPicPr>
+          <p:cNvPr id="300" name="Screenshot 300" descr="Figure 7.1"/>
+          <p:cNvPicPr>
+            <a:picLocks noChangeAspect="1"/>
+          </p:cNvPicPr>
+          <p:nvPr/>
+        </p:nvPicPr>
+        <p:blipFill>
+          <a:blip r:embed="rId90"/>
+          <a:stretch>
+            <a:fillRect/>
+          </a:stretch>
+        </p:blipFill>
+        <p:spPr>
+          <a:xfrm>
+            <a:off x="1423686" y="1051560"/>
+            <a:ext cx="6296628" cy="3108960"/>
+          </a:xfrm>
+          <a:prstGeom prst="rect">
+            <a:avLst/>
+          </a:prstGeom>
+        </p:spPr>
+      </p:pic>
+      <p:sp>
+        <p:nvSpPr>
+          <p:cNvPr id="301" name="Caption 301"/>
+          <p:cNvSpPr txBox="1"/>
+          <p:nvPr/>
+        </p:nvSpPr>
+        <p:spPr>
+          <a:xfrm>
+            <a:off x="457200" y="4233672"/>
+            <a:ext cx="8229600" cy="274320"/>
+          </a:xfrm>
+          <a:prstGeom prst="rect">
+            <a:avLst/>
+          </a:prstGeom>
+          <a:noFill/>
+        </p:spPr>
+        <p:txBody>
+          <a:bodyPr wrap="square" lIns="0" tIns="0" rIns="0" bIns="0" anchor="t"/>
+          <a:lstStyle/>
+          <a:p>
+            <a:pPr algn="ctr"/>
+            <a:r>
+              <a:rPr lang="en-US" sz="1200" i="1" dirty="0">
                 <a:solidFill>
                   <a:srgbClr val="5B6B7B"/>
                 </a:solidFill>
-                <a:latin typeface="Calibri" pitchFamily="34" charset="0"/>
-                <a:ea typeface="Calibri" pitchFamily="34" charset="-122"/>
-                <a:cs typeface="Calibri" pitchFamily="34" charset="-120"/>
-              </a:rPr>
-              <a:t>admin.html Dashboard view after an attack: stat tiles and all three charts (red and blue bars visible)</a:t>
-            </a:r>
-            <a:endParaRPr lang="en-US" sz="1400" dirty="0"/>
+                <a:latin typeface="Calibri"/>
+              </a:rPr>
+              <a:t>Admin dashboard after the attack simulation – red: brute force / XSS, blue: suspicious login</a:t>
+            </a:r>
           </a:p>
         </p:txBody>
       </p:sp>
@@ -6935,6 +8502,311 @@
           <a:chExt cx="0" cy="0"/>
         </a:xfrm>
       </p:grpSpPr>
+      <p:cxnSp>
+        <p:nvCxnSpPr>
+          <p:cNvPr id="404" name="Motif 404"/>
+          <p:cNvCxnSpPr/>
+          <p:nvPr/>
+        </p:nvCxnSpPr>
+        <p:spPr>
+          <a:xfrm flipV="1">
+            <a:off x="7501738" y="340157"/>
+            <a:ext cx="320954" cy="263347"/>
+          </a:xfrm>
+          <a:prstGeom prst="line">
+            <a:avLst/>
+          </a:prstGeom>
+          <a:ln w="9525">
+            <a:solidFill>
+              <a:srgbClr val="0B1F33">
+                <a:alpha val="40000"/>
+              </a:srgbClr>
+            </a:solidFill>
+          </a:ln>
+        </p:spPr>
+      </p:cxnSp>
+      <p:cxnSp>
+        <p:nvCxnSpPr>
+          <p:cNvPr id="405" name="Motif 405"/>
+          <p:cNvCxnSpPr/>
+          <p:nvPr/>
+        </p:nvCxnSpPr>
+        <p:spPr>
+          <a:xfrm>
+            <a:off x="7501738" y="603504"/>
+            <a:ext cx="395021" cy="142646"/>
+          </a:xfrm>
+          <a:prstGeom prst="line">
+            <a:avLst/>
+          </a:prstGeom>
+          <a:ln w="9525">
+            <a:solidFill>
+              <a:srgbClr val="0B1F33">
+                <a:alpha val="40000"/>
+              </a:srgbClr>
+            </a:solidFill>
+          </a:ln>
+        </p:spPr>
+      </p:cxnSp>
+      <p:cxnSp>
+        <p:nvCxnSpPr>
+          <p:cNvPr id="406" name="Motif 406"/>
+          <p:cNvCxnSpPr/>
+          <p:nvPr/>
+        </p:nvCxnSpPr>
+        <p:spPr>
+          <a:xfrm>
+            <a:off x="7822692" y="340157"/>
+            <a:ext cx="370332" cy="186538"/>
+          </a:xfrm>
+          <a:prstGeom prst="line">
+            <a:avLst/>
+          </a:prstGeom>
+          <a:ln w="9525">
+            <a:solidFill>
+              <a:srgbClr val="0B1F33">
+                <a:alpha val="40000"/>
+              </a:srgbClr>
+            </a:solidFill>
+          </a:ln>
+        </p:spPr>
+      </p:cxnSp>
+      <p:cxnSp>
+        <p:nvCxnSpPr>
+          <p:cNvPr id="407" name="Motif 407"/>
+          <p:cNvCxnSpPr/>
+          <p:nvPr/>
+        </p:nvCxnSpPr>
+        <p:spPr>
+          <a:xfrm flipV="1">
+            <a:off x="7896758" y="526694"/>
+            <a:ext cx="296266" cy="219456"/>
+          </a:xfrm>
+          <a:prstGeom prst="line">
+            <a:avLst/>
+          </a:prstGeom>
+          <a:ln w="9525">
+            <a:solidFill>
+              <a:srgbClr val="0B1F33">
+                <a:alpha val="40000"/>
+              </a:srgbClr>
+            </a:solidFill>
+          </a:ln>
+        </p:spPr>
+      </p:cxnSp>
+      <p:cxnSp>
+        <p:nvCxnSpPr>
+          <p:cNvPr id="408" name="Motif 408"/>
+          <p:cNvCxnSpPr/>
+          <p:nvPr/>
+        </p:nvCxnSpPr>
+        <p:spPr>
+          <a:xfrm flipV="1">
+            <a:off x="8193024" y="318211"/>
+            <a:ext cx="296266" cy="208483"/>
+          </a:xfrm>
+          <a:prstGeom prst="line">
+            <a:avLst/>
+          </a:prstGeom>
+          <a:ln w="9525">
+            <a:solidFill>
+              <a:srgbClr val="0B1F33">
+                <a:alpha val="40000"/>
+              </a:srgbClr>
+            </a:solidFill>
+          </a:ln>
+        </p:spPr>
+      </p:cxnSp>
+      <p:cxnSp>
+        <p:nvCxnSpPr>
+          <p:cNvPr id="409" name="Motif 409"/>
+          <p:cNvCxnSpPr/>
+          <p:nvPr/>
+        </p:nvCxnSpPr>
+        <p:spPr>
+          <a:xfrm>
+            <a:off x="8193024" y="526694"/>
+            <a:ext cx="456743" cy="142646"/>
+          </a:xfrm>
+          <a:prstGeom prst="line">
+            <a:avLst/>
+          </a:prstGeom>
+          <a:ln w="9525">
+            <a:solidFill>
+              <a:srgbClr val="0B1F33">
+                <a:alpha val="40000"/>
+              </a:srgbClr>
+            </a:solidFill>
+          </a:ln>
+        </p:spPr>
+      </p:cxnSp>
+      <p:cxnSp>
+        <p:nvCxnSpPr>
+          <p:cNvPr id="410" name="Motif 410"/>
+          <p:cNvCxnSpPr/>
+          <p:nvPr/>
+        </p:nvCxnSpPr>
+        <p:spPr>
+          <a:xfrm>
+            <a:off x="8489290" y="318211"/>
+            <a:ext cx="160477" cy="351130"/>
+          </a:xfrm>
+          <a:prstGeom prst="line">
+            <a:avLst/>
+          </a:prstGeom>
+          <a:ln w="9525">
+            <a:solidFill>
+              <a:srgbClr val="0B1F33">
+                <a:alpha val="40000"/>
+              </a:srgbClr>
+            </a:solidFill>
+          </a:ln>
+        </p:spPr>
+      </p:cxnSp>
+      <p:sp>
+        <p:nvSpPr>
+          <p:cNvPr id="411" name="Motif 411"/>
+          <p:cNvSpPr/>
+          <p:nvPr/>
+        </p:nvSpPr>
+        <p:spPr>
+          <a:xfrm>
+            <a:off x="7452360" y="554126"/>
+            <a:ext cx="98755" cy="98755"/>
+          </a:xfrm>
+          <a:prstGeom prst="ellipse">
+            <a:avLst/>
+          </a:prstGeom>
+          <a:solidFill>
+            <a:srgbClr val="1FA2A6">
+              <a:alpha val="85000"/>
+            </a:srgbClr>
+          </a:solidFill>
+          <a:ln>
+            <a:noFill/>
+          </a:ln>
+        </p:spPr>
+      </p:sp>
+      <p:sp>
+        <p:nvSpPr>
+          <p:cNvPr id="412" name="Motif 412"/>
+          <p:cNvSpPr/>
+          <p:nvPr/>
+        </p:nvSpPr>
+        <p:spPr>
+          <a:xfrm>
+            <a:off x="7784287" y="301752"/>
+            <a:ext cx="76810" cy="76810"/>
+          </a:xfrm>
+          <a:prstGeom prst="ellipse">
+            <a:avLst/>
+          </a:prstGeom>
+          <a:solidFill>
+            <a:srgbClr val="0B1F33">
+              <a:alpha val="85000"/>
+            </a:srgbClr>
+          </a:solidFill>
+          <a:ln>
+            <a:noFill/>
+          </a:ln>
+        </p:spPr>
+      </p:sp>
+      <p:sp>
+        <p:nvSpPr>
+          <p:cNvPr id="413" name="Motif 413"/>
+          <p:cNvSpPr/>
+          <p:nvPr/>
+        </p:nvSpPr>
+        <p:spPr>
+          <a:xfrm>
+            <a:off x="7863840" y="713232"/>
+            <a:ext cx="65837" cy="65837"/>
+          </a:xfrm>
+          <a:prstGeom prst="ellipse">
+            <a:avLst/>
+          </a:prstGeom>
+          <a:solidFill>
+            <a:srgbClr val="0B1F33">
+              <a:alpha val="85000"/>
+            </a:srgbClr>
+          </a:solidFill>
+          <a:ln>
+            <a:noFill/>
+          </a:ln>
+        </p:spPr>
+      </p:sp>
+      <p:sp>
+        <p:nvSpPr>
+          <p:cNvPr id="414" name="Motif 414"/>
+          <p:cNvSpPr/>
+          <p:nvPr/>
+        </p:nvSpPr>
+        <p:spPr>
+          <a:xfrm>
+            <a:off x="8124444" y="458114"/>
+            <a:ext cx="137160" cy="137160"/>
+          </a:xfrm>
+          <a:prstGeom prst="ellipse">
+            <a:avLst/>
+          </a:prstGeom>
+          <a:solidFill>
+            <a:srgbClr val="E63946">
+              <a:alpha val="85000"/>
+            </a:srgbClr>
+          </a:solidFill>
+          <a:ln>
+            <a:noFill/>
+          </a:ln>
+        </p:spPr>
+      </p:sp>
+      <p:sp>
+        <p:nvSpPr>
+          <p:cNvPr id="415" name="Motif 415"/>
+          <p:cNvSpPr/>
+          <p:nvPr/>
+        </p:nvSpPr>
+        <p:spPr>
+          <a:xfrm>
+            <a:off x="8448142" y="277063"/>
+            <a:ext cx="82296" cy="82296"/>
+          </a:xfrm>
+          <a:prstGeom prst="ellipse">
+            <a:avLst/>
+          </a:prstGeom>
+          <a:solidFill>
+            <a:srgbClr val="1FA2A6">
+              <a:alpha val="85000"/>
+            </a:srgbClr>
+          </a:solidFill>
+          <a:ln>
+            <a:noFill/>
+          </a:ln>
+        </p:spPr>
+      </p:sp>
+      <p:sp>
+        <p:nvSpPr>
+          <p:cNvPr id="416" name="Motif 416"/>
+          <p:cNvSpPr/>
+          <p:nvPr/>
+        </p:nvSpPr>
+        <p:spPr>
+          <a:xfrm>
+            <a:off x="8603132" y="622706"/>
+            <a:ext cx="93269" cy="93269"/>
+          </a:xfrm>
+          <a:prstGeom prst="ellipse">
+            <a:avLst/>
+          </a:prstGeom>
+          <a:solidFill>
+            <a:srgbClr val="1FA2A6">
+              <a:alpha val="85000"/>
+            </a:srgbClr>
+          </a:solidFill>
+          <a:ln>
+            <a:noFill/>
+          </a:ln>
+        </p:spPr>
+      </p:sp>
       <p:sp>
         <p:nvSpPr>
           <p:cNvPr id="2" name="Text 0"/>
@@ -7052,217 +8924,117 @@
           </a:p>
         </p:txBody>
       </p:sp>
-      <p:sp>
-        <p:nvSpPr>
-          <p:cNvPr id="6" name="Shape 3"/>
-          <p:cNvSpPr/>
-          <p:nvPr/>
-        </p:nvSpPr>
-        <p:spPr>
-          <a:xfrm>
-            <a:off x="457200" y="1051560"/>
-            <a:ext cx="5120640" cy="3474720"/>
-          </a:xfrm>
-          <a:prstGeom prst="rect">
-            <a:avLst/>
-          </a:prstGeom>
-          <a:solidFill>
-            <a:srgbClr val="F2F6F9"/>
-          </a:solidFill>
-          <a:ln w="15875">
-            <a:solidFill>
-              <a:srgbClr val="8A99A8"/>
-            </a:solidFill>
-            <a:prstDash val="dash"/>
-          </a:ln>
-        </p:spPr>
-      </p:sp>
-      <p:sp>
-        <p:nvSpPr>
-          <p:cNvPr id="7" name="Text 4"/>
-          <p:cNvSpPr txBox="1"/>
-          <p:nvPr/>
-        </p:nvSpPr>
-        <p:spPr>
-          <a:xfrm>
-            <a:off x="731520" y="1051560"/>
-            <a:ext cx="4572000" cy="3474720"/>
-          </a:xfrm>
-          <a:prstGeom prst="rect">
-            <a:avLst/>
-          </a:prstGeom>
-          <a:noFill/>
-          <a:ln/>
-        </p:spPr>
-        <p:txBody>
-          <a:bodyPr wrap="square" lIns="0" tIns="0" rIns="0" bIns="0" rtlCol="0" anchor="ctr"/>
-          <a:lstStyle/>
-          <a:p>
-            <a:pPr algn="ctr" indent="0" marL="0">
-              <a:spcAft>
-                <a:spcPts val="600"/>
-              </a:spcAft>
-              <a:buNone/>
-            </a:pPr>
-            <a:r>
-              <a:rPr lang="en-US" sz="1400" b="1" dirty="0">
-                <a:solidFill>
-                  <a:srgbClr val="E63946"/>
-                </a:solidFill>
-                <a:latin typeface="Calibri" pitchFamily="34" charset="0"/>
-                <a:ea typeface="Calibri" pitchFamily="34" charset="-122"/>
-                <a:cs typeface="Calibri" pitchFamily="34" charset="-120"/>
-              </a:rPr>
-              <a:t>[ INSERT SCREENSHOT ]</a:t>
-            </a:r>
-            <a:endParaRPr lang="en-US" sz="1400" dirty="0"/>
-          </a:p>
-          <a:p>
-            <a:pPr algn="ctr" indent="0" marL="0">
-              <a:spcAft>
-                <a:spcPts val="600"/>
-              </a:spcAft>
-              <a:buNone/>
-            </a:pPr>
-            <a:r>
-              <a:rPr lang="en-US" sz="1300" b="1" dirty="0">
-                <a:solidFill>
-                  <a:srgbClr val="0B1F33"/>
-                </a:solidFill>
-                <a:latin typeface="Calibri" pitchFamily="34" charset="0"/>
-                <a:ea typeface="Calibri" pitchFamily="34" charset="-122"/>
-                <a:cs typeface="Calibri" pitchFamily="34" charset="-120"/>
-              </a:rPr>
-              <a:t>Threats &amp; Action View</a:t>
-            </a:r>
-            <a:endParaRPr lang="en-US" sz="1400" dirty="0"/>
-          </a:p>
-          <a:p>
-            <a:pPr algn="ctr" indent="0" marL="0">
-              <a:spcAft>
-                <a:spcPts val="600"/>
-              </a:spcAft>
-              <a:buNone/>
-            </a:pPr>
-            <a:r>
-              <a:rPr lang="en-US" sz="1100" i="1" dirty="0">
+      <p:pic>
+        <p:nvPicPr>
+          <p:cNvPr id="300" name="Screenshot 300" descr="Figure 6.7"/>
+          <p:cNvPicPr>
+            <a:picLocks noChangeAspect="1"/>
+          </p:cNvPicPr>
+          <p:nvPr/>
+        </p:nvPicPr>
+        <p:blipFill>
+          <a:blip r:embed="rId90"/>
+          <a:stretch>
+            <a:fillRect/>
+          </a:stretch>
+        </p:blipFill>
+        <p:spPr>
+          <a:xfrm>
+            <a:off x="731520" y="1076983"/>
+            <a:ext cx="7680960" cy="1412194"/>
+          </a:xfrm>
+          <a:prstGeom prst="rect">
+            <a:avLst/>
+          </a:prstGeom>
+        </p:spPr>
+      </p:pic>
+      <p:sp>
+        <p:nvSpPr>
+          <p:cNvPr id="301" name="Caption 301"/>
+          <p:cNvSpPr txBox="1"/>
+          <p:nvPr/>
+        </p:nvSpPr>
+        <p:spPr>
+          <a:xfrm>
+            <a:off x="731520" y="2587752"/>
+            <a:ext cx="7680960" cy="274320"/>
+          </a:xfrm>
+          <a:prstGeom prst="rect">
+            <a:avLst/>
+          </a:prstGeom>
+          <a:noFill/>
+        </p:spPr>
+        <p:txBody>
+          <a:bodyPr wrap="square" lIns="0" tIns="0" rIns="0" bIns="0" anchor="t"/>
+          <a:lstStyle/>
+          <a:p>
+            <a:pPr algn="ctr"/>
+            <a:r>
+              <a:rPr lang="en-US" sz="1200" i="1" dirty="0">
                 <a:solidFill>
                   <a:srgbClr val="5B6B7B"/>
                 </a:solidFill>
-                <a:latin typeface="Calibri" pitchFamily="34" charset="0"/>
-                <a:ea typeface="Calibri" pitchFamily="34" charset="-122"/>
-                <a:cs typeface="Calibri" pitchFamily="34" charset="-120"/>
-              </a:rPr>
-              <a:t>Active alerts with source IP, HIGH severity, alert type, MITRE ID</a:t>
-            </a:r>
-            <a:endParaRPr lang="en-US" sz="1400" dirty="0"/>
-          </a:p>
-        </p:txBody>
-      </p:sp>
-      <p:sp>
-        <p:nvSpPr>
-          <p:cNvPr id="8" name="Shape 5"/>
-          <p:cNvSpPr/>
-          <p:nvPr/>
-        </p:nvSpPr>
-        <p:spPr>
-          <a:xfrm>
-            <a:off x="5852160" y="1051560"/>
-            <a:ext cx="2834640" cy="3474720"/>
-          </a:xfrm>
-          <a:prstGeom prst="rect">
-            <a:avLst/>
-          </a:prstGeom>
-          <a:solidFill>
-            <a:srgbClr val="F2F6F9"/>
-          </a:solidFill>
-          <a:ln w="15875">
-            <a:solidFill>
-              <a:srgbClr val="8A99A8"/>
-            </a:solidFill>
-            <a:prstDash val="dash"/>
-          </a:ln>
-        </p:spPr>
-      </p:sp>
-      <p:sp>
-        <p:nvSpPr>
-          <p:cNvPr id="9" name="Text 6"/>
-          <p:cNvSpPr txBox="1"/>
-          <p:nvPr/>
-        </p:nvSpPr>
-        <p:spPr>
-          <a:xfrm>
-            <a:off x="6126480" y="1051560"/>
-            <a:ext cx="2286000" cy="3474720"/>
-          </a:xfrm>
-          <a:prstGeom prst="rect">
-            <a:avLst/>
-          </a:prstGeom>
-          <a:noFill/>
-          <a:ln/>
-        </p:spPr>
-        <p:txBody>
-          <a:bodyPr wrap="square" lIns="0" tIns="0" rIns="0" bIns="0" rtlCol="0" anchor="ctr"/>
-          <a:lstStyle/>
-          <a:p>
-            <a:pPr algn="ctr" indent="0" marL="0">
-              <a:spcAft>
-                <a:spcPts val="600"/>
-              </a:spcAft>
-              <a:buNone/>
-            </a:pPr>
-            <a:r>
-              <a:rPr lang="en-US" sz="1400" b="1" dirty="0">
-                <a:solidFill>
-                  <a:srgbClr val="E63946"/>
-                </a:solidFill>
-                <a:latin typeface="Calibri" pitchFamily="34" charset="0"/>
-                <a:ea typeface="Calibri" pitchFamily="34" charset="-122"/>
-                <a:cs typeface="Calibri" pitchFamily="34" charset="-120"/>
-              </a:rPr>
-              <a:t>[ INSERT SCREENSHOT ]</a:t>
-            </a:r>
-            <a:endParaRPr lang="en-US" sz="1400" dirty="0"/>
-          </a:p>
-          <a:p>
-            <a:pPr algn="ctr" indent="0" marL="0">
-              <a:spcAft>
-                <a:spcPts val="600"/>
-              </a:spcAft>
-              <a:buNone/>
-            </a:pPr>
-            <a:r>
-              <a:rPr lang="en-US" sz="1300" b="1" dirty="0">
-                <a:solidFill>
-                  <a:srgbClr val="0B1F33"/>
-                </a:solidFill>
-                <a:latin typeface="Calibri" pitchFamily="34" charset="0"/>
-                <a:ea typeface="Calibri" pitchFamily="34" charset="-122"/>
-                <a:cs typeface="Calibri" pitchFamily="34" charset="-120"/>
-              </a:rPr>
-              <a:t>Coming Soon Pop-up</a:t>
-            </a:r>
-            <a:endParaRPr lang="en-US" sz="1400" dirty="0"/>
-          </a:p>
-          <a:p>
-            <a:pPr algn="ctr" indent="0" marL="0">
-              <a:spcAft>
-                <a:spcPts val="600"/>
-              </a:spcAft>
-              <a:buNone/>
-            </a:pPr>
-            <a:r>
-              <a:rPr lang="en-US" sz="1100" i="1" dirty="0">
+                <a:latin typeface="Calibri"/>
+              </a:rPr>
+              <a:t>Active alerts grouped by source IP with MITRE / CWE ID</a:t>
+            </a:r>
+          </a:p>
+        </p:txBody>
+      </p:sp>
+      <p:pic>
+        <p:nvPicPr>
+          <p:cNvPr id="302" name="Screenshot 302" descr="Figure 6.8"/>
+          <p:cNvPicPr>
+            <a:picLocks noChangeAspect="1"/>
+          </p:cNvPicPr>
+          <p:nvPr/>
+        </p:nvPicPr>
+        <p:blipFill>
+          <a:blip r:embed="rId91"/>
+          <a:stretch>
+            <a:fillRect/>
+          </a:stretch>
+        </p:blipFill>
+        <p:spPr>
+          <a:xfrm>
+            <a:off x="3260309" y="2880360"/>
+            <a:ext cx="2623382" cy="1463040"/>
+          </a:xfrm>
+          <a:prstGeom prst="rect">
+            <a:avLst/>
+          </a:prstGeom>
+        </p:spPr>
+      </p:pic>
+      <p:sp>
+        <p:nvSpPr>
+          <p:cNvPr id="303" name="Caption 303"/>
+          <p:cNvSpPr txBox="1"/>
+          <p:nvPr/>
+        </p:nvSpPr>
+        <p:spPr>
+          <a:xfrm>
+            <a:off x="457200" y="4416552"/>
+            <a:ext cx="8229600" cy="274320"/>
+          </a:xfrm>
+          <a:prstGeom prst="rect">
+            <a:avLst/>
+          </a:prstGeom>
+          <a:noFill/>
+        </p:spPr>
+        <p:txBody>
+          <a:bodyPr wrap="square" lIns="0" tIns="0" rIns="0" bIns="0" anchor="t"/>
+          <a:lstStyle/>
+          <a:p>
+            <a:pPr algn="ctr"/>
+            <a:r>
+              <a:rPr lang="en-US" sz="1200" i="1" dirty="0">
                 <a:solidFill>
                   <a:srgbClr val="5B6B7B"/>
                 </a:solidFill>
-                <a:latin typeface="Calibri" pitchFamily="34" charset="0"/>
-                <a:ea typeface="Calibri" pitchFamily="34" charset="-122"/>
-                <a:cs typeface="Calibri" pitchFamily="34" charset="-120"/>
-              </a:rPr>
-              <a:t>After clicking 'Execute IP Level Block'</a:t>
-            </a:r>
-            <a:endParaRPr lang="en-US" sz="1400" dirty="0"/>
+                <a:latin typeface="Calibri"/>
+              </a:rPr>
+              <a:t>Blocking is planned for a future version – 'Coming Soon' pop-up</a:t>
+            </a:r>
           </a:p>
         </p:txBody>
       </p:sp>
@@ -7298,6 +9070,311 @@
           <a:chExt cx="0" cy="0"/>
         </a:xfrm>
       </p:grpSpPr>
+      <p:cxnSp>
+        <p:nvCxnSpPr>
+          <p:cNvPr id="119" name="Motif 119"/>
+          <p:cNvCxnSpPr/>
+          <p:nvPr/>
+        </p:nvCxnSpPr>
+        <p:spPr>
+          <a:xfrm flipV="1">
+            <a:off x="7501738" y="340157"/>
+            <a:ext cx="320954" cy="263347"/>
+          </a:xfrm>
+          <a:prstGeom prst="line">
+            <a:avLst/>
+          </a:prstGeom>
+          <a:ln w="9525">
+            <a:solidFill>
+              <a:srgbClr val="0B1F33">
+                <a:alpha val="40000"/>
+              </a:srgbClr>
+            </a:solidFill>
+          </a:ln>
+        </p:spPr>
+      </p:cxnSp>
+      <p:cxnSp>
+        <p:nvCxnSpPr>
+          <p:cNvPr id="120" name="Motif 120"/>
+          <p:cNvCxnSpPr/>
+          <p:nvPr/>
+        </p:nvCxnSpPr>
+        <p:spPr>
+          <a:xfrm>
+            <a:off x="7501738" y="603504"/>
+            <a:ext cx="395021" cy="142646"/>
+          </a:xfrm>
+          <a:prstGeom prst="line">
+            <a:avLst/>
+          </a:prstGeom>
+          <a:ln w="9525">
+            <a:solidFill>
+              <a:srgbClr val="0B1F33">
+                <a:alpha val="40000"/>
+              </a:srgbClr>
+            </a:solidFill>
+          </a:ln>
+        </p:spPr>
+      </p:cxnSp>
+      <p:cxnSp>
+        <p:nvCxnSpPr>
+          <p:cNvPr id="121" name="Motif 121"/>
+          <p:cNvCxnSpPr/>
+          <p:nvPr/>
+        </p:nvCxnSpPr>
+        <p:spPr>
+          <a:xfrm>
+            <a:off x="7822692" y="340157"/>
+            <a:ext cx="370332" cy="186538"/>
+          </a:xfrm>
+          <a:prstGeom prst="line">
+            <a:avLst/>
+          </a:prstGeom>
+          <a:ln w="9525">
+            <a:solidFill>
+              <a:srgbClr val="0B1F33">
+                <a:alpha val="40000"/>
+              </a:srgbClr>
+            </a:solidFill>
+          </a:ln>
+        </p:spPr>
+      </p:cxnSp>
+      <p:cxnSp>
+        <p:nvCxnSpPr>
+          <p:cNvPr id="122" name="Motif 122"/>
+          <p:cNvCxnSpPr/>
+          <p:nvPr/>
+        </p:nvCxnSpPr>
+        <p:spPr>
+          <a:xfrm flipV="1">
+            <a:off x="7896758" y="526694"/>
+            <a:ext cx="296266" cy="219456"/>
+          </a:xfrm>
+          <a:prstGeom prst="line">
+            <a:avLst/>
+          </a:prstGeom>
+          <a:ln w="9525">
+            <a:solidFill>
+              <a:srgbClr val="0B1F33">
+                <a:alpha val="40000"/>
+              </a:srgbClr>
+            </a:solidFill>
+          </a:ln>
+        </p:spPr>
+      </p:cxnSp>
+      <p:cxnSp>
+        <p:nvCxnSpPr>
+          <p:cNvPr id="123" name="Motif 123"/>
+          <p:cNvCxnSpPr/>
+          <p:nvPr/>
+        </p:nvCxnSpPr>
+        <p:spPr>
+          <a:xfrm flipV="1">
+            <a:off x="8193024" y="318211"/>
+            <a:ext cx="296266" cy="208483"/>
+          </a:xfrm>
+          <a:prstGeom prst="line">
+            <a:avLst/>
+          </a:prstGeom>
+          <a:ln w="9525">
+            <a:solidFill>
+              <a:srgbClr val="0B1F33">
+                <a:alpha val="40000"/>
+              </a:srgbClr>
+            </a:solidFill>
+          </a:ln>
+        </p:spPr>
+      </p:cxnSp>
+      <p:cxnSp>
+        <p:nvCxnSpPr>
+          <p:cNvPr id="124" name="Motif 124"/>
+          <p:cNvCxnSpPr/>
+          <p:nvPr/>
+        </p:nvCxnSpPr>
+        <p:spPr>
+          <a:xfrm>
+            <a:off x="8193024" y="526694"/>
+            <a:ext cx="456743" cy="142646"/>
+          </a:xfrm>
+          <a:prstGeom prst="line">
+            <a:avLst/>
+          </a:prstGeom>
+          <a:ln w="9525">
+            <a:solidFill>
+              <a:srgbClr val="0B1F33">
+                <a:alpha val="40000"/>
+              </a:srgbClr>
+            </a:solidFill>
+          </a:ln>
+        </p:spPr>
+      </p:cxnSp>
+      <p:cxnSp>
+        <p:nvCxnSpPr>
+          <p:cNvPr id="125" name="Motif 125"/>
+          <p:cNvCxnSpPr/>
+          <p:nvPr/>
+        </p:nvCxnSpPr>
+        <p:spPr>
+          <a:xfrm>
+            <a:off x="8489290" y="318211"/>
+            <a:ext cx="160477" cy="351130"/>
+          </a:xfrm>
+          <a:prstGeom prst="line">
+            <a:avLst/>
+          </a:prstGeom>
+          <a:ln w="9525">
+            <a:solidFill>
+              <a:srgbClr val="0B1F33">
+                <a:alpha val="40000"/>
+              </a:srgbClr>
+            </a:solidFill>
+          </a:ln>
+        </p:spPr>
+      </p:cxnSp>
+      <p:sp>
+        <p:nvSpPr>
+          <p:cNvPr id="126" name="Motif 126"/>
+          <p:cNvSpPr/>
+          <p:nvPr/>
+        </p:nvSpPr>
+        <p:spPr>
+          <a:xfrm>
+            <a:off x="7452360" y="554126"/>
+            <a:ext cx="98755" cy="98755"/>
+          </a:xfrm>
+          <a:prstGeom prst="ellipse">
+            <a:avLst/>
+          </a:prstGeom>
+          <a:solidFill>
+            <a:srgbClr val="1FA2A6">
+              <a:alpha val="85000"/>
+            </a:srgbClr>
+          </a:solidFill>
+          <a:ln>
+            <a:noFill/>
+          </a:ln>
+        </p:spPr>
+      </p:sp>
+      <p:sp>
+        <p:nvSpPr>
+          <p:cNvPr id="127" name="Motif 127"/>
+          <p:cNvSpPr/>
+          <p:nvPr/>
+        </p:nvSpPr>
+        <p:spPr>
+          <a:xfrm>
+            <a:off x="7784287" y="301752"/>
+            <a:ext cx="76810" cy="76810"/>
+          </a:xfrm>
+          <a:prstGeom prst="ellipse">
+            <a:avLst/>
+          </a:prstGeom>
+          <a:solidFill>
+            <a:srgbClr val="0B1F33">
+              <a:alpha val="85000"/>
+            </a:srgbClr>
+          </a:solidFill>
+          <a:ln>
+            <a:noFill/>
+          </a:ln>
+        </p:spPr>
+      </p:sp>
+      <p:sp>
+        <p:nvSpPr>
+          <p:cNvPr id="128" name="Motif 128"/>
+          <p:cNvSpPr/>
+          <p:nvPr/>
+        </p:nvSpPr>
+        <p:spPr>
+          <a:xfrm>
+            <a:off x="7863840" y="713232"/>
+            <a:ext cx="65837" cy="65837"/>
+          </a:xfrm>
+          <a:prstGeom prst="ellipse">
+            <a:avLst/>
+          </a:prstGeom>
+          <a:solidFill>
+            <a:srgbClr val="0B1F33">
+              <a:alpha val="85000"/>
+            </a:srgbClr>
+          </a:solidFill>
+          <a:ln>
+            <a:noFill/>
+          </a:ln>
+        </p:spPr>
+      </p:sp>
+      <p:sp>
+        <p:nvSpPr>
+          <p:cNvPr id="129" name="Motif 129"/>
+          <p:cNvSpPr/>
+          <p:nvPr/>
+        </p:nvSpPr>
+        <p:spPr>
+          <a:xfrm>
+            <a:off x="8124444" y="458114"/>
+            <a:ext cx="137160" cy="137160"/>
+          </a:xfrm>
+          <a:prstGeom prst="ellipse">
+            <a:avLst/>
+          </a:prstGeom>
+          <a:solidFill>
+            <a:srgbClr val="E63946">
+              <a:alpha val="85000"/>
+            </a:srgbClr>
+          </a:solidFill>
+          <a:ln>
+            <a:noFill/>
+          </a:ln>
+        </p:spPr>
+      </p:sp>
+      <p:sp>
+        <p:nvSpPr>
+          <p:cNvPr id="130" name="Motif 130"/>
+          <p:cNvSpPr/>
+          <p:nvPr/>
+        </p:nvSpPr>
+        <p:spPr>
+          <a:xfrm>
+            <a:off x="8448142" y="277063"/>
+            <a:ext cx="82296" cy="82296"/>
+          </a:xfrm>
+          <a:prstGeom prst="ellipse">
+            <a:avLst/>
+          </a:prstGeom>
+          <a:solidFill>
+            <a:srgbClr val="1FA2A6">
+              <a:alpha val="85000"/>
+            </a:srgbClr>
+          </a:solidFill>
+          <a:ln>
+            <a:noFill/>
+          </a:ln>
+        </p:spPr>
+      </p:sp>
+      <p:sp>
+        <p:nvSpPr>
+          <p:cNvPr id="131" name="Motif 131"/>
+          <p:cNvSpPr/>
+          <p:nvPr/>
+        </p:nvSpPr>
+        <p:spPr>
+          <a:xfrm>
+            <a:off x="8603132" y="622706"/>
+            <a:ext cx="93269" cy="93269"/>
+          </a:xfrm>
+          <a:prstGeom prst="ellipse">
+            <a:avLst/>
+          </a:prstGeom>
+          <a:solidFill>
+            <a:srgbClr val="1FA2A6">
+              <a:alpha val="85000"/>
+            </a:srgbClr>
+          </a:solidFill>
+          <a:ln>
+            <a:noFill/>
+          </a:ln>
+        </p:spPr>
+      </p:sp>
       <p:sp>
         <p:nvSpPr>
           <p:cNvPr id="2" name="Text 0"/>
@@ -8052,6 +10129,311 @@
           <a:chExt cx="0" cy="0"/>
         </a:xfrm>
       </p:grpSpPr>
+      <p:cxnSp>
+        <p:nvCxnSpPr>
+          <p:cNvPr id="136" name="Motif 136"/>
+          <p:cNvCxnSpPr/>
+          <p:nvPr/>
+        </p:nvCxnSpPr>
+        <p:spPr>
+          <a:xfrm flipV="1">
+            <a:off x="7501738" y="340157"/>
+            <a:ext cx="320954" cy="263347"/>
+          </a:xfrm>
+          <a:prstGeom prst="line">
+            <a:avLst/>
+          </a:prstGeom>
+          <a:ln w="9525">
+            <a:solidFill>
+              <a:srgbClr val="0B1F33">
+                <a:alpha val="40000"/>
+              </a:srgbClr>
+            </a:solidFill>
+          </a:ln>
+        </p:spPr>
+      </p:cxnSp>
+      <p:cxnSp>
+        <p:nvCxnSpPr>
+          <p:cNvPr id="137" name="Motif 137"/>
+          <p:cNvCxnSpPr/>
+          <p:nvPr/>
+        </p:nvCxnSpPr>
+        <p:spPr>
+          <a:xfrm>
+            <a:off x="7501738" y="603504"/>
+            <a:ext cx="395021" cy="142646"/>
+          </a:xfrm>
+          <a:prstGeom prst="line">
+            <a:avLst/>
+          </a:prstGeom>
+          <a:ln w="9525">
+            <a:solidFill>
+              <a:srgbClr val="0B1F33">
+                <a:alpha val="40000"/>
+              </a:srgbClr>
+            </a:solidFill>
+          </a:ln>
+        </p:spPr>
+      </p:cxnSp>
+      <p:cxnSp>
+        <p:nvCxnSpPr>
+          <p:cNvPr id="138" name="Motif 138"/>
+          <p:cNvCxnSpPr/>
+          <p:nvPr/>
+        </p:nvCxnSpPr>
+        <p:spPr>
+          <a:xfrm>
+            <a:off x="7822692" y="340157"/>
+            <a:ext cx="370332" cy="186538"/>
+          </a:xfrm>
+          <a:prstGeom prst="line">
+            <a:avLst/>
+          </a:prstGeom>
+          <a:ln w="9525">
+            <a:solidFill>
+              <a:srgbClr val="0B1F33">
+                <a:alpha val="40000"/>
+              </a:srgbClr>
+            </a:solidFill>
+          </a:ln>
+        </p:spPr>
+      </p:cxnSp>
+      <p:cxnSp>
+        <p:nvCxnSpPr>
+          <p:cNvPr id="139" name="Motif 139"/>
+          <p:cNvCxnSpPr/>
+          <p:nvPr/>
+        </p:nvCxnSpPr>
+        <p:spPr>
+          <a:xfrm flipV="1">
+            <a:off x="7896758" y="526694"/>
+            <a:ext cx="296266" cy="219456"/>
+          </a:xfrm>
+          <a:prstGeom prst="line">
+            <a:avLst/>
+          </a:prstGeom>
+          <a:ln w="9525">
+            <a:solidFill>
+              <a:srgbClr val="0B1F33">
+                <a:alpha val="40000"/>
+              </a:srgbClr>
+            </a:solidFill>
+          </a:ln>
+        </p:spPr>
+      </p:cxnSp>
+      <p:cxnSp>
+        <p:nvCxnSpPr>
+          <p:cNvPr id="140" name="Motif 140"/>
+          <p:cNvCxnSpPr/>
+          <p:nvPr/>
+        </p:nvCxnSpPr>
+        <p:spPr>
+          <a:xfrm flipV="1">
+            <a:off x="8193024" y="318211"/>
+            <a:ext cx="296266" cy="208483"/>
+          </a:xfrm>
+          <a:prstGeom prst="line">
+            <a:avLst/>
+          </a:prstGeom>
+          <a:ln w="9525">
+            <a:solidFill>
+              <a:srgbClr val="0B1F33">
+                <a:alpha val="40000"/>
+              </a:srgbClr>
+            </a:solidFill>
+          </a:ln>
+        </p:spPr>
+      </p:cxnSp>
+      <p:cxnSp>
+        <p:nvCxnSpPr>
+          <p:cNvPr id="141" name="Motif 141"/>
+          <p:cNvCxnSpPr/>
+          <p:nvPr/>
+        </p:nvCxnSpPr>
+        <p:spPr>
+          <a:xfrm>
+            <a:off x="8193024" y="526694"/>
+            <a:ext cx="456743" cy="142646"/>
+          </a:xfrm>
+          <a:prstGeom prst="line">
+            <a:avLst/>
+          </a:prstGeom>
+          <a:ln w="9525">
+            <a:solidFill>
+              <a:srgbClr val="0B1F33">
+                <a:alpha val="40000"/>
+              </a:srgbClr>
+            </a:solidFill>
+          </a:ln>
+        </p:spPr>
+      </p:cxnSp>
+      <p:cxnSp>
+        <p:nvCxnSpPr>
+          <p:cNvPr id="142" name="Motif 142"/>
+          <p:cNvCxnSpPr/>
+          <p:nvPr/>
+        </p:nvCxnSpPr>
+        <p:spPr>
+          <a:xfrm>
+            <a:off x="8489290" y="318211"/>
+            <a:ext cx="160477" cy="351130"/>
+          </a:xfrm>
+          <a:prstGeom prst="line">
+            <a:avLst/>
+          </a:prstGeom>
+          <a:ln w="9525">
+            <a:solidFill>
+              <a:srgbClr val="0B1F33">
+                <a:alpha val="40000"/>
+              </a:srgbClr>
+            </a:solidFill>
+          </a:ln>
+        </p:spPr>
+      </p:cxnSp>
+      <p:sp>
+        <p:nvSpPr>
+          <p:cNvPr id="143" name="Motif 143"/>
+          <p:cNvSpPr/>
+          <p:nvPr/>
+        </p:nvSpPr>
+        <p:spPr>
+          <a:xfrm>
+            <a:off x="7452360" y="554126"/>
+            <a:ext cx="98755" cy="98755"/>
+          </a:xfrm>
+          <a:prstGeom prst="ellipse">
+            <a:avLst/>
+          </a:prstGeom>
+          <a:solidFill>
+            <a:srgbClr val="1FA2A6">
+              <a:alpha val="85000"/>
+            </a:srgbClr>
+          </a:solidFill>
+          <a:ln>
+            <a:noFill/>
+          </a:ln>
+        </p:spPr>
+      </p:sp>
+      <p:sp>
+        <p:nvSpPr>
+          <p:cNvPr id="144" name="Motif 144"/>
+          <p:cNvSpPr/>
+          <p:nvPr/>
+        </p:nvSpPr>
+        <p:spPr>
+          <a:xfrm>
+            <a:off x="7784287" y="301752"/>
+            <a:ext cx="76810" cy="76810"/>
+          </a:xfrm>
+          <a:prstGeom prst="ellipse">
+            <a:avLst/>
+          </a:prstGeom>
+          <a:solidFill>
+            <a:srgbClr val="0B1F33">
+              <a:alpha val="85000"/>
+            </a:srgbClr>
+          </a:solidFill>
+          <a:ln>
+            <a:noFill/>
+          </a:ln>
+        </p:spPr>
+      </p:sp>
+      <p:sp>
+        <p:nvSpPr>
+          <p:cNvPr id="145" name="Motif 145"/>
+          <p:cNvSpPr/>
+          <p:nvPr/>
+        </p:nvSpPr>
+        <p:spPr>
+          <a:xfrm>
+            <a:off x="7863840" y="713232"/>
+            <a:ext cx="65837" cy="65837"/>
+          </a:xfrm>
+          <a:prstGeom prst="ellipse">
+            <a:avLst/>
+          </a:prstGeom>
+          <a:solidFill>
+            <a:srgbClr val="0B1F33">
+              <a:alpha val="85000"/>
+            </a:srgbClr>
+          </a:solidFill>
+          <a:ln>
+            <a:noFill/>
+          </a:ln>
+        </p:spPr>
+      </p:sp>
+      <p:sp>
+        <p:nvSpPr>
+          <p:cNvPr id="146" name="Motif 146"/>
+          <p:cNvSpPr/>
+          <p:nvPr/>
+        </p:nvSpPr>
+        <p:spPr>
+          <a:xfrm>
+            <a:off x="8124444" y="458114"/>
+            <a:ext cx="137160" cy="137160"/>
+          </a:xfrm>
+          <a:prstGeom prst="ellipse">
+            <a:avLst/>
+          </a:prstGeom>
+          <a:solidFill>
+            <a:srgbClr val="E63946">
+              <a:alpha val="85000"/>
+            </a:srgbClr>
+          </a:solidFill>
+          <a:ln>
+            <a:noFill/>
+          </a:ln>
+        </p:spPr>
+      </p:sp>
+      <p:sp>
+        <p:nvSpPr>
+          <p:cNvPr id="147" name="Motif 147"/>
+          <p:cNvSpPr/>
+          <p:nvPr/>
+        </p:nvSpPr>
+        <p:spPr>
+          <a:xfrm>
+            <a:off x="8448142" y="277063"/>
+            <a:ext cx="82296" cy="82296"/>
+          </a:xfrm>
+          <a:prstGeom prst="ellipse">
+            <a:avLst/>
+          </a:prstGeom>
+          <a:solidFill>
+            <a:srgbClr val="1FA2A6">
+              <a:alpha val="85000"/>
+            </a:srgbClr>
+          </a:solidFill>
+          <a:ln>
+            <a:noFill/>
+          </a:ln>
+        </p:spPr>
+      </p:sp>
+      <p:sp>
+        <p:nvSpPr>
+          <p:cNvPr id="148" name="Motif 148"/>
+          <p:cNvSpPr/>
+          <p:nvPr/>
+        </p:nvSpPr>
+        <p:spPr>
+          <a:xfrm>
+            <a:off x="8603132" y="622706"/>
+            <a:ext cx="93269" cy="93269"/>
+          </a:xfrm>
+          <a:prstGeom prst="ellipse">
+            <a:avLst/>
+          </a:prstGeom>
+          <a:solidFill>
+            <a:srgbClr val="1FA2A6">
+              <a:alpha val="85000"/>
+            </a:srgbClr>
+          </a:solidFill>
+          <a:ln>
+            <a:noFill/>
+          </a:ln>
+        </p:spPr>
+      </p:sp>
       <p:sp>
         <p:nvSpPr>
           <p:cNvPr id="2" name="Text 0"/>
@@ -9215,6 +11597,311 @@
           <a:chExt cx="0" cy="0"/>
         </a:xfrm>
       </p:grpSpPr>
+      <p:cxnSp>
+        <p:nvCxnSpPr>
+          <p:cNvPr id="146" name="Motif 146"/>
+          <p:cNvCxnSpPr/>
+          <p:nvPr/>
+        </p:nvCxnSpPr>
+        <p:spPr>
+          <a:xfrm flipV="1">
+            <a:off x="7501738" y="340157"/>
+            <a:ext cx="320954" cy="263347"/>
+          </a:xfrm>
+          <a:prstGeom prst="line">
+            <a:avLst/>
+          </a:prstGeom>
+          <a:ln w="9525">
+            <a:solidFill>
+              <a:srgbClr val="0B1F33">
+                <a:alpha val="40000"/>
+              </a:srgbClr>
+            </a:solidFill>
+          </a:ln>
+        </p:spPr>
+      </p:cxnSp>
+      <p:cxnSp>
+        <p:nvCxnSpPr>
+          <p:cNvPr id="147" name="Motif 147"/>
+          <p:cNvCxnSpPr/>
+          <p:nvPr/>
+        </p:nvCxnSpPr>
+        <p:spPr>
+          <a:xfrm>
+            <a:off x="7501738" y="603504"/>
+            <a:ext cx="395021" cy="142646"/>
+          </a:xfrm>
+          <a:prstGeom prst="line">
+            <a:avLst/>
+          </a:prstGeom>
+          <a:ln w="9525">
+            <a:solidFill>
+              <a:srgbClr val="0B1F33">
+                <a:alpha val="40000"/>
+              </a:srgbClr>
+            </a:solidFill>
+          </a:ln>
+        </p:spPr>
+      </p:cxnSp>
+      <p:cxnSp>
+        <p:nvCxnSpPr>
+          <p:cNvPr id="148" name="Motif 148"/>
+          <p:cNvCxnSpPr/>
+          <p:nvPr/>
+        </p:nvCxnSpPr>
+        <p:spPr>
+          <a:xfrm>
+            <a:off x="7822692" y="340157"/>
+            <a:ext cx="370332" cy="186538"/>
+          </a:xfrm>
+          <a:prstGeom prst="line">
+            <a:avLst/>
+          </a:prstGeom>
+          <a:ln w="9525">
+            <a:solidFill>
+              <a:srgbClr val="0B1F33">
+                <a:alpha val="40000"/>
+              </a:srgbClr>
+            </a:solidFill>
+          </a:ln>
+        </p:spPr>
+      </p:cxnSp>
+      <p:cxnSp>
+        <p:nvCxnSpPr>
+          <p:cNvPr id="149" name="Motif 149"/>
+          <p:cNvCxnSpPr/>
+          <p:nvPr/>
+        </p:nvCxnSpPr>
+        <p:spPr>
+          <a:xfrm flipV="1">
+            <a:off x="7896758" y="526694"/>
+            <a:ext cx="296266" cy="219456"/>
+          </a:xfrm>
+          <a:prstGeom prst="line">
+            <a:avLst/>
+          </a:prstGeom>
+          <a:ln w="9525">
+            <a:solidFill>
+              <a:srgbClr val="0B1F33">
+                <a:alpha val="40000"/>
+              </a:srgbClr>
+            </a:solidFill>
+          </a:ln>
+        </p:spPr>
+      </p:cxnSp>
+      <p:cxnSp>
+        <p:nvCxnSpPr>
+          <p:cNvPr id="150" name="Motif 150"/>
+          <p:cNvCxnSpPr/>
+          <p:nvPr/>
+        </p:nvCxnSpPr>
+        <p:spPr>
+          <a:xfrm flipV="1">
+            <a:off x="8193024" y="318211"/>
+            <a:ext cx="296266" cy="208483"/>
+          </a:xfrm>
+          <a:prstGeom prst="line">
+            <a:avLst/>
+          </a:prstGeom>
+          <a:ln w="9525">
+            <a:solidFill>
+              <a:srgbClr val="0B1F33">
+                <a:alpha val="40000"/>
+              </a:srgbClr>
+            </a:solidFill>
+          </a:ln>
+        </p:spPr>
+      </p:cxnSp>
+      <p:cxnSp>
+        <p:nvCxnSpPr>
+          <p:cNvPr id="151" name="Motif 151"/>
+          <p:cNvCxnSpPr/>
+          <p:nvPr/>
+        </p:nvCxnSpPr>
+        <p:spPr>
+          <a:xfrm>
+            <a:off x="8193024" y="526694"/>
+            <a:ext cx="456743" cy="142646"/>
+          </a:xfrm>
+          <a:prstGeom prst="line">
+            <a:avLst/>
+          </a:prstGeom>
+          <a:ln w="9525">
+            <a:solidFill>
+              <a:srgbClr val="0B1F33">
+                <a:alpha val="40000"/>
+              </a:srgbClr>
+            </a:solidFill>
+          </a:ln>
+        </p:spPr>
+      </p:cxnSp>
+      <p:cxnSp>
+        <p:nvCxnSpPr>
+          <p:cNvPr id="152" name="Motif 152"/>
+          <p:cNvCxnSpPr/>
+          <p:nvPr/>
+        </p:nvCxnSpPr>
+        <p:spPr>
+          <a:xfrm>
+            <a:off x="8489290" y="318211"/>
+            <a:ext cx="160477" cy="351130"/>
+          </a:xfrm>
+          <a:prstGeom prst="line">
+            <a:avLst/>
+          </a:prstGeom>
+          <a:ln w="9525">
+            <a:solidFill>
+              <a:srgbClr val="0B1F33">
+                <a:alpha val="40000"/>
+              </a:srgbClr>
+            </a:solidFill>
+          </a:ln>
+        </p:spPr>
+      </p:cxnSp>
+      <p:sp>
+        <p:nvSpPr>
+          <p:cNvPr id="153" name="Motif 153"/>
+          <p:cNvSpPr/>
+          <p:nvPr/>
+        </p:nvSpPr>
+        <p:spPr>
+          <a:xfrm>
+            <a:off x="7452360" y="554126"/>
+            <a:ext cx="98755" cy="98755"/>
+          </a:xfrm>
+          <a:prstGeom prst="ellipse">
+            <a:avLst/>
+          </a:prstGeom>
+          <a:solidFill>
+            <a:srgbClr val="1FA2A6">
+              <a:alpha val="85000"/>
+            </a:srgbClr>
+          </a:solidFill>
+          <a:ln>
+            <a:noFill/>
+          </a:ln>
+        </p:spPr>
+      </p:sp>
+      <p:sp>
+        <p:nvSpPr>
+          <p:cNvPr id="154" name="Motif 154"/>
+          <p:cNvSpPr/>
+          <p:nvPr/>
+        </p:nvSpPr>
+        <p:spPr>
+          <a:xfrm>
+            <a:off x="7784287" y="301752"/>
+            <a:ext cx="76810" cy="76810"/>
+          </a:xfrm>
+          <a:prstGeom prst="ellipse">
+            <a:avLst/>
+          </a:prstGeom>
+          <a:solidFill>
+            <a:srgbClr val="0B1F33">
+              <a:alpha val="85000"/>
+            </a:srgbClr>
+          </a:solidFill>
+          <a:ln>
+            <a:noFill/>
+          </a:ln>
+        </p:spPr>
+      </p:sp>
+      <p:sp>
+        <p:nvSpPr>
+          <p:cNvPr id="155" name="Motif 155"/>
+          <p:cNvSpPr/>
+          <p:nvPr/>
+        </p:nvSpPr>
+        <p:spPr>
+          <a:xfrm>
+            <a:off x="7863840" y="713232"/>
+            <a:ext cx="65837" cy="65837"/>
+          </a:xfrm>
+          <a:prstGeom prst="ellipse">
+            <a:avLst/>
+          </a:prstGeom>
+          <a:solidFill>
+            <a:srgbClr val="0B1F33">
+              <a:alpha val="85000"/>
+            </a:srgbClr>
+          </a:solidFill>
+          <a:ln>
+            <a:noFill/>
+          </a:ln>
+        </p:spPr>
+      </p:sp>
+      <p:sp>
+        <p:nvSpPr>
+          <p:cNvPr id="156" name="Motif 156"/>
+          <p:cNvSpPr/>
+          <p:nvPr/>
+        </p:nvSpPr>
+        <p:spPr>
+          <a:xfrm>
+            <a:off x="8124444" y="458114"/>
+            <a:ext cx="137160" cy="137160"/>
+          </a:xfrm>
+          <a:prstGeom prst="ellipse">
+            <a:avLst/>
+          </a:prstGeom>
+          <a:solidFill>
+            <a:srgbClr val="E63946">
+              <a:alpha val="85000"/>
+            </a:srgbClr>
+          </a:solidFill>
+          <a:ln>
+            <a:noFill/>
+          </a:ln>
+        </p:spPr>
+      </p:sp>
+      <p:sp>
+        <p:nvSpPr>
+          <p:cNvPr id="157" name="Motif 157"/>
+          <p:cNvSpPr/>
+          <p:nvPr/>
+        </p:nvSpPr>
+        <p:spPr>
+          <a:xfrm>
+            <a:off x="8448142" y="277063"/>
+            <a:ext cx="82296" cy="82296"/>
+          </a:xfrm>
+          <a:prstGeom prst="ellipse">
+            <a:avLst/>
+          </a:prstGeom>
+          <a:solidFill>
+            <a:srgbClr val="1FA2A6">
+              <a:alpha val="85000"/>
+            </a:srgbClr>
+          </a:solidFill>
+          <a:ln>
+            <a:noFill/>
+          </a:ln>
+        </p:spPr>
+      </p:sp>
+      <p:sp>
+        <p:nvSpPr>
+          <p:cNvPr id="158" name="Motif 158"/>
+          <p:cNvSpPr/>
+          <p:nvPr/>
+        </p:nvSpPr>
+        <p:spPr>
+          <a:xfrm>
+            <a:off x="8603132" y="622706"/>
+            <a:ext cx="93269" cy="93269"/>
+          </a:xfrm>
+          <a:prstGeom prst="ellipse">
+            <a:avLst/>
+          </a:prstGeom>
+          <a:solidFill>
+            <a:srgbClr val="1FA2A6">
+              <a:alpha val="85000"/>
+            </a:srgbClr>
+          </a:solidFill>
+          <a:ln>
+            <a:noFill/>
+          </a:ln>
+        </p:spPr>
+      </p:sp>
       <p:sp>
         <p:nvSpPr>
           <p:cNvPr id="2" name="Text 0"/>
@@ -10718,6 +13405,407 @@
       </p:grpSpPr>
       <p:sp>
         <p:nvSpPr>
+          <p:cNvPr id="116" name="Motif 116"/>
+          <p:cNvSpPr/>
+          <p:nvPr/>
+        </p:nvSpPr>
+        <p:spPr>
+          <a:xfrm>
+            <a:off x="8549640" y="4526280"/>
+            <a:ext cx="1645920" cy="1645920"/>
+          </a:xfrm>
+          <a:prstGeom prst="ellipse">
+            <a:avLst/>
+          </a:prstGeom>
+          <a:noFill/>
+          <a:ln w="12700">
+            <a:solidFill>
+              <a:srgbClr val="1FA2A6">
+                <a:alpha val="35000"/>
+              </a:srgbClr>
+            </a:solidFill>
+          </a:ln>
+        </p:spPr>
+      </p:sp>
+      <p:sp>
+        <p:nvSpPr>
+          <p:cNvPr id="117" name="Motif 117"/>
+          <p:cNvSpPr/>
+          <p:nvPr/>
+        </p:nvSpPr>
+        <p:spPr>
+          <a:xfrm>
+            <a:off x="8001000" y="3977640"/>
+            <a:ext cx="2743200" cy="2743200"/>
+          </a:xfrm>
+          <a:prstGeom prst="ellipse">
+            <a:avLst/>
+          </a:prstGeom>
+          <a:noFill/>
+          <a:ln w="12700">
+            <a:solidFill>
+              <a:srgbClr val="1FA2A6">
+                <a:alpha val="25000"/>
+              </a:srgbClr>
+            </a:solidFill>
+          </a:ln>
+        </p:spPr>
+      </p:sp>
+      <p:sp>
+        <p:nvSpPr>
+          <p:cNvPr id="118" name="Motif 118"/>
+          <p:cNvSpPr/>
+          <p:nvPr/>
+        </p:nvSpPr>
+        <p:spPr>
+          <a:xfrm>
+            <a:off x="7452360" y="3429000"/>
+            <a:ext cx="3840480" cy="3840480"/>
+          </a:xfrm>
+          <a:prstGeom prst="ellipse">
+            <a:avLst/>
+          </a:prstGeom>
+          <a:noFill/>
+          <a:ln w="12700">
+            <a:solidFill>
+              <a:srgbClr val="1FA2A6">
+                <a:alpha val="16000"/>
+              </a:srgbClr>
+            </a:solidFill>
+          </a:ln>
+        </p:spPr>
+      </p:sp>
+      <p:sp>
+        <p:nvSpPr>
+          <p:cNvPr id="119" name="Motif 119"/>
+          <p:cNvSpPr/>
+          <p:nvPr/>
+        </p:nvSpPr>
+        <p:spPr>
+          <a:xfrm>
+            <a:off x="6903720" y="2880360"/>
+            <a:ext cx="4937760" cy="4937760"/>
+          </a:xfrm>
+          <a:prstGeom prst="ellipse">
+            <a:avLst/>
+          </a:prstGeom>
+          <a:noFill/>
+          <a:ln w="12700">
+            <a:solidFill>
+              <a:srgbClr val="1FA2A6">
+                <a:alpha val="10000"/>
+              </a:srgbClr>
+            </a:solidFill>
+          </a:ln>
+        </p:spPr>
+      </p:sp>
+      <p:cxnSp>
+        <p:nvCxnSpPr>
+          <p:cNvPr id="120" name="Motif 120"/>
+          <p:cNvCxnSpPr/>
+          <p:nvPr/>
+        </p:nvCxnSpPr>
+        <p:spPr>
+          <a:xfrm flipV="1">
+            <a:off x="7413955" y="360639"/>
+            <a:ext cx="344729" cy="272125"/>
+          </a:xfrm>
+          <a:prstGeom prst="line">
+            <a:avLst/>
+          </a:prstGeom>
+          <a:ln w="9525">
+            <a:solidFill>
+              <a:srgbClr val="1FA2A6">
+                <a:alpha val="55000"/>
+              </a:srgbClr>
+            </a:solidFill>
+          </a:ln>
+        </p:spPr>
+      </p:cxnSp>
+      <p:cxnSp>
+        <p:nvCxnSpPr>
+          <p:cNvPr id="121" name="Motif 121"/>
+          <p:cNvCxnSpPr/>
+          <p:nvPr/>
+        </p:nvCxnSpPr>
+        <p:spPr>
+          <a:xfrm>
+            <a:off x="7413955" y="632765"/>
+            <a:ext cx="424282" cy="147401"/>
+          </a:xfrm>
+          <a:prstGeom prst="line">
+            <a:avLst/>
+          </a:prstGeom>
+          <a:ln w="9525">
+            <a:solidFill>
+              <a:srgbClr val="1FA2A6">
+                <a:alpha val="55000"/>
+              </a:srgbClr>
+            </a:solidFill>
+          </a:ln>
+        </p:spPr>
+      </p:cxnSp>
+      <p:cxnSp>
+        <p:nvCxnSpPr>
+          <p:cNvPr id="122" name="Motif 122"/>
+          <p:cNvCxnSpPr/>
+          <p:nvPr/>
+        </p:nvCxnSpPr>
+        <p:spPr>
+          <a:xfrm>
+            <a:off x="7758684" y="360639"/>
+            <a:ext cx="397764" cy="192756"/>
+          </a:xfrm>
+          <a:prstGeom prst="line">
+            <a:avLst/>
+          </a:prstGeom>
+          <a:ln w="9525">
+            <a:solidFill>
+              <a:srgbClr val="1FA2A6">
+                <a:alpha val="55000"/>
+              </a:srgbClr>
+            </a:solidFill>
+          </a:ln>
+        </p:spPr>
+      </p:cxnSp>
+      <p:cxnSp>
+        <p:nvCxnSpPr>
+          <p:cNvPr id="123" name="Motif 123"/>
+          <p:cNvCxnSpPr/>
+          <p:nvPr/>
+        </p:nvCxnSpPr>
+        <p:spPr>
+          <a:xfrm flipV="1">
+            <a:off x="7838237" y="553395"/>
+            <a:ext cx="318211" cy="226771"/>
+          </a:xfrm>
+          <a:prstGeom prst="line">
+            <a:avLst/>
+          </a:prstGeom>
+          <a:ln w="9525">
+            <a:solidFill>
+              <a:srgbClr val="1FA2A6">
+                <a:alpha val="55000"/>
+              </a:srgbClr>
+            </a:solidFill>
+          </a:ln>
+        </p:spPr>
+      </p:cxnSp>
+      <p:cxnSp>
+        <p:nvCxnSpPr>
+          <p:cNvPr id="124" name="Motif 124"/>
+          <p:cNvCxnSpPr/>
+          <p:nvPr/>
+        </p:nvCxnSpPr>
+        <p:spPr>
+          <a:xfrm flipV="1">
+            <a:off x="8156448" y="337962"/>
+            <a:ext cx="318211" cy="215433"/>
+          </a:xfrm>
+          <a:prstGeom prst="line">
+            <a:avLst/>
+          </a:prstGeom>
+          <a:ln w="9525">
+            <a:solidFill>
+              <a:srgbClr val="1FA2A6">
+                <a:alpha val="55000"/>
+              </a:srgbClr>
+            </a:solidFill>
+          </a:ln>
+        </p:spPr>
+      </p:cxnSp>
+      <p:cxnSp>
+        <p:nvCxnSpPr>
+          <p:cNvPr id="125" name="Motif 125"/>
+          <p:cNvCxnSpPr/>
+          <p:nvPr/>
+        </p:nvCxnSpPr>
+        <p:spPr>
+          <a:xfrm>
+            <a:off x="8156448" y="553395"/>
+            <a:ext cx="490576" cy="147401"/>
+          </a:xfrm>
+          <a:prstGeom prst="line">
+            <a:avLst/>
+          </a:prstGeom>
+          <a:ln w="9525">
+            <a:solidFill>
+              <a:srgbClr val="1FA2A6">
+                <a:alpha val="55000"/>
+              </a:srgbClr>
+            </a:solidFill>
+          </a:ln>
+        </p:spPr>
+      </p:cxnSp>
+      <p:cxnSp>
+        <p:nvCxnSpPr>
+          <p:cNvPr id="126" name="Motif 126"/>
+          <p:cNvCxnSpPr/>
+          <p:nvPr/>
+        </p:nvCxnSpPr>
+        <p:spPr>
+          <a:xfrm>
+            <a:off x="8474659" y="337962"/>
+            <a:ext cx="172364" cy="362834"/>
+          </a:xfrm>
+          <a:prstGeom prst="line">
+            <a:avLst/>
+          </a:prstGeom>
+          <a:ln w="9525">
+            <a:solidFill>
+              <a:srgbClr val="1FA2A6">
+                <a:alpha val="55000"/>
+              </a:srgbClr>
+            </a:solidFill>
+          </a:ln>
+        </p:spPr>
+      </p:cxnSp>
+      <p:sp>
+        <p:nvSpPr>
+          <p:cNvPr id="127" name="Motif 127"/>
+          <p:cNvSpPr/>
+          <p:nvPr/>
+        </p:nvSpPr>
+        <p:spPr>
+          <a:xfrm>
+            <a:off x="7360463" y="579272"/>
+            <a:ext cx="106985" cy="106985"/>
+          </a:xfrm>
+          <a:prstGeom prst="ellipse">
+            <a:avLst/>
+          </a:prstGeom>
+          <a:solidFill>
+            <a:srgbClr val="1FA2A6">
+              <a:alpha val="90000"/>
+            </a:srgbClr>
+          </a:solidFill>
+          <a:ln>
+            <a:noFill/>
+          </a:ln>
+        </p:spPr>
+      </p:sp>
+      <p:sp>
+        <p:nvSpPr>
+          <p:cNvPr id="128" name="Motif 128"/>
+          <p:cNvSpPr/>
+          <p:nvPr/>
+        </p:nvSpPr>
+        <p:spPr>
+          <a:xfrm>
+            <a:off x="7717079" y="319034"/>
+            <a:ext cx="83210" cy="83210"/>
+          </a:xfrm>
+          <a:prstGeom prst="ellipse">
+            <a:avLst/>
+          </a:prstGeom>
+          <a:solidFill>
+            <a:srgbClr val="B8C7D6">
+              <a:alpha val="90000"/>
+            </a:srgbClr>
+          </a:solidFill>
+          <a:ln>
+            <a:noFill/>
+          </a:ln>
+        </p:spPr>
+      </p:sp>
+      <p:sp>
+        <p:nvSpPr>
+          <p:cNvPr id="129" name="Motif 129"/>
+          <p:cNvSpPr/>
+          <p:nvPr/>
+        </p:nvSpPr>
+        <p:spPr>
+          <a:xfrm>
+            <a:off x="7802575" y="744504"/>
+            <a:ext cx="71323" cy="71323"/>
+          </a:xfrm>
+          <a:prstGeom prst="ellipse">
+            <a:avLst/>
+          </a:prstGeom>
+          <a:solidFill>
+            <a:srgbClr val="B8C7D6">
+              <a:alpha val="90000"/>
+            </a:srgbClr>
+          </a:solidFill>
+          <a:ln>
+            <a:noFill/>
+          </a:ln>
+        </p:spPr>
+      </p:sp>
+      <p:sp>
+        <p:nvSpPr>
+          <p:cNvPr id="130" name="Motif 130"/>
+          <p:cNvSpPr/>
+          <p:nvPr/>
+        </p:nvSpPr>
+        <p:spPr>
+          <a:xfrm>
+            <a:off x="8082153" y="479100"/>
+            <a:ext cx="148590" cy="148590"/>
+          </a:xfrm>
+          <a:prstGeom prst="ellipse">
+            <a:avLst/>
+          </a:prstGeom>
+          <a:solidFill>
+            <a:srgbClr val="E63946">
+              <a:alpha val="90000"/>
+            </a:srgbClr>
+          </a:solidFill>
+          <a:ln>
+            <a:noFill/>
+          </a:ln>
+        </p:spPr>
+      </p:sp>
+      <p:sp>
+        <p:nvSpPr>
+          <p:cNvPr id="131" name="Motif 131"/>
+          <p:cNvSpPr/>
+          <p:nvPr/>
+        </p:nvSpPr>
+        <p:spPr>
+          <a:xfrm>
+            <a:off x="8430082" y="293385"/>
+            <a:ext cx="89154" cy="89154"/>
+          </a:xfrm>
+          <a:prstGeom prst="ellipse">
+            <a:avLst/>
+          </a:prstGeom>
+          <a:solidFill>
+            <a:srgbClr val="1FA2A6">
+              <a:alpha val="90000"/>
+            </a:srgbClr>
+          </a:solidFill>
+          <a:ln>
+            <a:noFill/>
+          </a:ln>
+        </p:spPr>
+      </p:sp>
+      <p:sp>
+        <p:nvSpPr>
+          <p:cNvPr id="132" name="Motif 132"/>
+          <p:cNvSpPr/>
+          <p:nvPr/>
+        </p:nvSpPr>
+        <p:spPr>
+          <a:xfrm>
+            <a:off x="8596503" y="650276"/>
+            <a:ext cx="101041" cy="101041"/>
+          </a:xfrm>
+          <a:prstGeom prst="ellipse">
+            <a:avLst/>
+          </a:prstGeom>
+          <a:solidFill>
+            <a:srgbClr val="1FA2A6">
+              <a:alpha val="90000"/>
+            </a:srgbClr>
+          </a:solidFill>
+          <a:ln>
+            <a:noFill/>
+          </a:ln>
+        </p:spPr>
+      </p:sp>
+      <p:sp>
+        <p:nvSpPr>
           <p:cNvPr id="2" name="Text 0"/>
           <p:cNvSpPr txBox="1"/>
           <p:nvPr/>
@@ -11238,6 +14326,311 @@
           <a:chExt cx="0" cy="0"/>
         </a:xfrm>
       </p:grpSpPr>
+      <p:cxnSp>
+        <p:nvCxnSpPr>
+          <p:cNvPr id="151" name="Motif 151"/>
+          <p:cNvCxnSpPr/>
+          <p:nvPr/>
+        </p:nvCxnSpPr>
+        <p:spPr>
+          <a:xfrm flipV="1">
+            <a:off x="7501738" y="340157"/>
+            <a:ext cx="320954" cy="263347"/>
+          </a:xfrm>
+          <a:prstGeom prst="line">
+            <a:avLst/>
+          </a:prstGeom>
+          <a:ln w="9525">
+            <a:solidFill>
+              <a:srgbClr val="0B1F33">
+                <a:alpha val="40000"/>
+              </a:srgbClr>
+            </a:solidFill>
+          </a:ln>
+        </p:spPr>
+      </p:cxnSp>
+      <p:cxnSp>
+        <p:nvCxnSpPr>
+          <p:cNvPr id="152" name="Motif 152"/>
+          <p:cNvCxnSpPr/>
+          <p:nvPr/>
+        </p:nvCxnSpPr>
+        <p:spPr>
+          <a:xfrm>
+            <a:off x="7501738" y="603504"/>
+            <a:ext cx="395021" cy="142646"/>
+          </a:xfrm>
+          <a:prstGeom prst="line">
+            <a:avLst/>
+          </a:prstGeom>
+          <a:ln w="9525">
+            <a:solidFill>
+              <a:srgbClr val="0B1F33">
+                <a:alpha val="40000"/>
+              </a:srgbClr>
+            </a:solidFill>
+          </a:ln>
+        </p:spPr>
+      </p:cxnSp>
+      <p:cxnSp>
+        <p:nvCxnSpPr>
+          <p:cNvPr id="153" name="Motif 153"/>
+          <p:cNvCxnSpPr/>
+          <p:nvPr/>
+        </p:nvCxnSpPr>
+        <p:spPr>
+          <a:xfrm>
+            <a:off x="7822692" y="340157"/>
+            <a:ext cx="370332" cy="186538"/>
+          </a:xfrm>
+          <a:prstGeom prst="line">
+            <a:avLst/>
+          </a:prstGeom>
+          <a:ln w="9525">
+            <a:solidFill>
+              <a:srgbClr val="0B1F33">
+                <a:alpha val="40000"/>
+              </a:srgbClr>
+            </a:solidFill>
+          </a:ln>
+        </p:spPr>
+      </p:cxnSp>
+      <p:cxnSp>
+        <p:nvCxnSpPr>
+          <p:cNvPr id="154" name="Motif 154"/>
+          <p:cNvCxnSpPr/>
+          <p:nvPr/>
+        </p:nvCxnSpPr>
+        <p:spPr>
+          <a:xfrm flipV="1">
+            <a:off x="7896758" y="526694"/>
+            <a:ext cx="296266" cy="219456"/>
+          </a:xfrm>
+          <a:prstGeom prst="line">
+            <a:avLst/>
+          </a:prstGeom>
+          <a:ln w="9525">
+            <a:solidFill>
+              <a:srgbClr val="0B1F33">
+                <a:alpha val="40000"/>
+              </a:srgbClr>
+            </a:solidFill>
+          </a:ln>
+        </p:spPr>
+      </p:cxnSp>
+      <p:cxnSp>
+        <p:nvCxnSpPr>
+          <p:cNvPr id="155" name="Motif 155"/>
+          <p:cNvCxnSpPr/>
+          <p:nvPr/>
+        </p:nvCxnSpPr>
+        <p:spPr>
+          <a:xfrm flipV="1">
+            <a:off x="8193024" y="318211"/>
+            <a:ext cx="296266" cy="208483"/>
+          </a:xfrm>
+          <a:prstGeom prst="line">
+            <a:avLst/>
+          </a:prstGeom>
+          <a:ln w="9525">
+            <a:solidFill>
+              <a:srgbClr val="0B1F33">
+                <a:alpha val="40000"/>
+              </a:srgbClr>
+            </a:solidFill>
+          </a:ln>
+        </p:spPr>
+      </p:cxnSp>
+      <p:cxnSp>
+        <p:nvCxnSpPr>
+          <p:cNvPr id="156" name="Motif 156"/>
+          <p:cNvCxnSpPr/>
+          <p:nvPr/>
+        </p:nvCxnSpPr>
+        <p:spPr>
+          <a:xfrm>
+            <a:off x="8193024" y="526694"/>
+            <a:ext cx="456743" cy="142646"/>
+          </a:xfrm>
+          <a:prstGeom prst="line">
+            <a:avLst/>
+          </a:prstGeom>
+          <a:ln w="9525">
+            <a:solidFill>
+              <a:srgbClr val="0B1F33">
+                <a:alpha val="40000"/>
+              </a:srgbClr>
+            </a:solidFill>
+          </a:ln>
+        </p:spPr>
+      </p:cxnSp>
+      <p:cxnSp>
+        <p:nvCxnSpPr>
+          <p:cNvPr id="157" name="Motif 157"/>
+          <p:cNvCxnSpPr/>
+          <p:nvPr/>
+        </p:nvCxnSpPr>
+        <p:spPr>
+          <a:xfrm>
+            <a:off x="8489290" y="318211"/>
+            <a:ext cx="160477" cy="351130"/>
+          </a:xfrm>
+          <a:prstGeom prst="line">
+            <a:avLst/>
+          </a:prstGeom>
+          <a:ln w="9525">
+            <a:solidFill>
+              <a:srgbClr val="0B1F33">
+                <a:alpha val="40000"/>
+              </a:srgbClr>
+            </a:solidFill>
+          </a:ln>
+        </p:spPr>
+      </p:cxnSp>
+      <p:sp>
+        <p:nvSpPr>
+          <p:cNvPr id="158" name="Motif 158"/>
+          <p:cNvSpPr/>
+          <p:nvPr/>
+        </p:nvSpPr>
+        <p:spPr>
+          <a:xfrm>
+            <a:off x="7452360" y="554126"/>
+            <a:ext cx="98755" cy="98755"/>
+          </a:xfrm>
+          <a:prstGeom prst="ellipse">
+            <a:avLst/>
+          </a:prstGeom>
+          <a:solidFill>
+            <a:srgbClr val="1FA2A6">
+              <a:alpha val="85000"/>
+            </a:srgbClr>
+          </a:solidFill>
+          <a:ln>
+            <a:noFill/>
+          </a:ln>
+        </p:spPr>
+      </p:sp>
+      <p:sp>
+        <p:nvSpPr>
+          <p:cNvPr id="159" name="Motif 159"/>
+          <p:cNvSpPr/>
+          <p:nvPr/>
+        </p:nvSpPr>
+        <p:spPr>
+          <a:xfrm>
+            <a:off x="7784287" y="301752"/>
+            <a:ext cx="76810" cy="76810"/>
+          </a:xfrm>
+          <a:prstGeom prst="ellipse">
+            <a:avLst/>
+          </a:prstGeom>
+          <a:solidFill>
+            <a:srgbClr val="0B1F33">
+              <a:alpha val="85000"/>
+            </a:srgbClr>
+          </a:solidFill>
+          <a:ln>
+            <a:noFill/>
+          </a:ln>
+        </p:spPr>
+      </p:sp>
+      <p:sp>
+        <p:nvSpPr>
+          <p:cNvPr id="160" name="Motif 160"/>
+          <p:cNvSpPr/>
+          <p:nvPr/>
+        </p:nvSpPr>
+        <p:spPr>
+          <a:xfrm>
+            <a:off x="7863840" y="713232"/>
+            <a:ext cx="65837" cy="65837"/>
+          </a:xfrm>
+          <a:prstGeom prst="ellipse">
+            <a:avLst/>
+          </a:prstGeom>
+          <a:solidFill>
+            <a:srgbClr val="0B1F33">
+              <a:alpha val="85000"/>
+            </a:srgbClr>
+          </a:solidFill>
+          <a:ln>
+            <a:noFill/>
+          </a:ln>
+        </p:spPr>
+      </p:sp>
+      <p:sp>
+        <p:nvSpPr>
+          <p:cNvPr id="161" name="Motif 161"/>
+          <p:cNvSpPr/>
+          <p:nvPr/>
+        </p:nvSpPr>
+        <p:spPr>
+          <a:xfrm>
+            <a:off x="8124444" y="458114"/>
+            <a:ext cx="137160" cy="137160"/>
+          </a:xfrm>
+          <a:prstGeom prst="ellipse">
+            <a:avLst/>
+          </a:prstGeom>
+          <a:solidFill>
+            <a:srgbClr val="E63946">
+              <a:alpha val="85000"/>
+            </a:srgbClr>
+          </a:solidFill>
+          <a:ln>
+            <a:noFill/>
+          </a:ln>
+        </p:spPr>
+      </p:sp>
+      <p:sp>
+        <p:nvSpPr>
+          <p:cNvPr id="162" name="Motif 162"/>
+          <p:cNvSpPr/>
+          <p:nvPr/>
+        </p:nvSpPr>
+        <p:spPr>
+          <a:xfrm>
+            <a:off x="8448142" y="277063"/>
+            <a:ext cx="82296" cy="82296"/>
+          </a:xfrm>
+          <a:prstGeom prst="ellipse">
+            <a:avLst/>
+          </a:prstGeom>
+          <a:solidFill>
+            <a:srgbClr val="1FA2A6">
+              <a:alpha val="85000"/>
+            </a:srgbClr>
+          </a:solidFill>
+          <a:ln>
+            <a:noFill/>
+          </a:ln>
+        </p:spPr>
+      </p:sp>
+      <p:sp>
+        <p:nvSpPr>
+          <p:cNvPr id="163" name="Motif 163"/>
+          <p:cNvSpPr/>
+          <p:nvPr/>
+        </p:nvSpPr>
+        <p:spPr>
+          <a:xfrm>
+            <a:off x="8603132" y="622706"/>
+            <a:ext cx="93269" cy="93269"/>
+          </a:xfrm>
+          <a:prstGeom prst="ellipse">
+            <a:avLst/>
+          </a:prstGeom>
+          <a:solidFill>
+            <a:srgbClr val="1FA2A6">
+              <a:alpha val="85000"/>
+            </a:srgbClr>
+          </a:solidFill>
+          <a:ln>
+            <a:noFill/>
+          </a:ln>
+        </p:spPr>
+      </p:sp>
       <p:sp>
         <p:nvSpPr>
           <p:cNvPr id="2" name="Text 0"/>
@@ -12934,6 +16327,503 @@
       </p:grpSpPr>
       <p:sp>
         <p:nvSpPr>
+          <p:cNvPr id="106" name="Motif 106"/>
+          <p:cNvSpPr/>
+          <p:nvPr/>
+        </p:nvSpPr>
+        <p:spPr>
+          <a:xfrm>
+            <a:off x="8549640" y="4526280"/>
+            <a:ext cx="1645920" cy="1645920"/>
+          </a:xfrm>
+          <a:prstGeom prst="ellipse">
+            <a:avLst/>
+          </a:prstGeom>
+          <a:noFill/>
+          <a:ln w="12700">
+            <a:solidFill>
+              <a:srgbClr val="1FA2A6">
+                <a:alpha val="35000"/>
+              </a:srgbClr>
+            </a:solidFill>
+          </a:ln>
+        </p:spPr>
+      </p:sp>
+      <p:sp>
+        <p:nvSpPr>
+          <p:cNvPr id="107" name="Motif 107"/>
+          <p:cNvSpPr/>
+          <p:nvPr/>
+        </p:nvSpPr>
+        <p:spPr>
+          <a:xfrm>
+            <a:off x="8001000" y="3977640"/>
+            <a:ext cx="2743200" cy="2743200"/>
+          </a:xfrm>
+          <a:prstGeom prst="ellipse">
+            <a:avLst/>
+          </a:prstGeom>
+          <a:noFill/>
+          <a:ln w="12700">
+            <a:solidFill>
+              <a:srgbClr val="1FA2A6">
+                <a:alpha val="25000"/>
+              </a:srgbClr>
+            </a:solidFill>
+          </a:ln>
+        </p:spPr>
+      </p:sp>
+      <p:sp>
+        <p:nvSpPr>
+          <p:cNvPr id="108" name="Motif 108"/>
+          <p:cNvSpPr/>
+          <p:nvPr/>
+        </p:nvSpPr>
+        <p:spPr>
+          <a:xfrm>
+            <a:off x="7452360" y="3429000"/>
+            <a:ext cx="3840480" cy="3840480"/>
+          </a:xfrm>
+          <a:prstGeom prst="ellipse">
+            <a:avLst/>
+          </a:prstGeom>
+          <a:noFill/>
+          <a:ln w="12700">
+            <a:solidFill>
+              <a:srgbClr val="1FA2A6">
+                <a:alpha val="16000"/>
+              </a:srgbClr>
+            </a:solidFill>
+          </a:ln>
+        </p:spPr>
+      </p:sp>
+      <p:sp>
+        <p:nvSpPr>
+          <p:cNvPr id="109" name="Motif 109"/>
+          <p:cNvSpPr/>
+          <p:nvPr/>
+        </p:nvSpPr>
+        <p:spPr>
+          <a:xfrm>
+            <a:off x="6903720" y="2880360"/>
+            <a:ext cx="4937760" cy="4937760"/>
+          </a:xfrm>
+          <a:prstGeom prst="ellipse">
+            <a:avLst/>
+          </a:prstGeom>
+          <a:noFill/>
+          <a:ln w="12700">
+            <a:solidFill>
+              <a:srgbClr val="1FA2A6">
+                <a:alpha val="10000"/>
+              </a:srgbClr>
+            </a:solidFill>
+          </a:ln>
+        </p:spPr>
+      </p:sp>
+      <p:sp>
+        <p:nvSpPr>
+          <p:cNvPr id="110" name="Motif 110"/>
+          <p:cNvSpPr/>
+          <p:nvPr/>
+        </p:nvSpPr>
+        <p:spPr>
+          <a:xfrm>
+            <a:off x="-1051560" y="-1005840"/>
+            <a:ext cx="1645920" cy="1645920"/>
+          </a:xfrm>
+          <a:prstGeom prst="ellipse">
+            <a:avLst/>
+          </a:prstGeom>
+          <a:noFill/>
+          <a:ln w="12700">
+            <a:solidFill>
+              <a:srgbClr val="1FA2A6">
+                <a:alpha val="35000"/>
+              </a:srgbClr>
+            </a:solidFill>
+          </a:ln>
+        </p:spPr>
+      </p:sp>
+      <p:sp>
+        <p:nvSpPr>
+          <p:cNvPr id="111" name="Motif 111"/>
+          <p:cNvSpPr/>
+          <p:nvPr/>
+        </p:nvSpPr>
+        <p:spPr>
+          <a:xfrm>
+            <a:off x="-1600200" y="-1554480"/>
+            <a:ext cx="2743200" cy="2743200"/>
+          </a:xfrm>
+          <a:prstGeom prst="ellipse">
+            <a:avLst/>
+          </a:prstGeom>
+          <a:noFill/>
+          <a:ln w="12700">
+            <a:solidFill>
+              <a:srgbClr val="1FA2A6">
+                <a:alpha val="25000"/>
+              </a:srgbClr>
+            </a:solidFill>
+          </a:ln>
+        </p:spPr>
+      </p:sp>
+      <p:sp>
+        <p:nvSpPr>
+          <p:cNvPr id="112" name="Motif 112"/>
+          <p:cNvSpPr/>
+          <p:nvPr/>
+        </p:nvSpPr>
+        <p:spPr>
+          <a:xfrm>
+            <a:off x="-2148840" y="-2103120"/>
+            <a:ext cx="3840480" cy="3840480"/>
+          </a:xfrm>
+          <a:prstGeom prst="ellipse">
+            <a:avLst/>
+          </a:prstGeom>
+          <a:noFill/>
+          <a:ln w="12700">
+            <a:solidFill>
+              <a:srgbClr val="1FA2A6">
+                <a:alpha val="16000"/>
+              </a:srgbClr>
+            </a:solidFill>
+          </a:ln>
+        </p:spPr>
+      </p:sp>
+      <p:sp>
+        <p:nvSpPr>
+          <p:cNvPr id="113" name="Motif 113"/>
+          <p:cNvSpPr/>
+          <p:nvPr/>
+        </p:nvSpPr>
+        <p:spPr>
+          <a:xfrm>
+            <a:off x="-2697480" y="-2651760"/>
+            <a:ext cx="4937760" cy="4937760"/>
+          </a:xfrm>
+          <a:prstGeom prst="ellipse">
+            <a:avLst/>
+          </a:prstGeom>
+          <a:noFill/>
+          <a:ln w="12700">
+            <a:solidFill>
+              <a:srgbClr val="1FA2A6">
+                <a:alpha val="10000"/>
+              </a:srgbClr>
+            </a:solidFill>
+          </a:ln>
+        </p:spPr>
+      </p:sp>
+      <p:cxnSp>
+        <p:nvCxnSpPr>
+          <p:cNvPr id="114" name="Motif 114"/>
+          <p:cNvCxnSpPr/>
+          <p:nvPr/>
+        </p:nvCxnSpPr>
+        <p:spPr>
+          <a:xfrm flipV="1">
+            <a:off x="557784" y="4411431"/>
+            <a:ext cx="356616" cy="272125"/>
+          </a:xfrm>
+          <a:prstGeom prst="line">
+            <a:avLst/>
+          </a:prstGeom>
+          <a:ln w="9525">
+            <a:solidFill>
+              <a:srgbClr val="1FA2A6">
+                <a:alpha val="45000"/>
+              </a:srgbClr>
+            </a:solidFill>
+          </a:ln>
+        </p:spPr>
+      </p:cxnSp>
+      <p:cxnSp>
+        <p:nvCxnSpPr>
+          <p:cNvPr id="115" name="Motif 115"/>
+          <p:cNvCxnSpPr/>
+          <p:nvPr/>
+        </p:nvCxnSpPr>
+        <p:spPr>
+          <a:xfrm>
+            <a:off x="557784" y="4683557"/>
+            <a:ext cx="438912" cy="147401"/>
+          </a:xfrm>
+          <a:prstGeom prst="line">
+            <a:avLst/>
+          </a:prstGeom>
+          <a:ln w="9525">
+            <a:solidFill>
+              <a:srgbClr val="1FA2A6">
+                <a:alpha val="45000"/>
+              </a:srgbClr>
+            </a:solidFill>
+          </a:ln>
+        </p:spPr>
+      </p:cxnSp>
+      <p:cxnSp>
+        <p:nvCxnSpPr>
+          <p:cNvPr id="116" name="Motif 116"/>
+          <p:cNvCxnSpPr/>
+          <p:nvPr/>
+        </p:nvCxnSpPr>
+        <p:spPr>
+          <a:xfrm>
+            <a:off x="914400" y="4411431"/>
+            <a:ext cx="411480" cy="192756"/>
+          </a:xfrm>
+          <a:prstGeom prst="line">
+            <a:avLst/>
+          </a:prstGeom>
+          <a:ln w="9525">
+            <a:solidFill>
+              <a:srgbClr val="1FA2A6">
+                <a:alpha val="45000"/>
+              </a:srgbClr>
+            </a:solidFill>
+          </a:ln>
+        </p:spPr>
+      </p:cxnSp>
+      <p:cxnSp>
+        <p:nvCxnSpPr>
+          <p:cNvPr id="117" name="Motif 117"/>
+          <p:cNvCxnSpPr/>
+          <p:nvPr/>
+        </p:nvCxnSpPr>
+        <p:spPr>
+          <a:xfrm flipV="1">
+            <a:off x="996696" y="4604187"/>
+            <a:ext cx="329184" cy="226771"/>
+          </a:xfrm>
+          <a:prstGeom prst="line">
+            <a:avLst/>
+          </a:prstGeom>
+          <a:ln w="9525">
+            <a:solidFill>
+              <a:srgbClr val="1FA2A6">
+                <a:alpha val="45000"/>
+              </a:srgbClr>
+            </a:solidFill>
+          </a:ln>
+        </p:spPr>
+      </p:cxnSp>
+      <p:cxnSp>
+        <p:nvCxnSpPr>
+          <p:cNvPr id="118" name="Motif 118"/>
+          <p:cNvCxnSpPr/>
+          <p:nvPr/>
+        </p:nvCxnSpPr>
+        <p:spPr>
+          <a:xfrm flipV="1">
+            <a:off x="1325880" y="4388754"/>
+            <a:ext cx="329184" cy="215433"/>
+          </a:xfrm>
+          <a:prstGeom prst="line">
+            <a:avLst/>
+          </a:prstGeom>
+          <a:ln w="9525">
+            <a:solidFill>
+              <a:srgbClr val="1FA2A6">
+                <a:alpha val="45000"/>
+              </a:srgbClr>
+            </a:solidFill>
+          </a:ln>
+        </p:spPr>
+      </p:cxnSp>
+      <p:cxnSp>
+        <p:nvCxnSpPr>
+          <p:cNvPr id="119" name="Motif 119"/>
+          <p:cNvCxnSpPr/>
+          <p:nvPr/>
+        </p:nvCxnSpPr>
+        <p:spPr>
+          <a:xfrm>
+            <a:off x="1325880" y="4604187"/>
+            <a:ext cx="507492" cy="147401"/>
+          </a:xfrm>
+          <a:prstGeom prst="line">
+            <a:avLst/>
+          </a:prstGeom>
+          <a:ln w="9525">
+            <a:solidFill>
+              <a:srgbClr val="1FA2A6">
+                <a:alpha val="45000"/>
+              </a:srgbClr>
+            </a:solidFill>
+          </a:ln>
+        </p:spPr>
+      </p:cxnSp>
+      <p:cxnSp>
+        <p:nvCxnSpPr>
+          <p:cNvPr id="120" name="Motif 120"/>
+          <p:cNvCxnSpPr/>
+          <p:nvPr/>
+        </p:nvCxnSpPr>
+        <p:spPr>
+          <a:xfrm>
+            <a:off x="1655064" y="4388754"/>
+            <a:ext cx="178308" cy="362834"/>
+          </a:xfrm>
+          <a:prstGeom prst="line">
+            <a:avLst/>
+          </a:prstGeom>
+          <a:ln w="9525">
+            <a:solidFill>
+              <a:srgbClr val="1FA2A6">
+                <a:alpha val="45000"/>
+              </a:srgbClr>
+            </a:solidFill>
+          </a:ln>
+        </p:spPr>
+      </p:cxnSp>
+      <p:sp>
+        <p:nvSpPr>
+          <p:cNvPr id="121" name="Motif 121"/>
+          <p:cNvSpPr/>
+          <p:nvPr/>
+        </p:nvSpPr>
+        <p:spPr>
+          <a:xfrm>
+            <a:off x="508406" y="4634179"/>
+            <a:ext cx="98755" cy="98755"/>
+          </a:xfrm>
+          <a:prstGeom prst="ellipse">
+            <a:avLst/>
+          </a:prstGeom>
+          <a:solidFill>
+            <a:srgbClr val="1FA2A6">
+              <a:alpha val="80000"/>
+            </a:srgbClr>
+          </a:solidFill>
+          <a:ln>
+            <a:noFill/>
+          </a:ln>
+        </p:spPr>
+      </p:sp>
+      <p:sp>
+        <p:nvSpPr>
+          <p:cNvPr id="122" name="Motif 122"/>
+          <p:cNvSpPr/>
+          <p:nvPr/>
+        </p:nvSpPr>
+        <p:spPr>
+          <a:xfrm>
+            <a:off x="875995" y="4373027"/>
+            <a:ext cx="76810" cy="76810"/>
+          </a:xfrm>
+          <a:prstGeom prst="ellipse">
+            <a:avLst/>
+          </a:prstGeom>
+          <a:solidFill>
+            <a:srgbClr val="B8C7D6">
+              <a:alpha val="80000"/>
+            </a:srgbClr>
+          </a:solidFill>
+          <a:ln>
+            <a:noFill/>
+          </a:ln>
+        </p:spPr>
+      </p:sp>
+      <p:sp>
+        <p:nvSpPr>
+          <p:cNvPr id="123" name="Motif 123"/>
+          <p:cNvSpPr/>
+          <p:nvPr/>
+        </p:nvSpPr>
+        <p:spPr>
+          <a:xfrm>
+            <a:off x="963778" y="4798040"/>
+            <a:ext cx="65837" cy="65837"/>
+          </a:xfrm>
+          <a:prstGeom prst="ellipse">
+            <a:avLst/>
+          </a:prstGeom>
+          <a:solidFill>
+            <a:srgbClr val="B8C7D6">
+              <a:alpha val="80000"/>
+            </a:srgbClr>
+          </a:solidFill>
+          <a:ln>
+            <a:noFill/>
+          </a:ln>
+        </p:spPr>
+      </p:sp>
+      <p:sp>
+        <p:nvSpPr>
+          <p:cNvPr id="124" name="Motif 124"/>
+          <p:cNvSpPr/>
+          <p:nvPr/>
+        </p:nvSpPr>
+        <p:spPr>
+          <a:xfrm>
+            <a:off x="1257300" y="4535607"/>
+            <a:ext cx="137160" cy="137160"/>
+          </a:xfrm>
+          <a:prstGeom prst="ellipse">
+            <a:avLst/>
+          </a:prstGeom>
+          <a:solidFill>
+            <a:srgbClr val="E63946">
+              <a:alpha val="80000"/>
+            </a:srgbClr>
+          </a:solidFill>
+          <a:ln>
+            <a:noFill/>
+          </a:ln>
+        </p:spPr>
+      </p:sp>
+      <p:sp>
+        <p:nvSpPr>
+          <p:cNvPr id="125" name="Motif 125"/>
+          <p:cNvSpPr/>
+          <p:nvPr/>
+        </p:nvSpPr>
+        <p:spPr>
+          <a:xfrm>
+            <a:off x="1613916" y="4347606"/>
+            <a:ext cx="82296" cy="82296"/>
+          </a:xfrm>
+          <a:prstGeom prst="ellipse">
+            <a:avLst/>
+          </a:prstGeom>
+          <a:solidFill>
+            <a:srgbClr val="1FA2A6">
+              <a:alpha val="80000"/>
+            </a:srgbClr>
+          </a:solidFill>
+          <a:ln>
+            <a:noFill/>
+          </a:ln>
+        </p:spPr>
+      </p:sp>
+      <p:sp>
+        <p:nvSpPr>
+          <p:cNvPr id="126" name="Motif 126"/>
+          <p:cNvSpPr/>
+          <p:nvPr/>
+        </p:nvSpPr>
+        <p:spPr>
+          <a:xfrm>
+            <a:off x="1786738" y="4704954"/>
+            <a:ext cx="93269" cy="93269"/>
+          </a:xfrm>
+          <a:prstGeom prst="ellipse">
+            <a:avLst/>
+          </a:prstGeom>
+          <a:solidFill>
+            <a:srgbClr val="1FA2A6">
+              <a:alpha val="80000"/>
+            </a:srgbClr>
+          </a:solidFill>
+          <a:ln>
+            <a:noFill/>
+          </a:ln>
+        </p:spPr>
+      </p:sp>
+      <p:sp>
+        <p:nvSpPr>
           <p:cNvPr id="2" name="Text 0"/>
           <p:cNvSpPr txBox="1"/>
           <p:nvPr/>
@@ -13120,6 +17010,311 @@
           <a:chExt cx="0" cy="0"/>
         </a:xfrm>
       </p:grpSpPr>
+      <p:cxnSp>
+        <p:nvCxnSpPr>
+          <p:cNvPr id="117" name="Motif 117"/>
+          <p:cNvCxnSpPr/>
+          <p:nvPr/>
+        </p:nvCxnSpPr>
+        <p:spPr>
+          <a:xfrm flipV="1">
+            <a:off x="7501738" y="340157"/>
+            <a:ext cx="320954" cy="263347"/>
+          </a:xfrm>
+          <a:prstGeom prst="line">
+            <a:avLst/>
+          </a:prstGeom>
+          <a:ln w="9525">
+            <a:solidFill>
+              <a:srgbClr val="0B1F33">
+                <a:alpha val="40000"/>
+              </a:srgbClr>
+            </a:solidFill>
+          </a:ln>
+        </p:spPr>
+      </p:cxnSp>
+      <p:cxnSp>
+        <p:nvCxnSpPr>
+          <p:cNvPr id="118" name="Motif 118"/>
+          <p:cNvCxnSpPr/>
+          <p:nvPr/>
+        </p:nvCxnSpPr>
+        <p:spPr>
+          <a:xfrm>
+            <a:off x="7501738" y="603504"/>
+            <a:ext cx="395021" cy="142646"/>
+          </a:xfrm>
+          <a:prstGeom prst="line">
+            <a:avLst/>
+          </a:prstGeom>
+          <a:ln w="9525">
+            <a:solidFill>
+              <a:srgbClr val="0B1F33">
+                <a:alpha val="40000"/>
+              </a:srgbClr>
+            </a:solidFill>
+          </a:ln>
+        </p:spPr>
+      </p:cxnSp>
+      <p:cxnSp>
+        <p:nvCxnSpPr>
+          <p:cNvPr id="119" name="Motif 119"/>
+          <p:cNvCxnSpPr/>
+          <p:nvPr/>
+        </p:nvCxnSpPr>
+        <p:spPr>
+          <a:xfrm>
+            <a:off x="7822692" y="340157"/>
+            <a:ext cx="370332" cy="186538"/>
+          </a:xfrm>
+          <a:prstGeom prst="line">
+            <a:avLst/>
+          </a:prstGeom>
+          <a:ln w="9525">
+            <a:solidFill>
+              <a:srgbClr val="0B1F33">
+                <a:alpha val="40000"/>
+              </a:srgbClr>
+            </a:solidFill>
+          </a:ln>
+        </p:spPr>
+      </p:cxnSp>
+      <p:cxnSp>
+        <p:nvCxnSpPr>
+          <p:cNvPr id="120" name="Motif 120"/>
+          <p:cNvCxnSpPr/>
+          <p:nvPr/>
+        </p:nvCxnSpPr>
+        <p:spPr>
+          <a:xfrm flipV="1">
+            <a:off x="7896758" y="526694"/>
+            <a:ext cx="296266" cy="219456"/>
+          </a:xfrm>
+          <a:prstGeom prst="line">
+            <a:avLst/>
+          </a:prstGeom>
+          <a:ln w="9525">
+            <a:solidFill>
+              <a:srgbClr val="0B1F33">
+                <a:alpha val="40000"/>
+              </a:srgbClr>
+            </a:solidFill>
+          </a:ln>
+        </p:spPr>
+      </p:cxnSp>
+      <p:cxnSp>
+        <p:nvCxnSpPr>
+          <p:cNvPr id="121" name="Motif 121"/>
+          <p:cNvCxnSpPr/>
+          <p:nvPr/>
+        </p:nvCxnSpPr>
+        <p:spPr>
+          <a:xfrm flipV="1">
+            <a:off x="8193024" y="318211"/>
+            <a:ext cx="296266" cy="208483"/>
+          </a:xfrm>
+          <a:prstGeom prst="line">
+            <a:avLst/>
+          </a:prstGeom>
+          <a:ln w="9525">
+            <a:solidFill>
+              <a:srgbClr val="0B1F33">
+                <a:alpha val="40000"/>
+              </a:srgbClr>
+            </a:solidFill>
+          </a:ln>
+        </p:spPr>
+      </p:cxnSp>
+      <p:cxnSp>
+        <p:nvCxnSpPr>
+          <p:cNvPr id="122" name="Motif 122"/>
+          <p:cNvCxnSpPr/>
+          <p:nvPr/>
+        </p:nvCxnSpPr>
+        <p:spPr>
+          <a:xfrm>
+            <a:off x="8193024" y="526694"/>
+            <a:ext cx="456743" cy="142646"/>
+          </a:xfrm>
+          <a:prstGeom prst="line">
+            <a:avLst/>
+          </a:prstGeom>
+          <a:ln w="9525">
+            <a:solidFill>
+              <a:srgbClr val="0B1F33">
+                <a:alpha val="40000"/>
+              </a:srgbClr>
+            </a:solidFill>
+          </a:ln>
+        </p:spPr>
+      </p:cxnSp>
+      <p:cxnSp>
+        <p:nvCxnSpPr>
+          <p:cNvPr id="123" name="Motif 123"/>
+          <p:cNvCxnSpPr/>
+          <p:nvPr/>
+        </p:nvCxnSpPr>
+        <p:spPr>
+          <a:xfrm>
+            <a:off x="8489290" y="318211"/>
+            <a:ext cx="160477" cy="351130"/>
+          </a:xfrm>
+          <a:prstGeom prst="line">
+            <a:avLst/>
+          </a:prstGeom>
+          <a:ln w="9525">
+            <a:solidFill>
+              <a:srgbClr val="0B1F33">
+                <a:alpha val="40000"/>
+              </a:srgbClr>
+            </a:solidFill>
+          </a:ln>
+        </p:spPr>
+      </p:cxnSp>
+      <p:sp>
+        <p:nvSpPr>
+          <p:cNvPr id="124" name="Motif 124"/>
+          <p:cNvSpPr/>
+          <p:nvPr/>
+        </p:nvSpPr>
+        <p:spPr>
+          <a:xfrm>
+            <a:off x="7452360" y="554126"/>
+            <a:ext cx="98755" cy="98755"/>
+          </a:xfrm>
+          <a:prstGeom prst="ellipse">
+            <a:avLst/>
+          </a:prstGeom>
+          <a:solidFill>
+            <a:srgbClr val="1FA2A6">
+              <a:alpha val="85000"/>
+            </a:srgbClr>
+          </a:solidFill>
+          <a:ln>
+            <a:noFill/>
+          </a:ln>
+        </p:spPr>
+      </p:sp>
+      <p:sp>
+        <p:nvSpPr>
+          <p:cNvPr id="125" name="Motif 125"/>
+          <p:cNvSpPr/>
+          <p:nvPr/>
+        </p:nvSpPr>
+        <p:spPr>
+          <a:xfrm>
+            <a:off x="7784287" y="301752"/>
+            <a:ext cx="76810" cy="76810"/>
+          </a:xfrm>
+          <a:prstGeom prst="ellipse">
+            <a:avLst/>
+          </a:prstGeom>
+          <a:solidFill>
+            <a:srgbClr val="0B1F33">
+              <a:alpha val="85000"/>
+            </a:srgbClr>
+          </a:solidFill>
+          <a:ln>
+            <a:noFill/>
+          </a:ln>
+        </p:spPr>
+      </p:sp>
+      <p:sp>
+        <p:nvSpPr>
+          <p:cNvPr id="126" name="Motif 126"/>
+          <p:cNvSpPr/>
+          <p:nvPr/>
+        </p:nvSpPr>
+        <p:spPr>
+          <a:xfrm>
+            <a:off x="7863840" y="713232"/>
+            <a:ext cx="65837" cy="65837"/>
+          </a:xfrm>
+          <a:prstGeom prst="ellipse">
+            <a:avLst/>
+          </a:prstGeom>
+          <a:solidFill>
+            <a:srgbClr val="0B1F33">
+              <a:alpha val="85000"/>
+            </a:srgbClr>
+          </a:solidFill>
+          <a:ln>
+            <a:noFill/>
+          </a:ln>
+        </p:spPr>
+      </p:sp>
+      <p:sp>
+        <p:nvSpPr>
+          <p:cNvPr id="127" name="Motif 127"/>
+          <p:cNvSpPr/>
+          <p:nvPr/>
+        </p:nvSpPr>
+        <p:spPr>
+          <a:xfrm>
+            <a:off x="8124444" y="458114"/>
+            <a:ext cx="137160" cy="137160"/>
+          </a:xfrm>
+          <a:prstGeom prst="ellipse">
+            <a:avLst/>
+          </a:prstGeom>
+          <a:solidFill>
+            <a:srgbClr val="E63946">
+              <a:alpha val="85000"/>
+            </a:srgbClr>
+          </a:solidFill>
+          <a:ln>
+            <a:noFill/>
+          </a:ln>
+        </p:spPr>
+      </p:sp>
+      <p:sp>
+        <p:nvSpPr>
+          <p:cNvPr id="128" name="Motif 128"/>
+          <p:cNvSpPr/>
+          <p:nvPr/>
+        </p:nvSpPr>
+        <p:spPr>
+          <a:xfrm>
+            <a:off x="8448142" y="277063"/>
+            <a:ext cx="82296" cy="82296"/>
+          </a:xfrm>
+          <a:prstGeom prst="ellipse">
+            <a:avLst/>
+          </a:prstGeom>
+          <a:solidFill>
+            <a:srgbClr val="1FA2A6">
+              <a:alpha val="85000"/>
+            </a:srgbClr>
+          </a:solidFill>
+          <a:ln>
+            <a:noFill/>
+          </a:ln>
+        </p:spPr>
+      </p:sp>
+      <p:sp>
+        <p:nvSpPr>
+          <p:cNvPr id="129" name="Motif 129"/>
+          <p:cNvSpPr/>
+          <p:nvPr/>
+        </p:nvSpPr>
+        <p:spPr>
+          <a:xfrm>
+            <a:off x="8603132" y="622706"/>
+            <a:ext cx="93269" cy="93269"/>
+          </a:xfrm>
+          <a:prstGeom prst="ellipse">
+            <a:avLst/>
+          </a:prstGeom>
+          <a:solidFill>
+            <a:srgbClr val="1FA2A6">
+              <a:alpha val="85000"/>
+            </a:srgbClr>
+          </a:solidFill>
+          <a:ln>
+            <a:noFill/>
+          </a:ln>
+        </p:spPr>
+      </p:sp>
       <p:sp>
         <p:nvSpPr>
           <p:cNvPr id="2" name="Text 0"/>
@@ -13729,6 +17924,311 @@
           <a:chExt cx="0" cy="0"/>
         </a:xfrm>
       </p:grpSpPr>
+      <p:cxnSp>
+        <p:nvCxnSpPr>
+          <p:cNvPr id="116" name="Motif 116"/>
+          <p:cNvCxnSpPr/>
+          <p:nvPr/>
+        </p:nvCxnSpPr>
+        <p:spPr>
+          <a:xfrm flipV="1">
+            <a:off x="7501738" y="340157"/>
+            <a:ext cx="320954" cy="263347"/>
+          </a:xfrm>
+          <a:prstGeom prst="line">
+            <a:avLst/>
+          </a:prstGeom>
+          <a:ln w="9525">
+            <a:solidFill>
+              <a:srgbClr val="0B1F33">
+                <a:alpha val="40000"/>
+              </a:srgbClr>
+            </a:solidFill>
+          </a:ln>
+        </p:spPr>
+      </p:cxnSp>
+      <p:cxnSp>
+        <p:nvCxnSpPr>
+          <p:cNvPr id="117" name="Motif 117"/>
+          <p:cNvCxnSpPr/>
+          <p:nvPr/>
+        </p:nvCxnSpPr>
+        <p:spPr>
+          <a:xfrm>
+            <a:off x="7501738" y="603504"/>
+            <a:ext cx="395021" cy="142646"/>
+          </a:xfrm>
+          <a:prstGeom prst="line">
+            <a:avLst/>
+          </a:prstGeom>
+          <a:ln w="9525">
+            <a:solidFill>
+              <a:srgbClr val="0B1F33">
+                <a:alpha val="40000"/>
+              </a:srgbClr>
+            </a:solidFill>
+          </a:ln>
+        </p:spPr>
+      </p:cxnSp>
+      <p:cxnSp>
+        <p:nvCxnSpPr>
+          <p:cNvPr id="118" name="Motif 118"/>
+          <p:cNvCxnSpPr/>
+          <p:nvPr/>
+        </p:nvCxnSpPr>
+        <p:spPr>
+          <a:xfrm>
+            <a:off x="7822692" y="340157"/>
+            <a:ext cx="370332" cy="186538"/>
+          </a:xfrm>
+          <a:prstGeom prst="line">
+            <a:avLst/>
+          </a:prstGeom>
+          <a:ln w="9525">
+            <a:solidFill>
+              <a:srgbClr val="0B1F33">
+                <a:alpha val="40000"/>
+              </a:srgbClr>
+            </a:solidFill>
+          </a:ln>
+        </p:spPr>
+      </p:cxnSp>
+      <p:cxnSp>
+        <p:nvCxnSpPr>
+          <p:cNvPr id="119" name="Motif 119"/>
+          <p:cNvCxnSpPr/>
+          <p:nvPr/>
+        </p:nvCxnSpPr>
+        <p:spPr>
+          <a:xfrm flipV="1">
+            <a:off x="7896758" y="526694"/>
+            <a:ext cx="296266" cy="219456"/>
+          </a:xfrm>
+          <a:prstGeom prst="line">
+            <a:avLst/>
+          </a:prstGeom>
+          <a:ln w="9525">
+            <a:solidFill>
+              <a:srgbClr val="0B1F33">
+                <a:alpha val="40000"/>
+              </a:srgbClr>
+            </a:solidFill>
+          </a:ln>
+        </p:spPr>
+      </p:cxnSp>
+      <p:cxnSp>
+        <p:nvCxnSpPr>
+          <p:cNvPr id="120" name="Motif 120"/>
+          <p:cNvCxnSpPr/>
+          <p:nvPr/>
+        </p:nvCxnSpPr>
+        <p:spPr>
+          <a:xfrm flipV="1">
+            <a:off x="8193024" y="318211"/>
+            <a:ext cx="296266" cy="208483"/>
+          </a:xfrm>
+          <a:prstGeom prst="line">
+            <a:avLst/>
+          </a:prstGeom>
+          <a:ln w="9525">
+            <a:solidFill>
+              <a:srgbClr val="0B1F33">
+                <a:alpha val="40000"/>
+              </a:srgbClr>
+            </a:solidFill>
+          </a:ln>
+        </p:spPr>
+      </p:cxnSp>
+      <p:cxnSp>
+        <p:nvCxnSpPr>
+          <p:cNvPr id="121" name="Motif 121"/>
+          <p:cNvCxnSpPr/>
+          <p:nvPr/>
+        </p:nvCxnSpPr>
+        <p:spPr>
+          <a:xfrm>
+            <a:off x="8193024" y="526694"/>
+            <a:ext cx="456743" cy="142646"/>
+          </a:xfrm>
+          <a:prstGeom prst="line">
+            <a:avLst/>
+          </a:prstGeom>
+          <a:ln w="9525">
+            <a:solidFill>
+              <a:srgbClr val="0B1F33">
+                <a:alpha val="40000"/>
+              </a:srgbClr>
+            </a:solidFill>
+          </a:ln>
+        </p:spPr>
+      </p:cxnSp>
+      <p:cxnSp>
+        <p:nvCxnSpPr>
+          <p:cNvPr id="122" name="Motif 122"/>
+          <p:cNvCxnSpPr/>
+          <p:nvPr/>
+        </p:nvCxnSpPr>
+        <p:spPr>
+          <a:xfrm>
+            <a:off x="8489290" y="318211"/>
+            <a:ext cx="160477" cy="351130"/>
+          </a:xfrm>
+          <a:prstGeom prst="line">
+            <a:avLst/>
+          </a:prstGeom>
+          <a:ln w="9525">
+            <a:solidFill>
+              <a:srgbClr val="0B1F33">
+                <a:alpha val="40000"/>
+              </a:srgbClr>
+            </a:solidFill>
+          </a:ln>
+        </p:spPr>
+      </p:cxnSp>
+      <p:sp>
+        <p:nvSpPr>
+          <p:cNvPr id="123" name="Motif 123"/>
+          <p:cNvSpPr/>
+          <p:nvPr/>
+        </p:nvSpPr>
+        <p:spPr>
+          <a:xfrm>
+            <a:off x="7452360" y="554126"/>
+            <a:ext cx="98755" cy="98755"/>
+          </a:xfrm>
+          <a:prstGeom prst="ellipse">
+            <a:avLst/>
+          </a:prstGeom>
+          <a:solidFill>
+            <a:srgbClr val="1FA2A6">
+              <a:alpha val="85000"/>
+            </a:srgbClr>
+          </a:solidFill>
+          <a:ln>
+            <a:noFill/>
+          </a:ln>
+        </p:spPr>
+      </p:sp>
+      <p:sp>
+        <p:nvSpPr>
+          <p:cNvPr id="124" name="Motif 124"/>
+          <p:cNvSpPr/>
+          <p:nvPr/>
+        </p:nvSpPr>
+        <p:spPr>
+          <a:xfrm>
+            <a:off x="7784287" y="301752"/>
+            <a:ext cx="76810" cy="76810"/>
+          </a:xfrm>
+          <a:prstGeom prst="ellipse">
+            <a:avLst/>
+          </a:prstGeom>
+          <a:solidFill>
+            <a:srgbClr val="0B1F33">
+              <a:alpha val="85000"/>
+            </a:srgbClr>
+          </a:solidFill>
+          <a:ln>
+            <a:noFill/>
+          </a:ln>
+        </p:spPr>
+      </p:sp>
+      <p:sp>
+        <p:nvSpPr>
+          <p:cNvPr id="125" name="Motif 125"/>
+          <p:cNvSpPr/>
+          <p:nvPr/>
+        </p:nvSpPr>
+        <p:spPr>
+          <a:xfrm>
+            <a:off x="7863840" y="713232"/>
+            <a:ext cx="65837" cy="65837"/>
+          </a:xfrm>
+          <a:prstGeom prst="ellipse">
+            <a:avLst/>
+          </a:prstGeom>
+          <a:solidFill>
+            <a:srgbClr val="0B1F33">
+              <a:alpha val="85000"/>
+            </a:srgbClr>
+          </a:solidFill>
+          <a:ln>
+            <a:noFill/>
+          </a:ln>
+        </p:spPr>
+      </p:sp>
+      <p:sp>
+        <p:nvSpPr>
+          <p:cNvPr id="126" name="Motif 126"/>
+          <p:cNvSpPr/>
+          <p:nvPr/>
+        </p:nvSpPr>
+        <p:spPr>
+          <a:xfrm>
+            <a:off x="8124444" y="458114"/>
+            <a:ext cx="137160" cy="137160"/>
+          </a:xfrm>
+          <a:prstGeom prst="ellipse">
+            <a:avLst/>
+          </a:prstGeom>
+          <a:solidFill>
+            <a:srgbClr val="E63946">
+              <a:alpha val="85000"/>
+            </a:srgbClr>
+          </a:solidFill>
+          <a:ln>
+            <a:noFill/>
+          </a:ln>
+        </p:spPr>
+      </p:sp>
+      <p:sp>
+        <p:nvSpPr>
+          <p:cNvPr id="127" name="Motif 127"/>
+          <p:cNvSpPr/>
+          <p:nvPr/>
+        </p:nvSpPr>
+        <p:spPr>
+          <a:xfrm>
+            <a:off x="8448142" y="277063"/>
+            <a:ext cx="82296" cy="82296"/>
+          </a:xfrm>
+          <a:prstGeom prst="ellipse">
+            <a:avLst/>
+          </a:prstGeom>
+          <a:solidFill>
+            <a:srgbClr val="1FA2A6">
+              <a:alpha val="85000"/>
+            </a:srgbClr>
+          </a:solidFill>
+          <a:ln>
+            <a:noFill/>
+          </a:ln>
+        </p:spPr>
+      </p:sp>
+      <p:sp>
+        <p:nvSpPr>
+          <p:cNvPr id="128" name="Motif 128"/>
+          <p:cNvSpPr/>
+          <p:nvPr/>
+        </p:nvSpPr>
+        <p:spPr>
+          <a:xfrm>
+            <a:off x="8603132" y="622706"/>
+            <a:ext cx="93269" cy="93269"/>
+          </a:xfrm>
+          <a:prstGeom prst="ellipse">
+            <a:avLst/>
+          </a:prstGeom>
+          <a:solidFill>
+            <a:srgbClr val="1FA2A6">
+              <a:alpha val="85000"/>
+            </a:srgbClr>
+          </a:solidFill>
+          <a:ln>
+            <a:noFill/>
+          </a:ln>
+        </p:spPr>
+      </p:sp>
       <p:sp>
         <p:nvSpPr>
           <p:cNvPr id="2" name="Text 0"/>
@@ -14350,6 +18850,311 @@
           <a:chExt cx="0" cy="0"/>
         </a:xfrm>
       </p:grpSpPr>
+      <p:cxnSp>
+        <p:nvCxnSpPr>
+          <p:cNvPr id="136" name="Motif 136"/>
+          <p:cNvCxnSpPr/>
+          <p:nvPr/>
+        </p:nvCxnSpPr>
+        <p:spPr>
+          <a:xfrm flipV="1">
+            <a:off x="7501738" y="340157"/>
+            <a:ext cx="320954" cy="263347"/>
+          </a:xfrm>
+          <a:prstGeom prst="line">
+            <a:avLst/>
+          </a:prstGeom>
+          <a:ln w="9525">
+            <a:solidFill>
+              <a:srgbClr val="0B1F33">
+                <a:alpha val="40000"/>
+              </a:srgbClr>
+            </a:solidFill>
+          </a:ln>
+        </p:spPr>
+      </p:cxnSp>
+      <p:cxnSp>
+        <p:nvCxnSpPr>
+          <p:cNvPr id="137" name="Motif 137"/>
+          <p:cNvCxnSpPr/>
+          <p:nvPr/>
+        </p:nvCxnSpPr>
+        <p:spPr>
+          <a:xfrm>
+            <a:off x="7501738" y="603504"/>
+            <a:ext cx="395021" cy="142646"/>
+          </a:xfrm>
+          <a:prstGeom prst="line">
+            <a:avLst/>
+          </a:prstGeom>
+          <a:ln w="9525">
+            <a:solidFill>
+              <a:srgbClr val="0B1F33">
+                <a:alpha val="40000"/>
+              </a:srgbClr>
+            </a:solidFill>
+          </a:ln>
+        </p:spPr>
+      </p:cxnSp>
+      <p:cxnSp>
+        <p:nvCxnSpPr>
+          <p:cNvPr id="138" name="Motif 138"/>
+          <p:cNvCxnSpPr/>
+          <p:nvPr/>
+        </p:nvCxnSpPr>
+        <p:spPr>
+          <a:xfrm>
+            <a:off x="7822692" y="340157"/>
+            <a:ext cx="370332" cy="186538"/>
+          </a:xfrm>
+          <a:prstGeom prst="line">
+            <a:avLst/>
+          </a:prstGeom>
+          <a:ln w="9525">
+            <a:solidFill>
+              <a:srgbClr val="0B1F33">
+                <a:alpha val="40000"/>
+              </a:srgbClr>
+            </a:solidFill>
+          </a:ln>
+        </p:spPr>
+      </p:cxnSp>
+      <p:cxnSp>
+        <p:nvCxnSpPr>
+          <p:cNvPr id="139" name="Motif 139"/>
+          <p:cNvCxnSpPr/>
+          <p:nvPr/>
+        </p:nvCxnSpPr>
+        <p:spPr>
+          <a:xfrm flipV="1">
+            <a:off x="7896758" y="526694"/>
+            <a:ext cx="296266" cy="219456"/>
+          </a:xfrm>
+          <a:prstGeom prst="line">
+            <a:avLst/>
+          </a:prstGeom>
+          <a:ln w="9525">
+            <a:solidFill>
+              <a:srgbClr val="0B1F33">
+                <a:alpha val="40000"/>
+              </a:srgbClr>
+            </a:solidFill>
+          </a:ln>
+        </p:spPr>
+      </p:cxnSp>
+      <p:cxnSp>
+        <p:nvCxnSpPr>
+          <p:cNvPr id="140" name="Motif 140"/>
+          <p:cNvCxnSpPr/>
+          <p:nvPr/>
+        </p:nvCxnSpPr>
+        <p:spPr>
+          <a:xfrm flipV="1">
+            <a:off x="8193024" y="318211"/>
+            <a:ext cx="296266" cy="208483"/>
+          </a:xfrm>
+          <a:prstGeom prst="line">
+            <a:avLst/>
+          </a:prstGeom>
+          <a:ln w="9525">
+            <a:solidFill>
+              <a:srgbClr val="0B1F33">
+                <a:alpha val="40000"/>
+              </a:srgbClr>
+            </a:solidFill>
+          </a:ln>
+        </p:spPr>
+      </p:cxnSp>
+      <p:cxnSp>
+        <p:nvCxnSpPr>
+          <p:cNvPr id="141" name="Motif 141"/>
+          <p:cNvCxnSpPr/>
+          <p:nvPr/>
+        </p:nvCxnSpPr>
+        <p:spPr>
+          <a:xfrm>
+            <a:off x="8193024" y="526694"/>
+            <a:ext cx="456743" cy="142646"/>
+          </a:xfrm>
+          <a:prstGeom prst="line">
+            <a:avLst/>
+          </a:prstGeom>
+          <a:ln w="9525">
+            <a:solidFill>
+              <a:srgbClr val="0B1F33">
+                <a:alpha val="40000"/>
+              </a:srgbClr>
+            </a:solidFill>
+          </a:ln>
+        </p:spPr>
+      </p:cxnSp>
+      <p:cxnSp>
+        <p:nvCxnSpPr>
+          <p:cNvPr id="142" name="Motif 142"/>
+          <p:cNvCxnSpPr/>
+          <p:nvPr/>
+        </p:nvCxnSpPr>
+        <p:spPr>
+          <a:xfrm>
+            <a:off x="8489290" y="318211"/>
+            <a:ext cx="160477" cy="351130"/>
+          </a:xfrm>
+          <a:prstGeom prst="line">
+            <a:avLst/>
+          </a:prstGeom>
+          <a:ln w="9525">
+            <a:solidFill>
+              <a:srgbClr val="0B1F33">
+                <a:alpha val="40000"/>
+              </a:srgbClr>
+            </a:solidFill>
+          </a:ln>
+        </p:spPr>
+      </p:cxnSp>
+      <p:sp>
+        <p:nvSpPr>
+          <p:cNvPr id="143" name="Motif 143"/>
+          <p:cNvSpPr/>
+          <p:nvPr/>
+        </p:nvSpPr>
+        <p:spPr>
+          <a:xfrm>
+            <a:off x="7452360" y="554126"/>
+            <a:ext cx="98755" cy="98755"/>
+          </a:xfrm>
+          <a:prstGeom prst="ellipse">
+            <a:avLst/>
+          </a:prstGeom>
+          <a:solidFill>
+            <a:srgbClr val="1FA2A6">
+              <a:alpha val="85000"/>
+            </a:srgbClr>
+          </a:solidFill>
+          <a:ln>
+            <a:noFill/>
+          </a:ln>
+        </p:spPr>
+      </p:sp>
+      <p:sp>
+        <p:nvSpPr>
+          <p:cNvPr id="144" name="Motif 144"/>
+          <p:cNvSpPr/>
+          <p:nvPr/>
+        </p:nvSpPr>
+        <p:spPr>
+          <a:xfrm>
+            <a:off x="7784287" y="301752"/>
+            <a:ext cx="76810" cy="76810"/>
+          </a:xfrm>
+          <a:prstGeom prst="ellipse">
+            <a:avLst/>
+          </a:prstGeom>
+          <a:solidFill>
+            <a:srgbClr val="0B1F33">
+              <a:alpha val="85000"/>
+            </a:srgbClr>
+          </a:solidFill>
+          <a:ln>
+            <a:noFill/>
+          </a:ln>
+        </p:spPr>
+      </p:sp>
+      <p:sp>
+        <p:nvSpPr>
+          <p:cNvPr id="145" name="Motif 145"/>
+          <p:cNvSpPr/>
+          <p:nvPr/>
+        </p:nvSpPr>
+        <p:spPr>
+          <a:xfrm>
+            <a:off x="7863840" y="713232"/>
+            <a:ext cx="65837" cy="65837"/>
+          </a:xfrm>
+          <a:prstGeom prst="ellipse">
+            <a:avLst/>
+          </a:prstGeom>
+          <a:solidFill>
+            <a:srgbClr val="0B1F33">
+              <a:alpha val="85000"/>
+            </a:srgbClr>
+          </a:solidFill>
+          <a:ln>
+            <a:noFill/>
+          </a:ln>
+        </p:spPr>
+      </p:sp>
+      <p:sp>
+        <p:nvSpPr>
+          <p:cNvPr id="146" name="Motif 146"/>
+          <p:cNvSpPr/>
+          <p:nvPr/>
+        </p:nvSpPr>
+        <p:spPr>
+          <a:xfrm>
+            <a:off x="8124444" y="458114"/>
+            <a:ext cx="137160" cy="137160"/>
+          </a:xfrm>
+          <a:prstGeom prst="ellipse">
+            <a:avLst/>
+          </a:prstGeom>
+          <a:solidFill>
+            <a:srgbClr val="E63946">
+              <a:alpha val="85000"/>
+            </a:srgbClr>
+          </a:solidFill>
+          <a:ln>
+            <a:noFill/>
+          </a:ln>
+        </p:spPr>
+      </p:sp>
+      <p:sp>
+        <p:nvSpPr>
+          <p:cNvPr id="147" name="Motif 147"/>
+          <p:cNvSpPr/>
+          <p:nvPr/>
+        </p:nvSpPr>
+        <p:spPr>
+          <a:xfrm>
+            <a:off x="8448142" y="277063"/>
+            <a:ext cx="82296" cy="82296"/>
+          </a:xfrm>
+          <a:prstGeom prst="ellipse">
+            <a:avLst/>
+          </a:prstGeom>
+          <a:solidFill>
+            <a:srgbClr val="1FA2A6">
+              <a:alpha val="85000"/>
+            </a:srgbClr>
+          </a:solidFill>
+          <a:ln>
+            <a:noFill/>
+          </a:ln>
+        </p:spPr>
+      </p:sp>
+      <p:sp>
+        <p:nvSpPr>
+          <p:cNvPr id="148" name="Motif 148"/>
+          <p:cNvSpPr/>
+          <p:nvPr/>
+        </p:nvSpPr>
+        <p:spPr>
+          <a:xfrm>
+            <a:off x="8603132" y="622706"/>
+            <a:ext cx="93269" cy="93269"/>
+          </a:xfrm>
+          <a:prstGeom prst="ellipse">
+            <a:avLst/>
+          </a:prstGeom>
+          <a:solidFill>
+            <a:srgbClr val="1FA2A6">
+              <a:alpha val="85000"/>
+            </a:srgbClr>
+          </a:solidFill>
+          <a:ln>
+            <a:noFill/>
+          </a:ln>
+        </p:spPr>
+      </p:sp>
       <p:sp>
         <p:nvSpPr>
           <p:cNvPr id="2" name="Text 0"/>
@@ -15513,6 +20318,311 @@
           <a:chExt cx="0" cy="0"/>
         </a:xfrm>
       </p:grpSpPr>
+      <p:cxnSp>
+        <p:nvCxnSpPr>
+          <p:cNvPr id="110" name="Motif 110"/>
+          <p:cNvCxnSpPr/>
+          <p:nvPr/>
+        </p:nvCxnSpPr>
+        <p:spPr>
+          <a:xfrm flipV="1">
+            <a:off x="7501738" y="340157"/>
+            <a:ext cx="320954" cy="263347"/>
+          </a:xfrm>
+          <a:prstGeom prst="line">
+            <a:avLst/>
+          </a:prstGeom>
+          <a:ln w="9525">
+            <a:solidFill>
+              <a:srgbClr val="0B1F33">
+                <a:alpha val="40000"/>
+              </a:srgbClr>
+            </a:solidFill>
+          </a:ln>
+        </p:spPr>
+      </p:cxnSp>
+      <p:cxnSp>
+        <p:nvCxnSpPr>
+          <p:cNvPr id="111" name="Motif 111"/>
+          <p:cNvCxnSpPr/>
+          <p:nvPr/>
+        </p:nvCxnSpPr>
+        <p:spPr>
+          <a:xfrm>
+            <a:off x="7501738" y="603504"/>
+            <a:ext cx="395021" cy="142646"/>
+          </a:xfrm>
+          <a:prstGeom prst="line">
+            <a:avLst/>
+          </a:prstGeom>
+          <a:ln w="9525">
+            <a:solidFill>
+              <a:srgbClr val="0B1F33">
+                <a:alpha val="40000"/>
+              </a:srgbClr>
+            </a:solidFill>
+          </a:ln>
+        </p:spPr>
+      </p:cxnSp>
+      <p:cxnSp>
+        <p:nvCxnSpPr>
+          <p:cNvPr id="112" name="Motif 112"/>
+          <p:cNvCxnSpPr/>
+          <p:nvPr/>
+        </p:nvCxnSpPr>
+        <p:spPr>
+          <a:xfrm>
+            <a:off x="7822692" y="340157"/>
+            <a:ext cx="370332" cy="186538"/>
+          </a:xfrm>
+          <a:prstGeom prst="line">
+            <a:avLst/>
+          </a:prstGeom>
+          <a:ln w="9525">
+            <a:solidFill>
+              <a:srgbClr val="0B1F33">
+                <a:alpha val="40000"/>
+              </a:srgbClr>
+            </a:solidFill>
+          </a:ln>
+        </p:spPr>
+      </p:cxnSp>
+      <p:cxnSp>
+        <p:nvCxnSpPr>
+          <p:cNvPr id="113" name="Motif 113"/>
+          <p:cNvCxnSpPr/>
+          <p:nvPr/>
+        </p:nvCxnSpPr>
+        <p:spPr>
+          <a:xfrm flipV="1">
+            <a:off x="7896758" y="526694"/>
+            <a:ext cx="296266" cy="219456"/>
+          </a:xfrm>
+          <a:prstGeom prst="line">
+            <a:avLst/>
+          </a:prstGeom>
+          <a:ln w="9525">
+            <a:solidFill>
+              <a:srgbClr val="0B1F33">
+                <a:alpha val="40000"/>
+              </a:srgbClr>
+            </a:solidFill>
+          </a:ln>
+        </p:spPr>
+      </p:cxnSp>
+      <p:cxnSp>
+        <p:nvCxnSpPr>
+          <p:cNvPr id="114" name="Motif 114"/>
+          <p:cNvCxnSpPr/>
+          <p:nvPr/>
+        </p:nvCxnSpPr>
+        <p:spPr>
+          <a:xfrm flipV="1">
+            <a:off x="8193024" y="318211"/>
+            <a:ext cx="296266" cy="208483"/>
+          </a:xfrm>
+          <a:prstGeom prst="line">
+            <a:avLst/>
+          </a:prstGeom>
+          <a:ln w="9525">
+            <a:solidFill>
+              <a:srgbClr val="0B1F33">
+                <a:alpha val="40000"/>
+              </a:srgbClr>
+            </a:solidFill>
+          </a:ln>
+        </p:spPr>
+      </p:cxnSp>
+      <p:cxnSp>
+        <p:nvCxnSpPr>
+          <p:cNvPr id="115" name="Motif 115"/>
+          <p:cNvCxnSpPr/>
+          <p:nvPr/>
+        </p:nvCxnSpPr>
+        <p:spPr>
+          <a:xfrm>
+            <a:off x="8193024" y="526694"/>
+            <a:ext cx="456743" cy="142646"/>
+          </a:xfrm>
+          <a:prstGeom prst="line">
+            <a:avLst/>
+          </a:prstGeom>
+          <a:ln w="9525">
+            <a:solidFill>
+              <a:srgbClr val="0B1F33">
+                <a:alpha val="40000"/>
+              </a:srgbClr>
+            </a:solidFill>
+          </a:ln>
+        </p:spPr>
+      </p:cxnSp>
+      <p:cxnSp>
+        <p:nvCxnSpPr>
+          <p:cNvPr id="116" name="Motif 116"/>
+          <p:cNvCxnSpPr/>
+          <p:nvPr/>
+        </p:nvCxnSpPr>
+        <p:spPr>
+          <a:xfrm>
+            <a:off x="8489290" y="318211"/>
+            <a:ext cx="160477" cy="351130"/>
+          </a:xfrm>
+          <a:prstGeom prst="line">
+            <a:avLst/>
+          </a:prstGeom>
+          <a:ln w="9525">
+            <a:solidFill>
+              <a:srgbClr val="0B1F33">
+                <a:alpha val="40000"/>
+              </a:srgbClr>
+            </a:solidFill>
+          </a:ln>
+        </p:spPr>
+      </p:cxnSp>
+      <p:sp>
+        <p:nvSpPr>
+          <p:cNvPr id="117" name="Motif 117"/>
+          <p:cNvSpPr/>
+          <p:nvPr/>
+        </p:nvSpPr>
+        <p:spPr>
+          <a:xfrm>
+            <a:off x="7452360" y="554126"/>
+            <a:ext cx="98755" cy="98755"/>
+          </a:xfrm>
+          <a:prstGeom prst="ellipse">
+            <a:avLst/>
+          </a:prstGeom>
+          <a:solidFill>
+            <a:srgbClr val="1FA2A6">
+              <a:alpha val="85000"/>
+            </a:srgbClr>
+          </a:solidFill>
+          <a:ln>
+            <a:noFill/>
+          </a:ln>
+        </p:spPr>
+      </p:sp>
+      <p:sp>
+        <p:nvSpPr>
+          <p:cNvPr id="118" name="Motif 118"/>
+          <p:cNvSpPr/>
+          <p:nvPr/>
+        </p:nvSpPr>
+        <p:spPr>
+          <a:xfrm>
+            <a:off x="7784287" y="301752"/>
+            <a:ext cx="76810" cy="76810"/>
+          </a:xfrm>
+          <a:prstGeom prst="ellipse">
+            <a:avLst/>
+          </a:prstGeom>
+          <a:solidFill>
+            <a:srgbClr val="0B1F33">
+              <a:alpha val="85000"/>
+            </a:srgbClr>
+          </a:solidFill>
+          <a:ln>
+            <a:noFill/>
+          </a:ln>
+        </p:spPr>
+      </p:sp>
+      <p:sp>
+        <p:nvSpPr>
+          <p:cNvPr id="119" name="Motif 119"/>
+          <p:cNvSpPr/>
+          <p:nvPr/>
+        </p:nvSpPr>
+        <p:spPr>
+          <a:xfrm>
+            <a:off x="7863840" y="713232"/>
+            <a:ext cx="65837" cy="65837"/>
+          </a:xfrm>
+          <a:prstGeom prst="ellipse">
+            <a:avLst/>
+          </a:prstGeom>
+          <a:solidFill>
+            <a:srgbClr val="0B1F33">
+              <a:alpha val="85000"/>
+            </a:srgbClr>
+          </a:solidFill>
+          <a:ln>
+            <a:noFill/>
+          </a:ln>
+        </p:spPr>
+      </p:sp>
+      <p:sp>
+        <p:nvSpPr>
+          <p:cNvPr id="120" name="Motif 120"/>
+          <p:cNvSpPr/>
+          <p:nvPr/>
+        </p:nvSpPr>
+        <p:spPr>
+          <a:xfrm>
+            <a:off x="8124444" y="458114"/>
+            <a:ext cx="137160" cy="137160"/>
+          </a:xfrm>
+          <a:prstGeom prst="ellipse">
+            <a:avLst/>
+          </a:prstGeom>
+          <a:solidFill>
+            <a:srgbClr val="E63946">
+              <a:alpha val="85000"/>
+            </a:srgbClr>
+          </a:solidFill>
+          <a:ln>
+            <a:noFill/>
+          </a:ln>
+        </p:spPr>
+      </p:sp>
+      <p:sp>
+        <p:nvSpPr>
+          <p:cNvPr id="121" name="Motif 121"/>
+          <p:cNvSpPr/>
+          <p:nvPr/>
+        </p:nvSpPr>
+        <p:spPr>
+          <a:xfrm>
+            <a:off x="8448142" y="277063"/>
+            <a:ext cx="82296" cy="82296"/>
+          </a:xfrm>
+          <a:prstGeom prst="ellipse">
+            <a:avLst/>
+          </a:prstGeom>
+          <a:solidFill>
+            <a:srgbClr val="1FA2A6">
+              <a:alpha val="85000"/>
+            </a:srgbClr>
+          </a:solidFill>
+          <a:ln>
+            <a:noFill/>
+          </a:ln>
+        </p:spPr>
+      </p:sp>
+      <p:sp>
+        <p:nvSpPr>
+          <p:cNvPr id="122" name="Motif 122"/>
+          <p:cNvSpPr/>
+          <p:nvPr/>
+        </p:nvSpPr>
+        <p:spPr>
+          <a:xfrm>
+            <a:off x="8603132" y="622706"/>
+            <a:ext cx="93269" cy="93269"/>
+          </a:xfrm>
+          <a:prstGeom prst="ellipse">
+            <a:avLst/>
+          </a:prstGeom>
+          <a:solidFill>
+            <a:srgbClr val="1FA2A6">
+              <a:alpha val="85000"/>
+            </a:srgbClr>
+          </a:solidFill>
+          <a:ln>
+            <a:noFill/>
+          </a:ln>
+        </p:spPr>
+      </p:sp>
       <p:sp>
         <p:nvSpPr>
           <p:cNvPr id="2" name="Text 0"/>
@@ -16015,6 +21125,311 @@
           <a:chExt cx="0" cy="0"/>
         </a:xfrm>
       </p:grpSpPr>
+      <p:cxnSp>
+        <p:nvCxnSpPr>
+          <p:cNvPr id="138" name="Motif 138"/>
+          <p:cNvCxnSpPr/>
+          <p:nvPr/>
+        </p:nvCxnSpPr>
+        <p:spPr>
+          <a:xfrm flipV="1">
+            <a:off x="7501738" y="340157"/>
+            <a:ext cx="320954" cy="263347"/>
+          </a:xfrm>
+          <a:prstGeom prst="line">
+            <a:avLst/>
+          </a:prstGeom>
+          <a:ln w="9525">
+            <a:solidFill>
+              <a:srgbClr val="0B1F33">
+                <a:alpha val="40000"/>
+              </a:srgbClr>
+            </a:solidFill>
+          </a:ln>
+        </p:spPr>
+      </p:cxnSp>
+      <p:cxnSp>
+        <p:nvCxnSpPr>
+          <p:cNvPr id="139" name="Motif 139"/>
+          <p:cNvCxnSpPr/>
+          <p:nvPr/>
+        </p:nvCxnSpPr>
+        <p:spPr>
+          <a:xfrm>
+            <a:off x="7501738" y="603504"/>
+            <a:ext cx="395021" cy="142646"/>
+          </a:xfrm>
+          <a:prstGeom prst="line">
+            <a:avLst/>
+          </a:prstGeom>
+          <a:ln w="9525">
+            <a:solidFill>
+              <a:srgbClr val="0B1F33">
+                <a:alpha val="40000"/>
+              </a:srgbClr>
+            </a:solidFill>
+          </a:ln>
+        </p:spPr>
+      </p:cxnSp>
+      <p:cxnSp>
+        <p:nvCxnSpPr>
+          <p:cNvPr id="140" name="Motif 140"/>
+          <p:cNvCxnSpPr/>
+          <p:nvPr/>
+        </p:nvCxnSpPr>
+        <p:spPr>
+          <a:xfrm>
+            <a:off x="7822692" y="340157"/>
+            <a:ext cx="370332" cy="186538"/>
+          </a:xfrm>
+          <a:prstGeom prst="line">
+            <a:avLst/>
+          </a:prstGeom>
+          <a:ln w="9525">
+            <a:solidFill>
+              <a:srgbClr val="0B1F33">
+                <a:alpha val="40000"/>
+              </a:srgbClr>
+            </a:solidFill>
+          </a:ln>
+        </p:spPr>
+      </p:cxnSp>
+      <p:cxnSp>
+        <p:nvCxnSpPr>
+          <p:cNvPr id="141" name="Motif 141"/>
+          <p:cNvCxnSpPr/>
+          <p:nvPr/>
+        </p:nvCxnSpPr>
+        <p:spPr>
+          <a:xfrm flipV="1">
+            <a:off x="7896758" y="526694"/>
+            <a:ext cx="296266" cy="219456"/>
+          </a:xfrm>
+          <a:prstGeom prst="line">
+            <a:avLst/>
+          </a:prstGeom>
+          <a:ln w="9525">
+            <a:solidFill>
+              <a:srgbClr val="0B1F33">
+                <a:alpha val="40000"/>
+              </a:srgbClr>
+            </a:solidFill>
+          </a:ln>
+        </p:spPr>
+      </p:cxnSp>
+      <p:cxnSp>
+        <p:nvCxnSpPr>
+          <p:cNvPr id="142" name="Motif 142"/>
+          <p:cNvCxnSpPr/>
+          <p:nvPr/>
+        </p:nvCxnSpPr>
+        <p:spPr>
+          <a:xfrm flipV="1">
+            <a:off x="8193024" y="318211"/>
+            <a:ext cx="296266" cy="208483"/>
+          </a:xfrm>
+          <a:prstGeom prst="line">
+            <a:avLst/>
+          </a:prstGeom>
+          <a:ln w="9525">
+            <a:solidFill>
+              <a:srgbClr val="0B1F33">
+                <a:alpha val="40000"/>
+              </a:srgbClr>
+            </a:solidFill>
+          </a:ln>
+        </p:spPr>
+      </p:cxnSp>
+      <p:cxnSp>
+        <p:nvCxnSpPr>
+          <p:cNvPr id="143" name="Motif 143"/>
+          <p:cNvCxnSpPr/>
+          <p:nvPr/>
+        </p:nvCxnSpPr>
+        <p:spPr>
+          <a:xfrm>
+            <a:off x="8193024" y="526694"/>
+            <a:ext cx="456743" cy="142646"/>
+          </a:xfrm>
+          <a:prstGeom prst="line">
+            <a:avLst/>
+          </a:prstGeom>
+          <a:ln w="9525">
+            <a:solidFill>
+              <a:srgbClr val="0B1F33">
+                <a:alpha val="40000"/>
+              </a:srgbClr>
+            </a:solidFill>
+          </a:ln>
+        </p:spPr>
+      </p:cxnSp>
+      <p:cxnSp>
+        <p:nvCxnSpPr>
+          <p:cNvPr id="144" name="Motif 144"/>
+          <p:cNvCxnSpPr/>
+          <p:nvPr/>
+        </p:nvCxnSpPr>
+        <p:spPr>
+          <a:xfrm>
+            <a:off x="8489290" y="318211"/>
+            <a:ext cx="160477" cy="351130"/>
+          </a:xfrm>
+          <a:prstGeom prst="line">
+            <a:avLst/>
+          </a:prstGeom>
+          <a:ln w="9525">
+            <a:solidFill>
+              <a:srgbClr val="0B1F33">
+                <a:alpha val="40000"/>
+              </a:srgbClr>
+            </a:solidFill>
+          </a:ln>
+        </p:spPr>
+      </p:cxnSp>
+      <p:sp>
+        <p:nvSpPr>
+          <p:cNvPr id="145" name="Motif 145"/>
+          <p:cNvSpPr/>
+          <p:nvPr/>
+        </p:nvSpPr>
+        <p:spPr>
+          <a:xfrm>
+            <a:off x="7452360" y="554126"/>
+            <a:ext cx="98755" cy="98755"/>
+          </a:xfrm>
+          <a:prstGeom prst="ellipse">
+            <a:avLst/>
+          </a:prstGeom>
+          <a:solidFill>
+            <a:srgbClr val="1FA2A6">
+              <a:alpha val="85000"/>
+            </a:srgbClr>
+          </a:solidFill>
+          <a:ln>
+            <a:noFill/>
+          </a:ln>
+        </p:spPr>
+      </p:sp>
+      <p:sp>
+        <p:nvSpPr>
+          <p:cNvPr id="146" name="Motif 146"/>
+          <p:cNvSpPr/>
+          <p:nvPr/>
+        </p:nvSpPr>
+        <p:spPr>
+          <a:xfrm>
+            <a:off x="7784287" y="301752"/>
+            <a:ext cx="76810" cy="76810"/>
+          </a:xfrm>
+          <a:prstGeom prst="ellipse">
+            <a:avLst/>
+          </a:prstGeom>
+          <a:solidFill>
+            <a:srgbClr val="0B1F33">
+              <a:alpha val="85000"/>
+            </a:srgbClr>
+          </a:solidFill>
+          <a:ln>
+            <a:noFill/>
+          </a:ln>
+        </p:spPr>
+      </p:sp>
+      <p:sp>
+        <p:nvSpPr>
+          <p:cNvPr id="147" name="Motif 147"/>
+          <p:cNvSpPr/>
+          <p:nvPr/>
+        </p:nvSpPr>
+        <p:spPr>
+          <a:xfrm>
+            <a:off x="7863840" y="713232"/>
+            <a:ext cx="65837" cy="65837"/>
+          </a:xfrm>
+          <a:prstGeom prst="ellipse">
+            <a:avLst/>
+          </a:prstGeom>
+          <a:solidFill>
+            <a:srgbClr val="0B1F33">
+              <a:alpha val="85000"/>
+            </a:srgbClr>
+          </a:solidFill>
+          <a:ln>
+            <a:noFill/>
+          </a:ln>
+        </p:spPr>
+      </p:sp>
+      <p:sp>
+        <p:nvSpPr>
+          <p:cNvPr id="148" name="Motif 148"/>
+          <p:cNvSpPr/>
+          <p:nvPr/>
+        </p:nvSpPr>
+        <p:spPr>
+          <a:xfrm>
+            <a:off x="8124444" y="458114"/>
+            <a:ext cx="137160" cy="137160"/>
+          </a:xfrm>
+          <a:prstGeom prst="ellipse">
+            <a:avLst/>
+          </a:prstGeom>
+          <a:solidFill>
+            <a:srgbClr val="E63946">
+              <a:alpha val="85000"/>
+            </a:srgbClr>
+          </a:solidFill>
+          <a:ln>
+            <a:noFill/>
+          </a:ln>
+        </p:spPr>
+      </p:sp>
+      <p:sp>
+        <p:nvSpPr>
+          <p:cNvPr id="149" name="Motif 149"/>
+          <p:cNvSpPr/>
+          <p:nvPr/>
+        </p:nvSpPr>
+        <p:spPr>
+          <a:xfrm>
+            <a:off x="8448142" y="277063"/>
+            <a:ext cx="82296" cy="82296"/>
+          </a:xfrm>
+          <a:prstGeom prst="ellipse">
+            <a:avLst/>
+          </a:prstGeom>
+          <a:solidFill>
+            <a:srgbClr val="1FA2A6">
+              <a:alpha val="85000"/>
+            </a:srgbClr>
+          </a:solidFill>
+          <a:ln>
+            <a:noFill/>
+          </a:ln>
+        </p:spPr>
+      </p:sp>
+      <p:sp>
+        <p:nvSpPr>
+          <p:cNvPr id="150" name="Motif 150"/>
+          <p:cNvSpPr/>
+          <p:nvPr/>
+        </p:nvSpPr>
+        <p:spPr>
+          <a:xfrm>
+            <a:off x="8603132" y="622706"/>
+            <a:ext cx="93269" cy="93269"/>
+          </a:xfrm>
+          <a:prstGeom prst="ellipse">
+            <a:avLst/>
+          </a:prstGeom>
+          <a:solidFill>
+            <a:srgbClr val="1FA2A6">
+              <a:alpha val="85000"/>
+            </a:srgbClr>
+          </a:solidFill>
+          <a:ln>
+            <a:noFill/>
+          </a:ln>
+        </p:spPr>
+      </p:sp>
       <p:sp>
         <p:nvSpPr>
           <p:cNvPr id="2" name="Text 0"/>
@@ -17204,6 +22619,311 @@
           <a:chExt cx="0" cy="0"/>
         </a:xfrm>
       </p:grpSpPr>
+      <p:cxnSp>
+        <p:nvCxnSpPr>
+          <p:cNvPr id="136" name="Motif 136"/>
+          <p:cNvCxnSpPr/>
+          <p:nvPr/>
+        </p:nvCxnSpPr>
+        <p:spPr>
+          <a:xfrm flipV="1">
+            <a:off x="7501738" y="340157"/>
+            <a:ext cx="320954" cy="263347"/>
+          </a:xfrm>
+          <a:prstGeom prst="line">
+            <a:avLst/>
+          </a:prstGeom>
+          <a:ln w="9525">
+            <a:solidFill>
+              <a:srgbClr val="0B1F33">
+                <a:alpha val="40000"/>
+              </a:srgbClr>
+            </a:solidFill>
+          </a:ln>
+        </p:spPr>
+      </p:cxnSp>
+      <p:cxnSp>
+        <p:nvCxnSpPr>
+          <p:cNvPr id="137" name="Motif 137"/>
+          <p:cNvCxnSpPr/>
+          <p:nvPr/>
+        </p:nvCxnSpPr>
+        <p:spPr>
+          <a:xfrm>
+            <a:off x="7501738" y="603504"/>
+            <a:ext cx="395021" cy="142646"/>
+          </a:xfrm>
+          <a:prstGeom prst="line">
+            <a:avLst/>
+          </a:prstGeom>
+          <a:ln w="9525">
+            <a:solidFill>
+              <a:srgbClr val="0B1F33">
+                <a:alpha val="40000"/>
+              </a:srgbClr>
+            </a:solidFill>
+          </a:ln>
+        </p:spPr>
+      </p:cxnSp>
+      <p:cxnSp>
+        <p:nvCxnSpPr>
+          <p:cNvPr id="138" name="Motif 138"/>
+          <p:cNvCxnSpPr/>
+          <p:nvPr/>
+        </p:nvCxnSpPr>
+        <p:spPr>
+          <a:xfrm>
+            <a:off x="7822692" y="340157"/>
+            <a:ext cx="370332" cy="186538"/>
+          </a:xfrm>
+          <a:prstGeom prst="line">
+            <a:avLst/>
+          </a:prstGeom>
+          <a:ln w="9525">
+            <a:solidFill>
+              <a:srgbClr val="0B1F33">
+                <a:alpha val="40000"/>
+              </a:srgbClr>
+            </a:solidFill>
+          </a:ln>
+        </p:spPr>
+      </p:cxnSp>
+      <p:cxnSp>
+        <p:nvCxnSpPr>
+          <p:cNvPr id="139" name="Motif 139"/>
+          <p:cNvCxnSpPr/>
+          <p:nvPr/>
+        </p:nvCxnSpPr>
+        <p:spPr>
+          <a:xfrm flipV="1">
+            <a:off x="7896758" y="526694"/>
+            <a:ext cx="296266" cy="219456"/>
+          </a:xfrm>
+          <a:prstGeom prst="line">
+            <a:avLst/>
+          </a:prstGeom>
+          <a:ln w="9525">
+            <a:solidFill>
+              <a:srgbClr val="0B1F33">
+                <a:alpha val="40000"/>
+              </a:srgbClr>
+            </a:solidFill>
+          </a:ln>
+        </p:spPr>
+      </p:cxnSp>
+      <p:cxnSp>
+        <p:nvCxnSpPr>
+          <p:cNvPr id="140" name="Motif 140"/>
+          <p:cNvCxnSpPr/>
+          <p:nvPr/>
+        </p:nvCxnSpPr>
+        <p:spPr>
+          <a:xfrm flipV="1">
+            <a:off x="8193024" y="318211"/>
+            <a:ext cx="296266" cy="208483"/>
+          </a:xfrm>
+          <a:prstGeom prst="line">
+            <a:avLst/>
+          </a:prstGeom>
+          <a:ln w="9525">
+            <a:solidFill>
+              <a:srgbClr val="0B1F33">
+                <a:alpha val="40000"/>
+              </a:srgbClr>
+            </a:solidFill>
+          </a:ln>
+        </p:spPr>
+      </p:cxnSp>
+      <p:cxnSp>
+        <p:nvCxnSpPr>
+          <p:cNvPr id="141" name="Motif 141"/>
+          <p:cNvCxnSpPr/>
+          <p:nvPr/>
+        </p:nvCxnSpPr>
+        <p:spPr>
+          <a:xfrm>
+            <a:off x="8193024" y="526694"/>
+            <a:ext cx="456743" cy="142646"/>
+          </a:xfrm>
+          <a:prstGeom prst="line">
+            <a:avLst/>
+          </a:prstGeom>
+          <a:ln w="9525">
+            <a:solidFill>
+              <a:srgbClr val="0B1F33">
+                <a:alpha val="40000"/>
+              </a:srgbClr>
+            </a:solidFill>
+          </a:ln>
+        </p:spPr>
+      </p:cxnSp>
+      <p:cxnSp>
+        <p:nvCxnSpPr>
+          <p:cNvPr id="142" name="Motif 142"/>
+          <p:cNvCxnSpPr/>
+          <p:nvPr/>
+        </p:nvCxnSpPr>
+        <p:spPr>
+          <a:xfrm>
+            <a:off x="8489290" y="318211"/>
+            <a:ext cx="160477" cy="351130"/>
+          </a:xfrm>
+          <a:prstGeom prst="line">
+            <a:avLst/>
+          </a:prstGeom>
+          <a:ln w="9525">
+            <a:solidFill>
+              <a:srgbClr val="0B1F33">
+                <a:alpha val="40000"/>
+              </a:srgbClr>
+            </a:solidFill>
+          </a:ln>
+        </p:spPr>
+      </p:cxnSp>
+      <p:sp>
+        <p:nvSpPr>
+          <p:cNvPr id="143" name="Motif 143"/>
+          <p:cNvSpPr/>
+          <p:nvPr/>
+        </p:nvSpPr>
+        <p:spPr>
+          <a:xfrm>
+            <a:off x="7452360" y="554126"/>
+            <a:ext cx="98755" cy="98755"/>
+          </a:xfrm>
+          <a:prstGeom prst="ellipse">
+            <a:avLst/>
+          </a:prstGeom>
+          <a:solidFill>
+            <a:srgbClr val="1FA2A6">
+              <a:alpha val="85000"/>
+            </a:srgbClr>
+          </a:solidFill>
+          <a:ln>
+            <a:noFill/>
+          </a:ln>
+        </p:spPr>
+      </p:sp>
+      <p:sp>
+        <p:nvSpPr>
+          <p:cNvPr id="144" name="Motif 144"/>
+          <p:cNvSpPr/>
+          <p:nvPr/>
+        </p:nvSpPr>
+        <p:spPr>
+          <a:xfrm>
+            <a:off x="7784287" y="301752"/>
+            <a:ext cx="76810" cy="76810"/>
+          </a:xfrm>
+          <a:prstGeom prst="ellipse">
+            <a:avLst/>
+          </a:prstGeom>
+          <a:solidFill>
+            <a:srgbClr val="0B1F33">
+              <a:alpha val="85000"/>
+            </a:srgbClr>
+          </a:solidFill>
+          <a:ln>
+            <a:noFill/>
+          </a:ln>
+        </p:spPr>
+      </p:sp>
+      <p:sp>
+        <p:nvSpPr>
+          <p:cNvPr id="145" name="Motif 145"/>
+          <p:cNvSpPr/>
+          <p:nvPr/>
+        </p:nvSpPr>
+        <p:spPr>
+          <a:xfrm>
+            <a:off x="7863840" y="713232"/>
+            <a:ext cx="65837" cy="65837"/>
+          </a:xfrm>
+          <a:prstGeom prst="ellipse">
+            <a:avLst/>
+          </a:prstGeom>
+          <a:solidFill>
+            <a:srgbClr val="0B1F33">
+              <a:alpha val="85000"/>
+            </a:srgbClr>
+          </a:solidFill>
+          <a:ln>
+            <a:noFill/>
+          </a:ln>
+        </p:spPr>
+      </p:sp>
+      <p:sp>
+        <p:nvSpPr>
+          <p:cNvPr id="146" name="Motif 146"/>
+          <p:cNvSpPr/>
+          <p:nvPr/>
+        </p:nvSpPr>
+        <p:spPr>
+          <a:xfrm>
+            <a:off x="8124444" y="458114"/>
+            <a:ext cx="137160" cy="137160"/>
+          </a:xfrm>
+          <a:prstGeom prst="ellipse">
+            <a:avLst/>
+          </a:prstGeom>
+          <a:solidFill>
+            <a:srgbClr val="E63946">
+              <a:alpha val="85000"/>
+            </a:srgbClr>
+          </a:solidFill>
+          <a:ln>
+            <a:noFill/>
+          </a:ln>
+        </p:spPr>
+      </p:sp>
+      <p:sp>
+        <p:nvSpPr>
+          <p:cNvPr id="147" name="Motif 147"/>
+          <p:cNvSpPr/>
+          <p:nvPr/>
+        </p:nvSpPr>
+        <p:spPr>
+          <a:xfrm>
+            <a:off x="8448142" y="277063"/>
+            <a:ext cx="82296" cy="82296"/>
+          </a:xfrm>
+          <a:prstGeom prst="ellipse">
+            <a:avLst/>
+          </a:prstGeom>
+          <a:solidFill>
+            <a:srgbClr val="1FA2A6">
+              <a:alpha val="85000"/>
+            </a:srgbClr>
+          </a:solidFill>
+          <a:ln>
+            <a:noFill/>
+          </a:ln>
+        </p:spPr>
+      </p:sp>
+      <p:sp>
+        <p:nvSpPr>
+          <p:cNvPr id="148" name="Motif 148"/>
+          <p:cNvSpPr/>
+          <p:nvPr/>
+        </p:nvSpPr>
+        <p:spPr>
+          <a:xfrm>
+            <a:off x="8603132" y="622706"/>
+            <a:ext cx="93269" cy="93269"/>
+          </a:xfrm>
+          <a:prstGeom prst="ellipse">
+            <a:avLst/>
+          </a:prstGeom>
+          <a:solidFill>
+            <a:srgbClr val="1FA2A6">
+              <a:alpha val="85000"/>
+            </a:srgbClr>
+          </a:solidFill>
+          <a:ln>
+            <a:noFill/>
+          </a:ln>
+        </p:spPr>
+      </p:sp>
       <p:sp>
         <p:nvSpPr>
           <p:cNvPr id="2" name="Text 0"/>
@@ -18385,6 +24105,311 @@
           <a:chExt cx="0" cy="0"/>
         </a:xfrm>
       </p:grpSpPr>
+      <p:cxnSp>
+        <p:nvCxnSpPr>
+          <p:cNvPr id="137" name="Motif 137"/>
+          <p:cNvCxnSpPr/>
+          <p:nvPr/>
+        </p:nvCxnSpPr>
+        <p:spPr>
+          <a:xfrm flipV="1">
+            <a:off x="7501738" y="340157"/>
+            <a:ext cx="320954" cy="263347"/>
+          </a:xfrm>
+          <a:prstGeom prst="line">
+            <a:avLst/>
+          </a:prstGeom>
+          <a:ln w="9525">
+            <a:solidFill>
+              <a:srgbClr val="0B1F33">
+                <a:alpha val="40000"/>
+              </a:srgbClr>
+            </a:solidFill>
+          </a:ln>
+        </p:spPr>
+      </p:cxnSp>
+      <p:cxnSp>
+        <p:nvCxnSpPr>
+          <p:cNvPr id="138" name="Motif 138"/>
+          <p:cNvCxnSpPr/>
+          <p:nvPr/>
+        </p:nvCxnSpPr>
+        <p:spPr>
+          <a:xfrm>
+            <a:off x="7501738" y="603504"/>
+            <a:ext cx="395021" cy="142646"/>
+          </a:xfrm>
+          <a:prstGeom prst="line">
+            <a:avLst/>
+          </a:prstGeom>
+          <a:ln w="9525">
+            <a:solidFill>
+              <a:srgbClr val="0B1F33">
+                <a:alpha val="40000"/>
+              </a:srgbClr>
+            </a:solidFill>
+          </a:ln>
+        </p:spPr>
+      </p:cxnSp>
+      <p:cxnSp>
+        <p:nvCxnSpPr>
+          <p:cNvPr id="139" name="Motif 139"/>
+          <p:cNvCxnSpPr/>
+          <p:nvPr/>
+        </p:nvCxnSpPr>
+        <p:spPr>
+          <a:xfrm>
+            <a:off x="7822692" y="340157"/>
+            <a:ext cx="370332" cy="186538"/>
+          </a:xfrm>
+          <a:prstGeom prst="line">
+            <a:avLst/>
+          </a:prstGeom>
+          <a:ln w="9525">
+            <a:solidFill>
+              <a:srgbClr val="0B1F33">
+                <a:alpha val="40000"/>
+              </a:srgbClr>
+            </a:solidFill>
+          </a:ln>
+        </p:spPr>
+      </p:cxnSp>
+      <p:cxnSp>
+        <p:nvCxnSpPr>
+          <p:cNvPr id="140" name="Motif 140"/>
+          <p:cNvCxnSpPr/>
+          <p:nvPr/>
+        </p:nvCxnSpPr>
+        <p:spPr>
+          <a:xfrm flipV="1">
+            <a:off x="7896758" y="526694"/>
+            <a:ext cx="296266" cy="219456"/>
+          </a:xfrm>
+          <a:prstGeom prst="line">
+            <a:avLst/>
+          </a:prstGeom>
+          <a:ln w="9525">
+            <a:solidFill>
+              <a:srgbClr val="0B1F33">
+                <a:alpha val="40000"/>
+              </a:srgbClr>
+            </a:solidFill>
+          </a:ln>
+        </p:spPr>
+      </p:cxnSp>
+      <p:cxnSp>
+        <p:nvCxnSpPr>
+          <p:cNvPr id="141" name="Motif 141"/>
+          <p:cNvCxnSpPr/>
+          <p:nvPr/>
+        </p:nvCxnSpPr>
+        <p:spPr>
+          <a:xfrm flipV="1">
+            <a:off x="8193024" y="318211"/>
+            <a:ext cx="296266" cy="208483"/>
+          </a:xfrm>
+          <a:prstGeom prst="line">
+            <a:avLst/>
+          </a:prstGeom>
+          <a:ln w="9525">
+            <a:solidFill>
+              <a:srgbClr val="0B1F33">
+                <a:alpha val="40000"/>
+              </a:srgbClr>
+            </a:solidFill>
+          </a:ln>
+        </p:spPr>
+      </p:cxnSp>
+      <p:cxnSp>
+        <p:nvCxnSpPr>
+          <p:cNvPr id="142" name="Motif 142"/>
+          <p:cNvCxnSpPr/>
+          <p:nvPr/>
+        </p:nvCxnSpPr>
+        <p:spPr>
+          <a:xfrm>
+            <a:off x="8193024" y="526694"/>
+            <a:ext cx="456743" cy="142646"/>
+          </a:xfrm>
+          <a:prstGeom prst="line">
+            <a:avLst/>
+          </a:prstGeom>
+          <a:ln w="9525">
+            <a:solidFill>
+              <a:srgbClr val="0B1F33">
+                <a:alpha val="40000"/>
+              </a:srgbClr>
+            </a:solidFill>
+          </a:ln>
+        </p:spPr>
+      </p:cxnSp>
+      <p:cxnSp>
+        <p:nvCxnSpPr>
+          <p:cNvPr id="143" name="Motif 143"/>
+          <p:cNvCxnSpPr/>
+          <p:nvPr/>
+        </p:nvCxnSpPr>
+        <p:spPr>
+          <a:xfrm>
+            <a:off x="8489290" y="318211"/>
+            <a:ext cx="160477" cy="351130"/>
+          </a:xfrm>
+          <a:prstGeom prst="line">
+            <a:avLst/>
+          </a:prstGeom>
+          <a:ln w="9525">
+            <a:solidFill>
+              <a:srgbClr val="0B1F33">
+                <a:alpha val="40000"/>
+              </a:srgbClr>
+            </a:solidFill>
+          </a:ln>
+        </p:spPr>
+      </p:cxnSp>
+      <p:sp>
+        <p:nvSpPr>
+          <p:cNvPr id="144" name="Motif 144"/>
+          <p:cNvSpPr/>
+          <p:nvPr/>
+        </p:nvSpPr>
+        <p:spPr>
+          <a:xfrm>
+            <a:off x="7452360" y="554126"/>
+            <a:ext cx="98755" cy="98755"/>
+          </a:xfrm>
+          <a:prstGeom prst="ellipse">
+            <a:avLst/>
+          </a:prstGeom>
+          <a:solidFill>
+            <a:srgbClr val="1FA2A6">
+              <a:alpha val="85000"/>
+            </a:srgbClr>
+          </a:solidFill>
+          <a:ln>
+            <a:noFill/>
+          </a:ln>
+        </p:spPr>
+      </p:sp>
+      <p:sp>
+        <p:nvSpPr>
+          <p:cNvPr id="145" name="Motif 145"/>
+          <p:cNvSpPr/>
+          <p:nvPr/>
+        </p:nvSpPr>
+        <p:spPr>
+          <a:xfrm>
+            <a:off x="7784287" y="301752"/>
+            <a:ext cx="76810" cy="76810"/>
+          </a:xfrm>
+          <a:prstGeom prst="ellipse">
+            <a:avLst/>
+          </a:prstGeom>
+          <a:solidFill>
+            <a:srgbClr val="0B1F33">
+              <a:alpha val="85000"/>
+            </a:srgbClr>
+          </a:solidFill>
+          <a:ln>
+            <a:noFill/>
+          </a:ln>
+        </p:spPr>
+      </p:sp>
+      <p:sp>
+        <p:nvSpPr>
+          <p:cNvPr id="146" name="Motif 146"/>
+          <p:cNvSpPr/>
+          <p:nvPr/>
+        </p:nvSpPr>
+        <p:spPr>
+          <a:xfrm>
+            <a:off x="7863840" y="713232"/>
+            <a:ext cx="65837" cy="65837"/>
+          </a:xfrm>
+          <a:prstGeom prst="ellipse">
+            <a:avLst/>
+          </a:prstGeom>
+          <a:solidFill>
+            <a:srgbClr val="0B1F33">
+              <a:alpha val="85000"/>
+            </a:srgbClr>
+          </a:solidFill>
+          <a:ln>
+            <a:noFill/>
+          </a:ln>
+        </p:spPr>
+      </p:sp>
+      <p:sp>
+        <p:nvSpPr>
+          <p:cNvPr id="147" name="Motif 147"/>
+          <p:cNvSpPr/>
+          <p:nvPr/>
+        </p:nvSpPr>
+        <p:spPr>
+          <a:xfrm>
+            <a:off x="8124444" y="458114"/>
+            <a:ext cx="137160" cy="137160"/>
+          </a:xfrm>
+          <a:prstGeom prst="ellipse">
+            <a:avLst/>
+          </a:prstGeom>
+          <a:solidFill>
+            <a:srgbClr val="E63946">
+              <a:alpha val="85000"/>
+            </a:srgbClr>
+          </a:solidFill>
+          <a:ln>
+            <a:noFill/>
+          </a:ln>
+        </p:spPr>
+      </p:sp>
+      <p:sp>
+        <p:nvSpPr>
+          <p:cNvPr id="148" name="Motif 148"/>
+          <p:cNvSpPr/>
+          <p:nvPr/>
+        </p:nvSpPr>
+        <p:spPr>
+          <a:xfrm>
+            <a:off x="8448142" y="277063"/>
+            <a:ext cx="82296" cy="82296"/>
+          </a:xfrm>
+          <a:prstGeom prst="ellipse">
+            <a:avLst/>
+          </a:prstGeom>
+          <a:solidFill>
+            <a:srgbClr val="1FA2A6">
+              <a:alpha val="85000"/>
+            </a:srgbClr>
+          </a:solidFill>
+          <a:ln>
+            <a:noFill/>
+          </a:ln>
+        </p:spPr>
+      </p:sp>
+      <p:sp>
+        <p:nvSpPr>
+          <p:cNvPr id="149" name="Motif 149"/>
+          <p:cNvSpPr/>
+          <p:nvPr/>
+        </p:nvSpPr>
+        <p:spPr>
+          <a:xfrm>
+            <a:off x="8603132" y="622706"/>
+            <a:ext cx="93269" cy="93269"/>
+          </a:xfrm>
+          <a:prstGeom prst="ellipse">
+            <a:avLst/>
+          </a:prstGeom>
+          <a:solidFill>
+            <a:srgbClr val="1FA2A6">
+              <a:alpha val="85000"/>
+            </a:srgbClr>
+          </a:solidFill>
+          <a:ln>
+            <a:noFill/>
+          </a:ln>
+        </p:spPr>
+      </p:sp>
       <p:sp>
         <p:nvSpPr>
           <p:cNvPr id="2" name="Text 0"/>
